--- a/slides/datasets-in-10-minutes-numeracy.pptx
+++ b/slides/datasets-in-10-minutes-numeracy.pptx
@@ -6,7 +6,6 @@
   </p:sldMasterIdLst>
   <p:sldIdLst>
     <p:sldId id="256" r:id="rId6"/>
-    <p:sldId id="257" r:id="rId7"/>
     <p:sldId id="258" r:id="rId8"/>
     <p:sldId id="259" r:id="rId9"/>
     <p:sldId id="260" r:id="rId10"/>
@@ -22,19 +21,12 @@
     <p:sldId id="270" r:id="rId20"/>
     <p:sldId id="271" r:id="rId21"/>
     <p:sldId id="272" r:id="rId22"/>
-    <p:sldId id="273" r:id="rId23"/>
     <p:sldId id="274" r:id="rId24"/>
     <p:sldId id="275" r:id="rId25"/>
     <p:sldId id="276" r:id="rId26"/>
-    <p:sldId id="277" r:id="rId27"/>
-    <p:sldId id="278" r:id="rId28"/>
-    <p:sldId id="279" r:id="rId29"/>
-    <p:sldId id="280" r:id="rId30"/>
-    <p:sldId id="281" r:id="rId31"/>
     <p:sldId id="282" r:id="rId32"/>
     <p:sldId id="283" r:id="rId33"/>
     <p:sldId id="284" r:id="rId34"/>
-    <p:sldId id="285" r:id="rId35"/>
     <p:sldId id="286" r:id="rId36"/>
     <p:sldId id="287" r:id="rId37"/>
     <p:sldId id="288" r:id="rId38"/>
@@ -50,14 +42,8 @@
     <p:sldId id="298" r:id="rId48"/>
     <p:sldId id="299" r:id="rId49"/>
     <p:sldId id="300" r:id="rId50"/>
-    <p:sldId id="301" r:id="rId51"/>
-    <p:sldId id="302" r:id="rId52"/>
     <p:sldId id="303" r:id="rId53"/>
-    <p:sldId id="304" r:id="rId54"/>
-    <p:sldId id="305" r:id="rId55"/>
     <p:sldId id="306" r:id="rId56"/>
-    <p:sldId id="307" r:id="rId57"/>
-    <p:sldId id="308" r:id="rId58"/>
   </p:sldIdLst>
   <p:sldSz cx="9144000" cy="5143500" type="screen16x9"/>
   <p:notesSz cx="6858000" cy="9144000"/>
@@ -8645,7 +8631,7 @@
                 <a:ea typeface="Noto Sans CJK JP"/>
                 <a:cs typeface="Noto Sans"/>
               </a:rPr>
-              <a:t>HELMの多項式帰納シナリオ</a:t>
+              <a:t>多項式の規則推論</a:t>
             </a:r>
           </a:p>
           <a:p>
@@ -8673,7 +8659,7 @@
                 <a:ea typeface="Noto Sans CJK JP"/>
                 <a:cs typeface="Noto Sans"/>
               </a:rPr>
-              <a:t>入出力の例から数の規則を推測する</a:t>
+              <a:t>入出力の例から、未知の値を予測する</a:t>
             </a:r>
           </a:p>
         </p:txBody>
@@ -9050,7 +9036,7 @@
                 <a:ea typeface="Noto Sans CJK JP"/>
                 <a:cs typeface="Noto Sans"/>
               </a:rPr>
-              <a:t>[1] HELM v0.3.0の公式生成器をseed=0で実行。Python 3.12 / NumPy 2.3.5。</a:t>
+              <a:t>[1] Stanford CRFM. NumeracyScenario（v0.3.0）。 </a:t>
             </a:r>
           </a:p>
           <a:p>
@@ -9244,7 +9230,7 @@
                 <a:ea typeface="Noto Sans CJK JP"/>
                 <a:cs typeface="Noto Sans"/>
               </a:rPr>
-              <a:t>plane / mode=standard / seed=0 / test[0]</a:t>
+              <a:t>式の種類：plane</a:t>
             </a:r>
           </a:p>
         </p:txBody>
@@ -9298,7 +9284,7 @@
                 <a:ea typeface="Noto Sans CJK JP"/>
                 <a:cs typeface="Noto Sans"/>
               </a:rPr>
-              <a:t>原データ：訓練100件の先頭6件（連続）</a:t>
+              <a:t>学習用100組から6組を抜粋</a:t>
             </a:r>
           </a:p>
         </p:txBody>
@@ -9311,8 +9297,8 @@
         </p:nvSpPr>
         <p:spPr>
           <a:xfrm>
-            <a:off x="548640" y="1965960"/>
-            <a:ext cx="3886200" cy="2304796"/>
+            <a:off x="548640" y="1991360"/>
+            <a:ext cx="3886200" cy="2296330"/>
           </a:xfrm>
           <a:prstGeom prst="rect">
             <a:avLst/>
@@ -9340,7 +9326,7 @@
           </a:fontRef>
         </p:style>
         <p:txBody>
-          <a:bodyPr rtlCol="0" anchor="t" wrap="none" lIns="152400" rIns="152400" tIns="63500" bIns="127000">
+          <a:bodyPr rtlCol="0" anchor="t" wrap="none" lIns="152400" rIns="152400" tIns="38100" bIns="127000">
             <a:noAutofit/>
           </a:bodyPr>
           <a:lstStyle/>
@@ -9612,7 +9598,7 @@
                 <a:ea typeface="Noto Sans CJK JP"/>
                 <a:cs typeface="Noto Sans"/>
               </a:rPr>
-              <a:t>予測対象：testレコードの入力（全文）</a:t>
+              <a:t>予測する入力</a:t>
             </a:r>
           </a:p>
         </p:txBody>
@@ -9626,7 +9612,7 @@
         <p:spPr>
           <a:xfrm>
             <a:off x="4663440" y="1965960"/>
-            <a:ext cx="3931920" cy="541691"/>
+            <a:ext cx="3931920" cy="550157"/>
           </a:xfrm>
           <a:prstGeom prst="rect">
             <a:avLst/>
@@ -9848,7 +9834,7 @@
                 <a:ea typeface="Noto Sans CJK JP"/>
                 <a:cs typeface="Noto Sans"/>
               </a:rPr>
-              <a:t>参照メタデータ（入力には含めない）</a:t>
+              <a:t>正解の計算に使う式</a:t>
             </a:r>
           </a:p>
         </p:txBody>
@@ -9956,7 +9942,7 @@
                 <a:ea typeface="Noto Sans CJK JP"/>
                 <a:cs typeface="Noto Sans"/>
               </a:rPr>
-              <a:t>[1] HELM v0.3.0の公式生成器をseed=0で実行。Python 3.12 / NumPy 2.3.5。</a:t>
+              <a:t>[1] Stanford CRFM. NumeracyScenario（v0.3.0）。 </a:t>
             </a:r>
           </a:p>
           <a:p>
@@ -10101,7 +10087,7 @@
                 <a:ea typeface="Noto Sans CJK JP"/>
                 <a:cs typeface="Noto Sans"/>
               </a:rPr>
-              <a:t>この例はz=4x+4y+1。x=6、y=7を代入すると53になる。</a:t>
+              <a:t>この例を生成した式はz=4x+4y+1。x=6、y=7を代入すると53になる。</a:t>
             </a:r>
           </a:p>
           <a:p>
@@ -10131,7 +10117,7 @@
                 <a:ea typeface="Noto Sans CJK JP"/>
                 <a:cs typeface="Noto Sans"/>
               </a:rPr>
-              <a:t>入力の文字列は「6, 7」、正解の文字列は「53」。モデルは出力する数値だけを生成する。</a:t>
+              <a:t>一つの入力が二つの値を持つため、xとyが出力にどう影響するかを、数値の組から推測する。</a:t>
             </a:r>
           </a:p>
           <a:p>
@@ -10161,7 +10147,7 @@
                 <a:ea typeface="Noto Sans CJK JP"/>
                 <a:cs typeface="Noto Sans"/>
               </a:rPr>
-              <a:t>二つの変数を持つ一次式と、二次式までの4種類を用意している。</a:t>
+              <a:t>一次・二次、1変数・2変数を組み合わせた4種類の式を用意している。</a:t>
             </a:r>
           </a:p>
         </p:txBody>
@@ -10263,7 +10249,7 @@
                 <a:ea typeface="Noto Sans CJK JP"/>
                 <a:cs typeface="Noto Sans"/>
               </a:rPr>
-              <a:t>[1] HELM v0.3.0の公式生成器をseed=0で実行。Python 3.12 / NumPy 2.3.5。</a:t>
+              <a:t>[1] Stanford CRFM. NumeracyScenario（v0.3.0）。 </a:t>
             </a:r>
           </a:p>
           <a:p>
@@ -11709,7 +11695,7 @@
                 <a:ea typeface="Noto Sans CJK JP"/>
                 <a:cs typeface="Noto Sans"/>
               </a:rPr>
-              <a:t>[1] Stanford CRFM. NumeracyScenario, HELM v0.3.0.</a:t>
+              <a:t>[1] Stanford CRFM. NumeracyScenario（v0.3.0）。</a:t>
             </a:r>
             <a:r>
               <a:rPr sz="810" b="0" lang="ja-JP" altLang="en-US">
@@ -11851,7 +11837,7 @@
                 <a:ea typeface="Noto Sans CJK JP"/>
                 <a:cs typeface="Noto Sans"/>
               </a:rPr>
-              <a:t>各関数型に係数の範囲を決め、PythonとNumPyの乱数を同じseedで初期化する。</a:t>
+              <a:t>式の種類ごとに、整数の係数を選ぶ範囲を決める。必要な次数と変数の数を持ち、定数項が0でない式を作る。</a:t>
             </a:r>
           </a:p>
           <a:p>
@@ -11881,7 +11867,7 @@
                 <a:ea typeface="Noto Sans CJK JP"/>
                 <a:cs typeface="Noto Sans"/>
               </a:rPr>
-              <a:t>最高次数、変数の数、非ゼロの定数項を満たす式ができるまで抽選する。</a:t>
+              <a:t>式に整数の入力点を代入し、対応する出力を計算する。学習用と評価用は同じ式から作る。</a:t>
             </a:r>
           </a:p>
           <a:p>
@@ -11911,7 +11897,7 @@
                 <a:ea typeface="Noto Sans CJK JP"/>
                 <a:cs typeface="Noto Sans"/>
               </a:rPr>
-              <a:t>生成した式に入力点を代入し、出力の整数値と、参照式・関数型をレコードへ保存する。</a:t>
+              <a:t>係数を固定した式で試す方法と、範囲内から係数を抽選して別の式を作る方法がある。</a:t>
             </a:r>
           </a:p>
         </p:txBody>
@@ -12013,7 +11999,7 @@
                 <a:ea typeface="Noto Sans CJK JP"/>
                 <a:cs typeface="Noto Sans"/>
               </a:rPr>
-              <a:t>[1] Stanford CRFM. NumeracyScenario, HELM v0.3.0.</a:t>
+              <a:t>[1] Stanford CRFM. NumeracyScenario（v0.3.0）。</a:t>
             </a:r>
             <a:r>
               <a:rPr sz="810" b="0" lang="ja-JP" altLang="en-US">
@@ -12155,7 +12141,7 @@
                 <a:ea typeface="Noto Sans CJK JP"/>
                 <a:cs typeface="Noto Sans"/>
               </a:rPr>
-              <a:t>linearは−100〜100、parabolaは0〜200の整数を使う。二次式の入力は非負にしている。</a:t>
+              <a:t>公開生成器の標準設定では、linearは−100〜100、parabolaは0〜200の整数を使う。二次式の入力は非負にしている。</a:t>
             </a:r>
           </a:p>
           <a:p>
@@ -12185,7 +12171,7 @@
                 <a:ea typeface="Noto Sans CJK JP"/>
                 <a:cs typeface="Noto Sans"/>
               </a:rPr>
-              <a:t>planeはx・yが−10〜10、paraboloidは0〜20。さらに2変数ではx≤yの点だけを残す。</a:t>
+              <a:t>planeは二つの変数が−10〜10、paraboloidは0〜20の整数を使う。どちらもxがy以下となる点を選ぶ。</a:t>
             </a:r>
           </a:p>
           <a:p>
@@ -12215,7 +12201,7 @@
                 <a:ea typeface="Noto Sans CJK JP"/>
                 <a:cs typeface="Noto Sans"/>
               </a:rPr>
-              <a:t>overlap=Trueは訓練とtestの入力範囲を共通にする設定。訓練用と評価用の点は重複しない。</a:t>
+              <a:t>学習用と評価用を同じ領域から選び、同じ入力点が両方に入らないようにする。</a:t>
             </a:r>
           </a:p>
         </p:txBody>
@@ -12317,7 +12303,7 @@
                 <a:ea typeface="Noto Sans CJK JP"/>
                 <a:cs typeface="Noto Sans"/>
               </a:rPr>
-              <a:t>[1] Stanford CRFM. NumeracyScenario, HELM v0.3.0.</a:t>
+              <a:t>[1] Stanford CRFM. NumeracyScenario（v0.3.0）。</a:t>
             </a:r>
             <a:r>
               <a:rPr sz="810" b="0" lang="ja-JP" altLang="en-US">
@@ -12634,7 +12620,7 @@
                 <a:ea typeface="Noto Sans CJK JP"/>
                 <a:cs typeface="Noto Sans"/>
               </a:rPr>
-              <a:t>plane／standard／seed=0。訓練100点、test 100点。候補は231点。</a:t>
+              <a:t>planeの生成例。学習100点、評価100点を、231候補点から選ぶ。</a:t>
             </a:r>
           </a:p>
         </p:txBody>
@@ -12688,7 +12674,7 @@
                 <a:ea typeface="Noto Sans CJK JP"/>
                 <a:cs typeface="Noto Sans"/>
               </a:rPr>
-              <a:t>[1] HELM v0.3.0の公式生成器をseed=0で実行。Python 3.12 / NumPy 2.3.5。</a:t>
+              <a:t>[1] Stanford CRFM. NumeracyScenario（v0.3.0）。 </a:t>
             </a:r>
           </a:p>
           <a:p>
@@ -12713,313 +12699,6 @@
                 <a:ea typeface="Noto Sans CJK JP"/>
                 <a:cs typeface="Noto Sans"/>
                 <a:hlinkClick r:id="rId3"/>
-              </a:rPr>
-              <a:t>https://github.com/stanford-crfm/helm/blob/v0.3.0/src/helm/benchmark/scenarios/numeracy_scenario.py</a:t>
-            </a:r>
-          </a:p>
-        </p:txBody>
-      </p:sp>
-    </p:spTree>
-  </p:cSld>
-  <p:clrMapOvr>
-    <a:masterClrMapping/>
-  </p:clrMapOvr>
-</p:sld>
-</file>
-
-<file path=ppt/slides/slide18.xml><?xml version="1.0" encoding="utf-8"?>
-<p:sld xmlns:a="http://schemas.openxmlformats.org/drawingml/2006/main" xmlns:p="http://schemas.openxmlformats.org/presentationml/2006/main" xmlns:r="http://schemas.openxmlformats.org/officeDocument/2006/relationships">
-  <p:cSld>
-    <p:spTree>
-      <p:nvGrpSpPr>
-        <p:cNvPr id="1" name=""/>
-        <p:cNvGrpSpPr/>
-        <p:nvPr/>
-      </p:nvGrpSpPr>
-      <p:grpSpPr/>
-      <p:sp>
-        <p:nvSpPr>
-          <p:cNvPr id="2" name="Title 1"/>
-          <p:cNvSpPr>
-            <a:spLocks noGrp="1"/>
-          </p:cNvSpPr>
-          <p:nvPr>
-            <p:ph type="title"/>
-          </p:nvPr>
-        </p:nvSpPr>
-        <p:spPr>
-          <a:xfrm>
-            <a:off x="468172" y="650138"/>
-            <a:ext cx="8206740" cy="616305"/>
-          </a:xfrm>
-        </p:spPr>
-        <p:txBody>
-          <a:bodyPr wrap="square" lIns="0" rIns="0" tIns="0" bIns="0">
-            <a:noAutofit/>
-          </a:bodyPr>
-          <a:lstStyle/>
-          <a:p>
-            <a:pPr algn="l">
-              <a:lnSpc>
-                <a:spcPct val="110000"/>
-              </a:lnSpc>
-              <a:buNone/>
-              <a:defRPr sz="2800" b="0">
-                <a:solidFill>
-                  <a:srgbClr val="303437"/>
-                </a:solidFill>
-                <a:latin typeface="Noto Sans"/>
-              </a:defRPr>
-            </a:pPr>
-            <a:r>
-              <a:rPr sz="2800" b="1" lang="ja-JP" altLang="en-US">
-                <a:solidFill>
-                  <a:srgbClr val="303437"/>
-                </a:solidFill>
-                <a:latin typeface="Noto Sans"/>
-                <a:ea typeface="Noto Sans CJK JP"/>
-                <a:cs typeface="Noto Sans"/>
-              </a:rPr>
-              <a:t>100点を見せ、別の100点で確かめる</a:t>
-            </a:r>
-          </a:p>
-        </p:txBody>
-      </p:sp>
-      <p:sp>
-        <p:nvSpPr>
-          <p:cNvPr id="3" name="Text Placeholder 2"/>
-          <p:cNvSpPr>
-            <a:spLocks noGrp="1"/>
-          </p:cNvSpPr>
-          <p:nvPr>
-            <p:ph type="body" idx="1"/>
-          </p:nvPr>
-        </p:nvSpPr>
-        <p:spPr>
-          <a:xfrm>
-            <a:off x="594360" y="1463040"/>
-            <a:ext cx="7955279" cy="3044952"/>
-          </a:xfrm>
-        </p:spPr>
-        <p:txBody>
-          <a:bodyPr wrap="square" tIns="91440" bIns="91440">
-            <a:noAutofit/>
-          </a:bodyPr>
-          <a:lstStyle/>
-          <a:p>
-            <a:pPr marL="457200" indent="-355600">
-              <a:lnSpc>
-                <a:spcPts val="2558"/>
-              </a:lnSpc>
-              <a:spcAft>
-                <a:spcPts val="700"/>
-              </a:spcAft>
-              <a:buSzPct val="61860"/>
-              <a:buFont typeface="Noto Sans CJK JP"/>
-              <a:buChar char="●"/>
-              <a:defRPr sz="2150" b="0">
-                <a:solidFill>
-                  <a:srgbClr val="303437"/>
-                </a:solidFill>
-                <a:latin typeface="Noto Sans"/>
-              </a:defRPr>
-            </a:pPr>
-            <a:r>
-              <a:rPr sz="2150" b="0" lang="ja-JP" altLang="en-US">
-                <a:solidFill>
-                  <a:srgbClr val="303437"/>
-                </a:solidFill>
-                <a:latin typeface="Noto Sans"/>
-                <a:ea typeface="Noto Sans CJK JP"/>
-                <a:cs typeface="Noto Sans"/>
-              </a:rPr>
-              <a:t>各関数について、訓練用とtest用に異なる100点ずつを選ぶ。1変数では201候補点、2変数ではx≤yを満たす231候補点がある。</a:t>
-            </a:r>
-          </a:p>
-          <a:p>
-            <a:pPr marL="457200" indent="-355600">
-              <a:lnSpc>
-                <a:spcPts val="2558"/>
-              </a:lnSpc>
-              <a:spcAft>
-                <a:spcPts val="700"/>
-              </a:spcAft>
-              <a:buSzPct val="61860"/>
-              <a:buFont typeface="Noto Sans CJK JP"/>
-              <a:buChar char="●"/>
-              <a:defRPr sz="2150" b="0">
-                <a:solidFill>
-                  <a:srgbClr val="303437"/>
-                </a:solidFill>
-                <a:latin typeface="Noto Sans"/>
-              </a:defRPr>
-            </a:pPr>
-            <a:r>
-              <a:rPr sz="2150" b="0" lang="ja-JP" altLang="en-US">
-                <a:solidFill>
-                  <a:srgbClr val="303437"/>
-                </a:solidFill>
-                <a:latin typeface="Noto Sans"/>
-                <a:ea typeface="Noto Sans CJK JP"/>
-                <a:cs typeface="Noto Sans"/>
-              </a:rPr>
-              <a:t>今回は各型でseed=0を使い、exampleとstandardの8組、計1,600レコードを生成した。</a:t>
-            </a:r>
-          </a:p>
-          <a:p>
-            <a:pPr marL="457200" indent="-355600">
-              <a:lnSpc>
-                <a:spcPts val="2558"/>
-              </a:lnSpc>
-              <a:spcAft>
-                <a:spcPts val="0"/>
-              </a:spcAft>
-              <a:buSzPct val="61860"/>
-              <a:buFont typeface="Noto Sans CJK JP"/>
-              <a:buChar char="●"/>
-              <a:defRPr sz="2150" b="0">
-                <a:solidFill>
-                  <a:srgbClr val="303437"/>
-                </a:solidFill>
-                <a:latin typeface="Noto Sans"/>
-              </a:defRPr>
-            </a:pPr>
-            <a:r>
-              <a:rPr sz="2150" b="0" lang="ja-JP" altLang="en-US">
-                <a:solidFill>
-                  <a:srgbClr val="303437"/>
-                </a:solidFill>
-                <a:latin typeface="Noto Sans"/>
-                <a:ea typeface="Noto Sans CJK JP"/>
-                <a:cs typeface="Noto Sans"/>
-              </a:rPr>
-              <a:t>全1,600件の正解を参照式へ別途代入して再計算し、生成器の出力と一致することを確認した。</a:t>
-            </a:r>
-          </a:p>
-        </p:txBody>
-      </p:sp>
-      <p:sp>
-        <p:nvSpPr>
-          <p:cNvPr id="4" name="Title 3"/>
-          <p:cNvSpPr>
-            <a:spLocks noGrp="1"/>
-          </p:cNvSpPr>
-          <p:nvPr>
-            <p:ph type="title" idx="2"/>
-          </p:nvPr>
-        </p:nvSpPr>
-        <p:spPr>
-          <a:xfrm>
-            <a:off x="75895" y="0"/>
-            <a:ext cx="8115300" cy="480060"/>
-          </a:xfrm>
-        </p:spPr>
-        <p:txBody>
-          <a:bodyPr wrap="square" lIns="0" rIns="0" tIns="0" bIns="0" anchor="ctr">
-            <a:noAutofit/>
-          </a:bodyPr>
-          <a:lstStyle/>
-          <a:p>
-            <a:pPr algn="l">
-              <a:lnSpc>
-                <a:spcPct val="110000"/>
-              </a:lnSpc>
-              <a:buNone/>
-              <a:defRPr sz="1400" b="0">
-                <a:solidFill>
-                  <a:srgbClr val="303437"/>
-                </a:solidFill>
-                <a:latin typeface="Noto Sans"/>
-              </a:defRPr>
-            </a:pPr>
-            <a:r>
-              <a:rPr sz="1400" b="1" lang="ja-JP" altLang="en-US">
-                <a:solidFill>
-                  <a:srgbClr val="FFFEF8"/>
-                </a:solidFill>
-                <a:latin typeface="Noto Sans"/>
-                <a:ea typeface="Noto Sans CJK JP"/>
-                <a:cs typeface="Noto Sans"/>
-              </a:rPr>
-              <a:t>2. 多項式と入力点を生成する</a:t>
-            </a:r>
-          </a:p>
-        </p:txBody>
-      </p:sp>
-      <p:sp>
-        <p:nvSpPr>
-          <p:cNvPr id="5" name="sources"/>
-          <p:cNvSpPr txBox="1"/>
-          <p:nvPr/>
-        </p:nvSpPr>
-        <p:spPr>
-          <a:xfrm>
-            <a:off x="502920" y="4700016"/>
-            <a:ext cx="8183879" cy="530352"/>
-          </a:xfrm>
-          <a:prstGeom prst="rect">
-            <a:avLst/>
-          </a:prstGeom>
-          <a:noFill/>
-        </p:spPr>
-        <p:txBody>
-          <a:bodyPr wrap="square" lIns="0" rIns="0" tIns="0" bIns="0">
-            <a:noAutofit/>
-          </a:bodyPr>
-          <a:lstStyle/>
-          <a:p>
-            <a:pPr algn="l">
-              <a:lnSpc>
-                <a:spcPts val="940"/>
-              </a:lnSpc>
-              <a:spcBef>
-                <a:spcPts val="0"/>
-              </a:spcBef>
-              <a:spcAft>
-                <a:spcPts val="140"/>
-              </a:spcAft>
-              <a:buNone/>
-              <a:defRPr sz="810" b="0">
-                <a:solidFill>
-                  <a:srgbClr val="303437"/>
-                </a:solidFill>
-                <a:latin typeface="Noto Sans"/>
-              </a:defRPr>
-            </a:pPr>
-            <a:r>
-              <a:rPr sz="810" b="0" lang="ja-JP" altLang="en-US">
-                <a:solidFill>
-                  <a:srgbClr val="626669"/>
-                </a:solidFill>
-                <a:latin typeface="Noto Sans"/>
-                <a:ea typeface="Noto Sans CJK JP"/>
-                <a:cs typeface="Noto Sans"/>
-              </a:rPr>
-              <a:t>[1] HELM v0.3.0の公式生成器をseed=0で実行。Python 3.12 / NumPy 2.3.5。</a:t>
-            </a:r>
-          </a:p>
-          <a:p>
-            <a:pPr>
-              <a:lnSpc>
-                <a:spcPts val="940"/>
-              </a:lnSpc>
-              <a:buNone/>
-              <a:defRPr sz="810" b="0">
-                <a:solidFill>
-                  <a:srgbClr val="303437"/>
-                </a:solidFill>
-                <a:latin typeface="Noto Sans"/>
-              </a:defRPr>
-            </a:pPr>
-            <a:r>
-              <a:rPr sz="810" b="0" lang="ja-JP" altLang="en-US">
-                <a:solidFill>
-                  <a:srgbClr val="626669"/>
-                </a:solidFill>
-                <a:latin typeface="Noto Sans"/>
-                <a:ea typeface="Noto Sans CJK JP"/>
-                <a:cs typeface="Noto Sans"/>
-                <a:hlinkClick r:id="rId2"/>
               </a:rPr>
               <a:t>https://github.com/stanford-crfm/helm/blob/v0.3.0/src/helm/benchmark/scenarios/numeracy_scenario.py</a:t>
             </a:r>
@@ -13858,7 +13537,7 @@
                 <a:ea typeface="Noto Sans CJK JP"/>
                 <a:cs typeface="Noto Sans"/>
               </a:rPr>
-              <a:t>各型・seed=0を実行して確認。function内の生成処理はTODOとreturn []が残る。</a:t>
+              <a:t>公開生成器v0.3.0。functionモードの生成処理は未実装である。</a:t>
             </a:r>
           </a:p>
         </p:txBody>
@@ -13912,7 +13591,7 @@
                 <a:ea typeface="Noto Sans CJK JP"/>
                 <a:cs typeface="Noto Sans"/>
               </a:rPr>
-              <a:t>[1] Stanford CRFM. NumeracyScenario, HELM v0.3.0.</a:t>
+              <a:t>[1] Stanford CRFM. NumeracyScenario（v0.3.0）。</a:t>
             </a:r>
             <a:r>
               <a:rPr sz="810" b="0" lang="ja-JP" altLang="en-US">
@@ -13936,221 +13615,6 @@
                 <a:hlinkClick r:id="rId2"/>
               </a:rPr>
               <a:t>https://github.com/stanford-crfm/helm/blob/v0.3.0/src/helm/benchmark/scenarios/numeracy_scenario.py</a:t>
-            </a:r>
-          </a:p>
-        </p:txBody>
-      </p:sp>
-    </p:spTree>
-  </p:cSld>
-  <p:clrMapOvr>
-    <a:masterClrMapping/>
-  </p:clrMapOvr>
-</p:sld>
-</file>
-
-<file path=ppt/slides/slide2.xml><?xml version="1.0" encoding="utf-8"?>
-<p:sld xmlns:a="http://schemas.openxmlformats.org/drawingml/2006/main" xmlns:p="http://schemas.openxmlformats.org/presentationml/2006/main" xmlns:r="http://schemas.openxmlformats.org/officeDocument/2006/relationships">
-  <p:cSld>
-    <p:spTree>
-      <p:nvGrpSpPr>
-        <p:cNvPr id="1" name=""/>
-        <p:cNvGrpSpPr/>
-        <p:nvPr/>
-      </p:nvGrpSpPr>
-      <p:grpSpPr/>
-      <p:sp>
-        <p:nvSpPr>
-          <p:cNvPr id="2" name="Title 1"/>
-          <p:cNvSpPr>
-            <a:spLocks noGrp="1"/>
-          </p:cNvSpPr>
-          <p:nvPr>
-            <p:ph type="title"/>
-          </p:nvPr>
-        </p:nvSpPr>
-        <p:spPr>
-          <a:xfrm>
-            <a:off x="468172" y="650138"/>
-            <a:ext cx="8206740" cy="616305"/>
-          </a:xfrm>
-        </p:spPr>
-        <p:txBody>
-          <a:bodyPr wrap="square" lIns="0" rIns="0" tIns="0" bIns="0">
-            <a:noAutofit/>
-          </a:bodyPr>
-          <a:lstStyle/>
-          <a:p>
-            <a:pPr algn="l">
-              <a:lnSpc>
-                <a:spcPct val="110000"/>
-              </a:lnSpc>
-              <a:buNone/>
-              <a:defRPr sz="2800" b="0">
-                <a:solidFill>
-                  <a:srgbClr val="303437"/>
-                </a:solidFill>
-                <a:latin typeface="Noto Sans"/>
-              </a:defRPr>
-            </a:pPr>
-            <a:r>
-              <a:rPr sz="2800" b="1" lang="ja-JP" altLang="en-US">
-                <a:solidFill>
-                  <a:srgbClr val="303437"/>
-                </a:solidFill>
-                <a:latin typeface="Noto Sans"/>
-                <a:ea typeface="Noto Sans CJK JP"/>
-                <a:cs typeface="Noto Sans"/>
-              </a:rPr>
-              <a:t>公式サイト：HELM Classic</a:t>
-            </a:r>
-          </a:p>
-        </p:txBody>
-      </p:sp>
-      <p:sp>
-        <p:nvSpPr>
-          <p:cNvPr id="3" name="Title 2"/>
-          <p:cNvSpPr>
-            <a:spLocks noGrp="1"/>
-          </p:cNvSpPr>
-          <p:nvPr>
-            <p:ph type="title" idx="2"/>
-          </p:nvPr>
-        </p:nvSpPr>
-        <p:spPr>
-          <a:xfrm>
-            <a:off x="75895" y="0"/>
-            <a:ext cx="8115300" cy="480060"/>
-          </a:xfrm>
-        </p:spPr>
-        <p:txBody>
-          <a:bodyPr wrap="square" lIns="0" rIns="0" tIns="0" bIns="0" anchor="ctr">
-            <a:noAutofit/>
-          </a:bodyPr>
-          <a:lstStyle/>
-          <a:p>
-            <a:pPr algn="l">
-              <a:lnSpc>
-                <a:spcPct val="110000"/>
-              </a:lnSpc>
-              <a:buNone/>
-              <a:defRPr sz="1400" b="0">
-                <a:solidFill>
-                  <a:srgbClr val="303437"/>
-                </a:solidFill>
-                <a:latin typeface="Noto Sans"/>
-              </a:defRPr>
-            </a:pPr>
-            <a:r>
-              <a:rPr sz="1400" b="1" lang="ja-JP" altLang="en-US">
-                <a:solidFill>
-                  <a:srgbClr val="FFFEF8"/>
-                </a:solidFill>
-                <a:latin typeface="Noto Sans"/>
-                <a:ea typeface="Noto Sans CJK JP"/>
-                <a:cs typeface="Noto Sans"/>
-              </a:rPr>
-              <a:t>HELM Classic</a:t>
-            </a:r>
-          </a:p>
-        </p:txBody>
-      </p:sp>
-      <p:pic>
-        <p:nvPicPr>
-          <p:cNvPr id="4" name="Picture 3" descr="official-site.png"/>
-          <p:cNvPicPr>
-            <a:picLocks noChangeAspect="1"/>
-          </p:cNvPicPr>
-          <p:nvPr/>
-        </p:nvPicPr>
-        <p:blipFill>
-          <a:blip r:embed="rId2"/>
-          <a:stretch>
-            <a:fillRect/>
-          </a:stretch>
-        </p:blipFill>
-        <p:spPr>
-          <a:xfrm>
-            <a:off x="1815084" y="1481328"/>
-            <a:ext cx="5513832" cy="3063240"/>
-          </a:xfrm>
-          <a:prstGeom prst="rect">
-            <a:avLst/>
-          </a:prstGeom>
-        </p:spPr>
-      </p:pic>
-      <p:sp>
-        <p:nvSpPr>
-          <p:cNvPr id="5" name="sources"/>
-          <p:cNvSpPr txBox="1"/>
-          <p:nvPr/>
-        </p:nvSpPr>
-        <p:spPr>
-          <a:xfrm>
-            <a:off x="502920" y="4700016"/>
-            <a:ext cx="8183879" cy="530352"/>
-          </a:xfrm>
-          <a:prstGeom prst="rect">
-            <a:avLst/>
-          </a:prstGeom>
-          <a:noFill/>
-        </p:spPr>
-        <p:txBody>
-          <a:bodyPr wrap="square" lIns="0" rIns="0" tIns="0" bIns="0">
-            <a:noAutofit/>
-          </a:bodyPr>
-          <a:lstStyle/>
-          <a:p>
-            <a:pPr algn="l">
-              <a:lnSpc>
-                <a:spcPts val="940"/>
-              </a:lnSpc>
-              <a:spcBef>
-                <a:spcPts val="0"/>
-              </a:spcBef>
-              <a:spcAft>
-                <a:spcPts val="140"/>
-              </a:spcAft>
-              <a:buNone/>
-              <a:defRPr sz="810" b="0">
-                <a:solidFill>
-                  <a:srgbClr val="303437"/>
-                </a:solidFill>
-                <a:latin typeface="Noto Sans"/>
-              </a:defRPr>
-            </a:pPr>
-            <a:r>
-              <a:rPr sz="810" b="0" lang="ja-JP" altLang="en-US">
-                <a:solidFill>
-                  <a:srgbClr val="626669"/>
-                </a:solidFill>
-                <a:latin typeface="Noto Sans"/>
-                <a:ea typeface="Noto Sans CJK JP"/>
-                <a:cs typeface="Noto Sans"/>
-              </a:rPr>
-              <a:t>[1] Stanford CRFM. HELM Classic v0.4.0 (2023-11-17).</a:t>
-            </a:r>
-            <a:r>
-              <a:rPr sz="810" b="0" lang="ja-JP" altLang="en-US">
-                <a:solidFill>
-                  <a:srgbClr val="626669"/>
-                </a:solidFill>
-                <a:latin typeface="Noto Sans"/>
-                <a:ea typeface="Noto Sans CJK JP"/>
-                <a:cs typeface="Noto Sans"/>
-              </a:rPr>
-              <a:t>  </a:t>
-            </a:r>
-            <a:r>
-              <a:rPr sz="810" b="0" lang="ja-JP" altLang="en-US">
-                <a:solidFill>
-                  <a:srgbClr val="626669"/>
-                </a:solidFill>
-                <a:latin typeface="Noto Sans"/>
-                <a:ea typeface="Noto Sans CJK JP"/>
-                <a:cs typeface="Noto Sans"/>
-                <a:hlinkClick r:id="rId3"/>
-              </a:rPr>
-              <a:t>https://crfm.stanford.edu/helm/classic/v0.4.0/</a:t>
             </a:r>
           </a:p>
         </p:txBody>
@@ -14216,7 +13680,7 @@
                 <a:ea typeface="Noto Sans CJK JP"/>
                 <a:cs typeface="Noto Sans"/>
               </a:rPr>
-              <a:t>3. 数値の採点と公開実行</a:t>
+              <a:t>3. 予測値と正解を比べる</a:t>
             </a:r>
           </a:p>
         </p:txBody>
@@ -14264,7 +13728,7 @@
                 <a:ea typeface="Noto Sans CJK JP"/>
                 <a:cs typeface="Noto Sans"/>
               </a:rPr>
-              <a:t>3. 数値の採点と公開実行</a:t>
+              <a:t>3. 予測値と正解を比べる</a:t>
             </a:r>
           </a:p>
         </p:txBody>
@@ -14330,7 +13794,7 @@
                 <a:ea typeface="Noto Sans CJK JP"/>
                 <a:cs typeface="Noto Sans"/>
               </a:rPr>
-              <a:t>正解の文字列と数値のずれを採点する</a:t>
+              <a:t>正答率と、予測値のずれで評価する</a:t>
             </a:r>
           </a:p>
         </p:txBody>
@@ -14383,7 +13847,7 @@
                 <a:ea typeface="Noto Sans CJK JP"/>
                 <a:cs typeface="Noto Sans"/>
               </a:rPr>
-              <a:t>既定ではexact_match、正規化してから比べるquasi_exact_match、絶対誤差を測るabsolute_value_differenceを使う。</a:t>
+              <a:t>予測した整数が正解と一致する割合で、規則を正しく適用できたかを見る。数値としてどれほど近いかは、予測値と正解値の差の絶対値で測れる。</a:t>
             </a:r>
           </a:p>
           <a:p>
@@ -14413,7 +13877,7 @@
                 <a:ea typeface="Noto Sans CJK JP"/>
                 <a:cs typeface="Noto Sans"/>
               </a:rPr>
-              <a:t>exact_matchは正解文字列と一致すれば1、違えば0。absolute_value_differenceは、整数として解釈した予測値と正解値の差の絶対値。</a:t>
+              <a:t>絶対誤差 = |予測値 − 正解値|</a:t>
             </a:r>
           </a:p>
           <a:p>
@@ -14443,7 +13907,7 @@
                 <a:ea typeface="Noto Sans CJK JP"/>
                 <a:cs typeface="Noto Sans"/>
               </a:rPr>
-              <a:t>入力ごとの値を集計する。絶対誤差は小さいほどよく、完全に一致する予測なら0になる。</a:t>
+              <a:t>実例1の正解64に対して65を出力すると、一致せず、絶対誤差は1になる。出力の大きさが式ごとに異なるため、式の種類や入力範囲と合わせて評価する。</a:t>
             </a:r>
           </a:p>
         </p:txBody>
@@ -14491,7 +13955,7 @@
                 <a:ea typeface="Noto Sans CJK JP"/>
                 <a:cs typeface="Noto Sans"/>
               </a:rPr>
-              <a:t>3. 数値の採点と公開実行</a:t>
+              <a:t>3. 予測値と正解を比べる</a:t>
             </a:r>
           </a:p>
         </p:txBody>
@@ -14545,7 +14009,7 @@
                 <a:ea typeface="Noto Sans CJK JP"/>
                 <a:cs typeface="Noto Sans"/>
               </a:rPr>
-              <a:t>[1] Stanford CRFM. get_numeracy_spec, HELM v0.3.0.</a:t>
+              <a:t>[1] Stanford CRFM. get_numeracy_spec（v0.3.0）。</a:t>
             </a:r>
             <a:r>
               <a:rPr sz="810" b="0" lang="ja-JP" altLang="en-US">
@@ -14596,7 +14060,7 @@
                 <a:ea typeface="Noto Sans CJK JP"/>
                 <a:cs typeface="Noto Sans"/>
               </a:rPr>
-              <a:t>[2] Stanford CRFM. BasicMetric, HELM v0.3.0.</a:t>
+              <a:t>[2] Stanford CRFM. BasicMetric（v0.3.0）。</a:t>
             </a:r>
             <a:r>
               <a:rPr sz="810" b="0" lang="ja-JP" altLang="en-US">
@@ -14620,3152 +14084,6 @@
                 <a:hlinkClick r:id="rId3"/>
               </a:rPr>
               <a:t>https://github.com/stanford-crfm/helm/blob/v0.3.0/src/helm/benchmark/metrics/basic_metrics.py</a:t>
-            </a:r>
-          </a:p>
-        </p:txBody>
-      </p:sp>
-    </p:spTree>
-  </p:cSld>
-  <p:clrMapOvr>
-    <a:masterClrMapping/>
-  </p:clrMapOvr>
-</p:sld>
-</file>
-
-<file path=ppt/slides/slide22.xml><?xml version="1.0" encoding="utf-8"?>
-<p:sld xmlns:a="http://schemas.openxmlformats.org/drawingml/2006/main" xmlns:p="http://schemas.openxmlformats.org/presentationml/2006/main" xmlns:r="http://schemas.openxmlformats.org/officeDocument/2006/relationships">
-  <p:cSld>
-    <p:spTree>
-      <p:nvGrpSpPr>
-        <p:cNvPr id="1" name=""/>
-        <p:cNvGrpSpPr/>
-        <p:nvPr/>
-      </p:nvGrpSpPr>
-      <p:grpSpPr/>
-      <p:sp>
-        <p:nvSpPr>
-          <p:cNvPr id="2" name="Title 1"/>
-          <p:cNvSpPr>
-            <a:spLocks noGrp="1"/>
-          </p:cNvSpPr>
-          <p:nvPr>
-            <p:ph type="title"/>
-          </p:nvPr>
-        </p:nvSpPr>
-        <p:spPr>
-          <a:xfrm>
-            <a:off x="468172" y="650138"/>
-            <a:ext cx="8206740" cy="616305"/>
-          </a:xfrm>
-        </p:spPr>
-        <p:txBody>
-          <a:bodyPr wrap="square" lIns="0" rIns="0" tIns="0" bIns="0">
-            <a:noAutofit/>
-          </a:bodyPr>
-          <a:lstStyle/>
-          <a:p>
-            <a:pPr algn="l">
-              <a:lnSpc>
-                <a:spcPct val="110000"/>
-              </a:lnSpc>
-              <a:buNone/>
-              <a:defRPr sz="2800" b="0">
-                <a:solidFill>
-                  <a:srgbClr val="303437"/>
-                </a:solidFill>
-                <a:latin typeface="Noto Sans"/>
-              </a:defRPr>
-            </a:pPr>
-            <a:r>
-              <a:rPr sz="2800" b="1" lang="ja-JP" altLang="en-US">
-                <a:solidFill>
-                  <a:srgbClr val="303437"/>
-                </a:solidFill>
-                <a:latin typeface="Noto Sans"/>
-                <a:ea typeface="Noto Sans CJK JP"/>
-                <a:cs typeface="Noto Sans"/>
-              </a:rPr>
-              <a:t>同じ正解64に対する出力の採点</a:t>
-            </a:r>
-          </a:p>
-        </p:txBody>
-      </p:sp>
-      <p:sp>
-        <p:nvSpPr>
-          <p:cNvPr id="3" name="Title 2"/>
-          <p:cNvSpPr>
-            <a:spLocks noGrp="1"/>
-          </p:cNvSpPr>
-          <p:nvPr>
-            <p:ph type="title" idx="2"/>
-          </p:nvPr>
-        </p:nvSpPr>
-        <p:spPr>
-          <a:xfrm>
-            <a:off x="75895" y="0"/>
-            <a:ext cx="8115300" cy="480060"/>
-          </a:xfrm>
-        </p:spPr>
-        <p:txBody>
-          <a:bodyPr wrap="square" lIns="0" rIns="0" tIns="0" bIns="0" anchor="ctr">
-            <a:noAutofit/>
-          </a:bodyPr>
-          <a:lstStyle/>
-          <a:p>
-            <a:pPr algn="l">
-              <a:lnSpc>
-                <a:spcPct val="110000"/>
-              </a:lnSpc>
-              <a:buNone/>
-              <a:defRPr sz="1400" b="0">
-                <a:solidFill>
-                  <a:srgbClr val="303437"/>
-                </a:solidFill>
-                <a:latin typeface="Noto Sans"/>
-              </a:defRPr>
-            </a:pPr>
-            <a:r>
-              <a:rPr sz="1400" b="1" lang="ja-JP" altLang="en-US">
-                <a:solidFill>
-                  <a:srgbClr val="FFFEF8"/>
-                </a:solidFill>
-                <a:latin typeface="Noto Sans"/>
-                <a:ea typeface="Noto Sans CJK JP"/>
-                <a:cs typeface="Noto Sans"/>
-              </a:rPr>
-              <a:t>3. 数値の採点と公開実行</a:t>
-            </a:r>
-          </a:p>
-        </p:txBody>
-      </p:sp>
-      <p:graphicFrame>
-        <p:nvGraphicFramePr>
-          <p:cNvPr id="4" name="Table 3"/>
-          <p:cNvGraphicFramePr>
-            <a:graphicFrameLocks noGrp="1"/>
-          </p:cNvGraphicFramePr>
-          <p:nvPr/>
-        </p:nvGraphicFramePr>
-        <p:xfrm>
-          <a:off x="548640" y="1508760"/>
-          <a:ext cx="8046720" cy="2103120"/>
-        </p:xfrm>
-        <a:graphic>
-          <a:graphicData uri="http://schemas.openxmlformats.org/drawingml/2006/table">
-            <a:tbl>
-              <a:tblPr firstRow="0" bandRow="0"/>
-              <a:tblGrid>
-                <a:gridCol w="1554480"/>
-                <a:gridCol w="1920240"/>
-                <a:gridCol w="2560320"/>
-                <a:gridCol w="2011680"/>
-              </a:tblGrid>
-              <a:tr h="420624">
-                <a:tc>
-                  <a:txBody>
-                    <a:bodyPr wrap="square">
-                      <a:noAutofit/>
-                    </a:bodyPr>
-                    <a:lstStyle/>
-                    <a:p>
-                      <a:pPr algn="l">
-                        <a:lnSpc>
-                          <a:spcPts val="2185"/>
-                        </a:lnSpc>
-                        <a:buNone/>
-                        <a:defRPr sz="1900" b="0">
-                          <a:solidFill>
-                            <a:srgbClr val="303437"/>
-                          </a:solidFill>
-                          <a:latin typeface="Noto Sans"/>
-                        </a:defRPr>
-                      </a:pPr>
-                      <a:r>
-                        <a:rPr sz="1900" b="0" lang="ja-JP" altLang="en-US">
-                          <a:solidFill>
-                            <a:srgbClr val="303437"/>
-                          </a:solidFill>
-                          <a:latin typeface="Noto Sans"/>
-                          <a:ea typeface="Noto Sans CJK JP"/>
-                          <a:cs typeface="Noto Sans"/>
-                        </a:rPr>
-                        <a:t>出力</a:t>
-                      </a:r>
-                    </a:p>
-                  </a:txBody>
-                  <a:tcPr marL="63500" marR="63500" marT="38100" marB="38100" anchor="ctr">
-                    <a:lnL w="7620">
-                      <a:noFill/>
-                    </a:lnL>
-                    <a:lnR w="7620">
-                      <a:noFill/>
-                    </a:lnR>
-                    <a:lnT w="15240">
-                      <a:solidFill>
-                        <a:srgbClr val="626669"/>
-                      </a:solidFill>
-                      <a:prstDash val="solid"/>
-                    </a:lnT>
-                    <a:lnB w="7620">
-                      <a:solidFill>
-                        <a:srgbClr val="626669"/>
-                      </a:solidFill>
-                      <a:prstDash val="solid"/>
-                    </a:lnB>
-                    <a:solidFill>
-                      <a:srgbClr val="FFFEF8"/>
-                    </a:solidFill>
-                  </a:tcPr>
-                </a:tc>
-                <a:tc>
-                  <a:txBody>
-                    <a:bodyPr wrap="square">
-                      <a:noAutofit/>
-                    </a:bodyPr>
-                    <a:lstStyle/>
-                    <a:p>
-                      <a:pPr algn="r">
-                        <a:lnSpc>
-                          <a:spcPts val="2185"/>
-                        </a:lnSpc>
-                        <a:buNone/>
-                        <a:defRPr sz="1900" b="0">
-                          <a:solidFill>
-                            <a:srgbClr val="303437"/>
-                          </a:solidFill>
-                          <a:latin typeface="Noto Sans"/>
-                        </a:defRPr>
-                      </a:pPr>
-                      <a:r>
-                        <a:rPr sz="1900" b="0" lang="ja-JP" altLang="en-US">
-                          <a:solidFill>
-                            <a:srgbClr val="303437"/>
-                          </a:solidFill>
-                          <a:latin typeface="Noto Sans"/>
-                          <a:ea typeface="Noto Sans CJK JP"/>
-                          <a:cs typeface="Noto Sans"/>
-                        </a:rPr>
-                        <a:t>完全一致</a:t>
-                      </a:r>
-                    </a:p>
-                  </a:txBody>
-                  <a:tcPr marL="63500" marR="63500" marT="38100" marB="38100" anchor="ctr">
-                    <a:lnL w="7620">
-                      <a:noFill/>
-                    </a:lnL>
-                    <a:lnR w="7620">
-                      <a:noFill/>
-                    </a:lnR>
-                    <a:lnT w="15240">
-                      <a:solidFill>
-                        <a:srgbClr val="626669"/>
-                      </a:solidFill>
-                      <a:prstDash val="solid"/>
-                    </a:lnT>
-                    <a:lnB w="7620">
-                      <a:solidFill>
-                        <a:srgbClr val="626669"/>
-                      </a:solidFill>
-                      <a:prstDash val="solid"/>
-                    </a:lnB>
-                    <a:solidFill>
-                      <a:srgbClr val="FFFEF8"/>
-                    </a:solidFill>
-                  </a:tcPr>
-                </a:tc>
-                <a:tc>
-                  <a:txBody>
-                    <a:bodyPr wrap="square">
-                      <a:noAutofit/>
-                    </a:bodyPr>
-                    <a:lstStyle/>
-                    <a:p>
-                      <a:pPr algn="r">
-                        <a:lnSpc>
-                          <a:spcPts val="2185"/>
-                        </a:lnSpc>
-                        <a:buNone/>
-                        <a:defRPr sz="1900" b="0">
-                          <a:solidFill>
-                            <a:srgbClr val="303437"/>
-                          </a:solidFill>
-                          <a:latin typeface="Noto Sans"/>
-                        </a:defRPr>
-                      </a:pPr>
-                      <a:r>
-                        <a:rPr sz="1900" b="0" lang="ja-JP" altLang="en-US">
-                          <a:solidFill>
-                            <a:srgbClr val="303437"/>
-                          </a:solidFill>
-                          <a:latin typeface="Noto Sans"/>
-                          <a:ea typeface="Noto Sans CJK JP"/>
-                          <a:cs typeface="Noto Sans"/>
-                        </a:rPr>
-                        <a:t>正規化後の一致</a:t>
-                      </a:r>
-                    </a:p>
-                  </a:txBody>
-                  <a:tcPr marL="63500" marR="63500" marT="38100" marB="38100" anchor="ctr">
-                    <a:lnL w="7620">
-                      <a:noFill/>
-                    </a:lnL>
-                    <a:lnR w="7620">
-                      <a:noFill/>
-                    </a:lnR>
-                    <a:lnT w="15240">
-                      <a:solidFill>
-                        <a:srgbClr val="626669"/>
-                      </a:solidFill>
-                      <a:prstDash val="solid"/>
-                    </a:lnT>
-                    <a:lnB w="7620">
-                      <a:solidFill>
-                        <a:srgbClr val="626669"/>
-                      </a:solidFill>
-                      <a:prstDash val="solid"/>
-                    </a:lnB>
-                    <a:solidFill>
-                      <a:srgbClr val="FFFEF8"/>
-                    </a:solidFill>
-                  </a:tcPr>
-                </a:tc>
-                <a:tc>
-                  <a:txBody>
-                    <a:bodyPr wrap="square">
-                      <a:noAutofit/>
-                    </a:bodyPr>
-                    <a:lstStyle/>
-                    <a:p>
-                      <a:pPr algn="r">
-                        <a:lnSpc>
-                          <a:spcPts val="2185"/>
-                        </a:lnSpc>
-                        <a:buNone/>
-                        <a:defRPr sz="1900" b="0">
-                          <a:solidFill>
-                            <a:srgbClr val="303437"/>
-                          </a:solidFill>
-                          <a:latin typeface="Noto Sans"/>
-                        </a:defRPr>
-                      </a:pPr>
-                      <a:r>
-                        <a:rPr sz="1900" b="0" lang="ja-JP" altLang="en-US">
-                          <a:solidFill>
-                            <a:srgbClr val="303437"/>
-                          </a:solidFill>
-                          <a:latin typeface="Noto Sans"/>
-                          <a:ea typeface="Noto Sans CJK JP"/>
-                          <a:cs typeface="Noto Sans"/>
-                        </a:rPr>
-                        <a:t>絶対誤差</a:t>
-                      </a:r>
-                    </a:p>
-                  </a:txBody>
-                  <a:tcPr marL="63500" marR="63500" marT="38100" marB="38100" anchor="ctr">
-                    <a:lnL w="7620">
-                      <a:noFill/>
-                    </a:lnL>
-                    <a:lnR w="7620">
-                      <a:noFill/>
-                    </a:lnR>
-                    <a:lnT w="15240">
-                      <a:solidFill>
-                        <a:srgbClr val="626669"/>
-                      </a:solidFill>
-                      <a:prstDash val="solid"/>
-                    </a:lnT>
-                    <a:lnB w="7620">
-                      <a:solidFill>
-                        <a:srgbClr val="626669"/>
-                      </a:solidFill>
-                      <a:prstDash val="solid"/>
-                    </a:lnB>
-                    <a:solidFill>
-                      <a:srgbClr val="FFFEF8"/>
-                    </a:solidFill>
-                  </a:tcPr>
-                </a:tc>
-              </a:tr>
-              <a:tr h="420624">
-                <a:tc>
-                  <a:txBody>
-                    <a:bodyPr wrap="square">
-                      <a:noAutofit/>
-                    </a:bodyPr>
-                    <a:lstStyle/>
-                    <a:p>
-                      <a:pPr algn="l">
-                        <a:lnSpc>
-                          <a:spcPts val="2185"/>
-                        </a:lnSpc>
-                        <a:buNone/>
-                        <a:defRPr sz="1900" b="0">
-                          <a:solidFill>
-                            <a:srgbClr val="303437"/>
-                          </a:solidFill>
-                          <a:latin typeface="Noto Sans"/>
-                        </a:defRPr>
-                      </a:pPr>
-                      <a:r>
-                        <a:rPr sz="1900" b="0" lang="ja-JP" altLang="en-US">
-                          <a:solidFill>
-                            <a:srgbClr val="303437"/>
-                          </a:solidFill>
-                          <a:latin typeface="Noto Sans"/>
-                          <a:ea typeface="Noto Sans CJK JP"/>
-                          <a:cs typeface="Noto Sans"/>
-                        </a:rPr>
-                        <a:t>64</a:t>
-                      </a:r>
-                    </a:p>
-                  </a:txBody>
-                  <a:tcPr marL="63500" marR="63500" marT="38100" marB="38100" anchor="ctr">
-                    <a:lnL w="7620">
-                      <a:noFill/>
-                    </a:lnL>
-                    <a:lnR w="7620">
-                      <a:noFill/>
-                    </a:lnR>
-                    <a:lnT w="7620">
-                      <a:solidFill>
-                        <a:srgbClr val="626669"/>
-                      </a:solidFill>
-                      <a:prstDash val="solid"/>
-                    </a:lnT>
-                    <a:lnB w="7620">
-                      <a:noFill/>
-                    </a:lnB>
-                    <a:solidFill>
-                      <a:srgbClr val="FFFEF8"/>
-                    </a:solidFill>
-                  </a:tcPr>
-                </a:tc>
-                <a:tc>
-                  <a:txBody>
-                    <a:bodyPr wrap="square">
-                      <a:noAutofit/>
-                    </a:bodyPr>
-                    <a:lstStyle/>
-                    <a:p>
-                      <a:pPr algn="r">
-                        <a:lnSpc>
-                          <a:spcPts val="2185"/>
-                        </a:lnSpc>
-                        <a:buNone/>
-                        <a:defRPr sz="1900" b="0">
-                          <a:solidFill>
-                            <a:srgbClr val="303437"/>
-                          </a:solidFill>
-                          <a:latin typeface="Noto Sans"/>
-                        </a:defRPr>
-                      </a:pPr>
-                      <a:r>
-                        <a:rPr sz="1900" b="0" lang="ja-JP" altLang="en-US">
-                          <a:solidFill>
-                            <a:srgbClr val="303437"/>
-                          </a:solidFill>
-                          <a:latin typeface="Noto Sans"/>
-                          <a:ea typeface="Noto Sans CJK JP"/>
-                          <a:cs typeface="Noto Sans"/>
-                        </a:rPr>
-                        <a:t>1</a:t>
-                      </a:r>
-                    </a:p>
-                  </a:txBody>
-                  <a:tcPr marL="63500" marR="63500" marT="38100" marB="38100" anchor="ctr">
-                    <a:lnL w="7620">
-                      <a:noFill/>
-                    </a:lnL>
-                    <a:lnR w="7620">
-                      <a:noFill/>
-                    </a:lnR>
-                    <a:lnT w="7620">
-                      <a:solidFill>
-                        <a:srgbClr val="626669"/>
-                      </a:solidFill>
-                      <a:prstDash val="solid"/>
-                    </a:lnT>
-                    <a:lnB w="7620">
-                      <a:noFill/>
-                    </a:lnB>
-                    <a:solidFill>
-                      <a:srgbClr val="FFFEF8"/>
-                    </a:solidFill>
-                  </a:tcPr>
-                </a:tc>
-                <a:tc>
-                  <a:txBody>
-                    <a:bodyPr wrap="square">
-                      <a:noAutofit/>
-                    </a:bodyPr>
-                    <a:lstStyle/>
-                    <a:p>
-                      <a:pPr algn="r">
-                        <a:lnSpc>
-                          <a:spcPts val="2185"/>
-                        </a:lnSpc>
-                        <a:buNone/>
-                        <a:defRPr sz="1900" b="0">
-                          <a:solidFill>
-                            <a:srgbClr val="303437"/>
-                          </a:solidFill>
-                          <a:latin typeface="Noto Sans"/>
-                        </a:defRPr>
-                      </a:pPr>
-                      <a:r>
-                        <a:rPr sz="1900" b="0" lang="ja-JP" altLang="en-US">
-                          <a:solidFill>
-                            <a:srgbClr val="303437"/>
-                          </a:solidFill>
-                          <a:latin typeface="Noto Sans"/>
-                          <a:ea typeface="Noto Sans CJK JP"/>
-                          <a:cs typeface="Noto Sans"/>
-                        </a:rPr>
-                        <a:t>1</a:t>
-                      </a:r>
-                    </a:p>
-                  </a:txBody>
-                  <a:tcPr marL="63500" marR="63500" marT="38100" marB="38100" anchor="ctr">
-                    <a:lnL w="7620">
-                      <a:noFill/>
-                    </a:lnL>
-                    <a:lnR w="7620">
-                      <a:noFill/>
-                    </a:lnR>
-                    <a:lnT w="7620">
-                      <a:solidFill>
-                        <a:srgbClr val="626669"/>
-                      </a:solidFill>
-                      <a:prstDash val="solid"/>
-                    </a:lnT>
-                    <a:lnB w="7620">
-                      <a:noFill/>
-                    </a:lnB>
-                    <a:solidFill>
-                      <a:srgbClr val="FFFEF8"/>
-                    </a:solidFill>
-                  </a:tcPr>
-                </a:tc>
-                <a:tc>
-                  <a:txBody>
-                    <a:bodyPr wrap="square">
-                      <a:noAutofit/>
-                    </a:bodyPr>
-                    <a:lstStyle/>
-                    <a:p>
-                      <a:pPr algn="r">
-                        <a:lnSpc>
-                          <a:spcPts val="2185"/>
-                        </a:lnSpc>
-                        <a:buNone/>
-                        <a:defRPr sz="1900" b="0">
-                          <a:solidFill>
-                            <a:srgbClr val="303437"/>
-                          </a:solidFill>
-                          <a:latin typeface="Noto Sans"/>
-                        </a:defRPr>
-                      </a:pPr>
-                      <a:r>
-                        <a:rPr sz="1900" b="0" lang="ja-JP" altLang="en-US">
-                          <a:solidFill>
-                            <a:srgbClr val="303437"/>
-                          </a:solidFill>
-                          <a:latin typeface="Noto Sans"/>
-                          <a:ea typeface="Noto Sans CJK JP"/>
-                          <a:cs typeface="Noto Sans"/>
-                        </a:rPr>
-                        <a:t>0</a:t>
-                      </a:r>
-                    </a:p>
-                  </a:txBody>
-                  <a:tcPr marL="63500" marR="63500" marT="38100" marB="38100" anchor="ctr">
-                    <a:lnL w="7620">
-                      <a:noFill/>
-                    </a:lnL>
-                    <a:lnR w="7620">
-                      <a:noFill/>
-                    </a:lnR>
-                    <a:lnT w="7620">
-                      <a:solidFill>
-                        <a:srgbClr val="626669"/>
-                      </a:solidFill>
-                      <a:prstDash val="solid"/>
-                    </a:lnT>
-                    <a:lnB w="7620">
-                      <a:noFill/>
-                    </a:lnB>
-                    <a:solidFill>
-                      <a:srgbClr val="FFFEF8"/>
-                    </a:solidFill>
-                  </a:tcPr>
-                </a:tc>
-              </a:tr>
-              <a:tr h="420624">
-                <a:tc>
-                  <a:txBody>
-                    <a:bodyPr wrap="square">
-                      <a:noAutofit/>
-                    </a:bodyPr>
-                    <a:lstStyle/>
-                    <a:p>
-                      <a:pPr algn="l">
-                        <a:lnSpc>
-                          <a:spcPts val="2185"/>
-                        </a:lnSpc>
-                        <a:buNone/>
-                        <a:defRPr sz="1900" b="0">
-                          <a:solidFill>
-                            <a:srgbClr val="303437"/>
-                          </a:solidFill>
-                          <a:latin typeface="Noto Sans"/>
-                        </a:defRPr>
-                      </a:pPr>
-                      <a:r>
-                        <a:rPr sz="1900" b="0" lang="ja-JP" altLang="en-US">
-                          <a:solidFill>
-                            <a:srgbClr val="303437"/>
-                          </a:solidFill>
-                          <a:latin typeface="Noto Sans"/>
-                          <a:ea typeface="Noto Sans CJK JP"/>
-                          <a:cs typeface="Noto Sans"/>
-                        </a:rPr>
-                        <a:t>65</a:t>
-                      </a:r>
-                    </a:p>
-                  </a:txBody>
-                  <a:tcPr marL="63500" marR="63500" marT="38100" marB="38100" anchor="ctr">
-                    <a:lnL w="7620">
-                      <a:noFill/>
-                    </a:lnL>
-                    <a:lnR w="7620">
-                      <a:noFill/>
-                    </a:lnR>
-                    <a:lnT w="7620">
-                      <a:noFill/>
-                    </a:lnT>
-                    <a:lnB w="7620">
-                      <a:noFill/>
-                    </a:lnB>
-                    <a:solidFill>
-                      <a:srgbClr val="FFFEF8"/>
-                    </a:solidFill>
-                  </a:tcPr>
-                </a:tc>
-                <a:tc>
-                  <a:txBody>
-                    <a:bodyPr wrap="square">
-                      <a:noAutofit/>
-                    </a:bodyPr>
-                    <a:lstStyle/>
-                    <a:p>
-                      <a:pPr algn="r">
-                        <a:lnSpc>
-                          <a:spcPts val="2185"/>
-                        </a:lnSpc>
-                        <a:buNone/>
-                        <a:defRPr sz="1900" b="0">
-                          <a:solidFill>
-                            <a:srgbClr val="303437"/>
-                          </a:solidFill>
-                          <a:latin typeface="Noto Sans"/>
-                        </a:defRPr>
-                      </a:pPr>
-                      <a:r>
-                        <a:rPr sz="1900" b="0" lang="ja-JP" altLang="en-US">
-                          <a:solidFill>
-                            <a:srgbClr val="303437"/>
-                          </a:solidFill>
-                          <a:latin typeface="Noto Sans"/>
-                          <a:ea typeface="Noto Sans CJK JP"/>
-                          <a:cs typeface="Noto Sans"/>
-                        </a:rPr>
-                        <a:t>0</a:t>
-                      </a:r>
-                    </a:p>
-                  </a:txBody>
-                  <a:tcPr marL="63500" marR="63500" marT="38100" marB="38100" anchor="ctr">
-                    <a:lnL w="7620">
-                      <a:noFill/>
-                    </a:lnL>
-                    <a:lnR w="7620">
-                      <a:noFill/>
-                    </a:lnR>
-                    <a:lnT w="7620">
-                      <a:noFill/>
-                    </a:lnT>
-                    <a:lnB w="7620">
-                      <a:noFill/>
-                    </a:lnB>
-                    <a:solidFill>
-                      <a:srgbClr val="FFFEF8"/>
-                    </a:solidFill>
-                  </a:tcPr>
-                </a:tc>
-                <a:tc>
-                  <a:txBody>
-                    <a:bodyPr wrap="square">
-                      <a:noAutofit/>
-                    </a:bodyPr>
-                    <a:lstStyle/>
-                    <a:p>
-                      <a:pPr algn="r">
-                        <a:lnSpc>
-                          <a:spcPts val="2185"/>
-                        </a:lnSpc>
-                        <a:buNone/>
-                        <a:defRPr sz="1900" b="0">
-                          <a:solidFill>
-                            <a:srgbClr val="303437"/>
-                          </a:solidFill>
-                          <a:latin typeface="Noto Sans"/>
-                        </a:defRPr>
-                      </a:pPr>
-                      <a:r>
-                        <a:rPr sz="1900" b="0" lang="ja-JP" altLang="en-US">
-                          <a:solidFill>
-                            <a:srgbClr val="303437"/>
-                          </a:solidFill>
-                          <a:latin typeface="Noto Sans"/>
-                          <a:ea typeface="Noto Sans CJK JP"/>
-                          <a:cs typeface="Noto Sans"/>
-                        </a:rPr>
-                        <a:t>0</a:t>
-                      </a:r>
-                    </a:p>
-                  </a:txBody>
-                  <a:tcPr marL="63500" marR="63500" marT="38100" marB="38100" anchor="ctr">
-                    <a:lnL w="7620">
-                      <a:noFill/>
-                    </a:lnL>
-                    <a:lnR w="7620">
-                      <a:noFill/>
-                    </a:lnR>
-                    <a:lnT w="7620">
-                      <a:noFill/>
-                    </a:lnT>
-                    <a:lnB w="7620">
-                      <a:noFill/>
-                    </a:lnB>
-                    <a:solidFill>
-                      <a:srgbClr val="FFFEF8"/>
-                    </a:solidFill>
-                  </a:tcPr>
-                </a:tc>
-                <a:tc>
-                  <a:txBody>
-                    <a:bodyPr wrap="square">
-                      <a:noAutofit/>
-                    </a:bodyPr>
-                    <a:lstStyle/>
-                    <a:p>
-                      <a:pPr algn="r">
-                        <a:lnSpc>
-                          <a:spcPts val="2185"/>
-                        </a:lnSpc>
-                        <a:buNone/>
-                        <a:defRPr sz="1900" b="0">
-                          <a:solidFill>
-                            <a:srgbClr val="303437"/>
-                          </a:solidFill>
-                          <a:latin typeface="Noto Sans"/>
-                        </a:defRPr>
-                      </a:pPr>
-                      <a:r>
-                        <a:rPr sz="1900" b="0" lang="ja-JP" altLang="en-US">
-                          <a:solidFill>
-                            <a:srgbClr val="303437"/>
-                          </a:solidFill>
-                          <a:latin typeface="Noto Sans"/>
-                          <a:ea typeface="Noto Sans CJK JP"/>
-                          <a:cs typeface="Noto Sans"/>
-                        </a:rPr>
-                        <a:t>1</a:t>
-                      </a:r>
-                    </a:p>
-                  </a:txBody>
-                  <a:tcPr marL="63500" marR="63500" marT="38100" marB="38100" anchor="ctr">
-                    <a:lnL w="7620">
-                      <a:noFill/>
-                    </a:lnL>
-                    <a:lnR w="7620">
-                      <a:noFill/>
-                    </a:lnR>
-                    <a:lnT w="7620">
-                      <a:noFill/>
-                    </a:lnT>
-                    <a:lnB w="7620">
-                      <a:noFill/>
-                    </a:lnB>
-                    <a:solidFill>
-                      <a:srgbClr val="FFFEF8"/>
-                    </a:solidFill>
-                  </a:tcPr>
-                </a:tc>
-              </a:tr>
-              <a:tr h="420624">
-                <a:tc>
-                  <a:txBody>
-                    <a:bodyPr wrap="square">
-                      <a:noAutofit/>
-                    </a:bodyPr>
-                    <a:lstStyle/>
-                    <a:p>
-                      <a:pPr algn="l">
-                        <a:lnSpc>
-                          <a:spcPts val="2185"/>
-                        </a:lnSpc>
-                        <a:buNone/>
-                        <a:defRPr sz="1900" b="0">
-                          <a:solidFill>
-                            <a:srgbClr val="303437"/>
-                          </a:solidFill>
-                          <a:latin typeface="Noto Sans"/>
-                        </a:defRPr>
-                      </a:pPr>
-                      <a:r>
-                        <a:rPr sz="1900" b="0" lang="ja-JP" altLang="en-US">
-                          <a:solidFill>
-                            <a:srgbClr val="303437"/>
-                          </a:solidFill>
-                          <a:latin typeface="Noto Sans"/>
-                          <a:ea typeface="Noto Sans CJK JP"/>
-                          <a:cs typeface="Noto Sans"/>
-                        </a:rPr>
-                        <a:t>64.0</a:t>
-                      </a:r>
-                    </a:p>
-                  </a:txBody>
-                  <a:tcPr marL="63500" marR="63500" marT="38100" marB="38100" anchor="ctr">
-                    <a:lnL w="7620">
-                      <a:noFill/>
-                    </a:lnL>
-                    <a:lnR w="7620">
-                      <a:noFill/>
-                    </a:lnR>
-                    <a:lnT w="7620">
-                      <a:noFill/>
-                    </a:lnT>
-                    <a:lnB w="7620">
-                      <a:noFill/>
-                    </a:lnB>
-                    <a:solidFill>
-                      <a:srgbClr val="FFFEF8"/>
-                    </a:solidFill>
-                  </a:tcPr>
-                </a:tc>
-                <a:tc>
-                  <a:txBody>
-                    <a:bodyPr wrap="square">
-                      <a:noAutofit/>
-                    </a:bodyPr>
-                    <a:lstStyle/>
-                    <a:p>
-                      <a:pPr algn="r">
-                        <a:lnSpc>
-                          <a:spcPts val="2185"/>
-                        </a:lnSpc>
-                        <a:buNone/>
-                        <a:defRPr sz="1900" b="0">
-                          <a:solidFill>
-                            <a:srgbClr val="303437"/>
-                          </a:solidFill>
-                          <a:latin typeface="Noto Sans"/>
-                        </a:defRPr>
-                      </a:pPr>
-                      <a:r>
-                        <a:rPr sz="1900" b="0" lang="ja-JP" altLang="en-US">
-                          <a:solidFill>
-                            <a:srgbClr val="303437"/>
-                          </a:solidFill>
-                          <a:latin typeface="Noto Sans"/>
-                          <a:ea typeface="Noto Sans CJK JP"/>
-                          <a:cs typeface="Noto Sans"/>
-                        </a:rPr>
-                        <a:t>0</a:t>
-                      </a:r>
-                    </a:p>
-                  </a:txBody>
-                  <a:tcPr marL="63500" marR="63500" marT="38100" marB="38100" anchor="ctr">
-                    <a:lnL w="7620">
-                      <a:noFill/>
-                    </a:lnL>
-                    <a:lnR w="7620">
-                      <a:noFill/>
-                    </a:lnR>
-                    <a:lnT w="7620">
-                      <a:noFill/>
-                    </a:lnT>
-                    <a:lnB w="7620">
-                      <a:noFill/>
-                    </a:lnB>
-                    <a:solidFill>
-                      <a:srgbClr val="FFFEF8"/>
-                    </a:solidFill>
-                  </a:tcPr>
-                </a:tc>
-                <a:tc>
-                  <a:txBody>
-                    <a:bodyPr wrap="square">
-                      <a:noAutofit/>
-                    </a:bodyPr>
-                    <a:lstStyle/>
-                    <a:p>
-                      <a:pPr algn="r">
-                        <a:lnSpc>
-                          <a:spcPts val="2185"/>
-                        </a:lnSpc>
-                        <a:buNone/>
-                        <a:defRPr sz="1900" b="0">
-                          <a:solidFill>
-                            <a:srgbClr val="303437"/>
-                          </a:solidFill>
-                          <a:latin typeface="Noto Sans"/>
-                        </a:defRPr>
-                      </a:pPr>
-                      <a:r>
-                        <a:rPr sz="1900" b="0" lang="ja-JP" altLang="en-US">
-                          <a:solidFill>
-                            <a:srgbClr val="303437"/>
-                          </a:solidFill>
-                          <a:latin typeface="Noto Sans"/>
-                          <a:ea typeface="Noto Sans CJK JP"/>
-                          <a:cs typeface="Noto Sans"/>
-                        </a:rPr>
-                        <a:t>0</a:t>
-                      </a:r>
-                    </a:p>
-                  </a:txBody>
-                  <a:tcPr marL="63500" marR="63500" marT="38100" marB="38100" anchor="ctr">
-                    <a:lnL w="7620">
-                      <a:noFill/>
-                    </a:lnL>
-                    <a:lnR w="7620">
-                      <a:noFill/>
-                    </a:lnR>
-                    <a:lnT w="7620">
-                      <a:noFill/>
-                    </a:lnT>
-                    <a:lnB w="7620">
-                      <a:noFill/>
-                    </a:lnB>
-                    <a:solidFill>
-                      <a:srgbClr val="FFFEF8"/>
-                    </a:solidFill>
-                  </a:tcPr>
-                </a:tc>
-                <a:tc>
-                  <a:txBody>
-                    <a:bodyPr wrap="square">
-                      <a:noAutofit/>
-                    </a:bodyPr>
-                    <a:lstStyle/>
-                    <a:p>
-                      <a:pPr algn="r">
-                        <a:lnSpc>
-                          <a:spcPts val="2185"/>
-                        </a:lnSpc>
-                        <a:buNone/>
-                        <a:defRPr sz="1900" b="0">
-                          <a:solidFill>
-                            <a:srgbClr val="303437"/>
-                          </a:solidFill>
-                          <a:latin typeface="Noto Sans"/>
-                        </a:defRPr>
-                      </a:pPr>
-                      <a:r>
-                        <a:rPr sz="1900" b="0" lang="ja-JP" altLang="en-US">
-                          <a:solidFill>
-                            <a:srgbClr val="303437"/>
-                          </a:solidFill>
-                          <a:latin typeface="Noto Sans"/>
-                          <a:ea typeface="Noto Sans CJK JP"/>
-                          <a:cs typeface="Noto Sans"/>
-                        </a:rPr>
-                        <a:t>64</a:t>
-                      </a:r>
-                    </a:p>
-                  </a:txBody>
-                  <a:tcPr marL="63500" marR="63500" marT="38100" marB="38100" anchor="ctr">
-                    <a:lnL w="7620">
-                      <a:noFill/>
-                    </a:lnL>
-                    <a:lnR w="7620">
-                      <a:noFill/>
-                    </a:lnR>
-                    <a:lnT w="7620">
-                      <a:noFill/>
-                    </a:lnT>
-                    <a:lnB w="7620">
-                      <a:noFill/>
-                    </a:lnB>
-                    <a:solidFill>
-                      <a:srgbClr val="FFFEF8"/>
-                    </a:solidFill>
-                  </a:tcPr>
-                </a:tc>
-              </a:tr>
-              <a:tr h="420624">
-                <a:tc>
-                  <a:txBody>
-                    <a:bodyPr wrap="square">
-                      <a:noAutofit/>
-                    </a:bodyPr>
-                    <a:lstStyle/>
-                    <a:p>
-                      <a:pPr algn="l">
-                        <a:lnSpc>
-                          <a:spcPts val="2185"/>
-                        </a:lnSpc>
-                        <a:buNone/>
-                        <a:defRPr sz="1900" b="0">
-                          <a:solidFill>
-                            <a:srgbClr val="303437"/>
-                          </a:solidFill>
-                          <a:latin typeface="Noto Sans"/>
-                        </a:defRPr>
-                      </a:pPr>
-                      <a:r>
-                        <a:rPr sz="1900" b="0" lang="ja-JP" altLang="en-US">
-                          <a:solidFill>
-                            <a:srgbClr val="303437"/>
-                          </a:solidFill>
-                          <a:latin typeface="Noto Sans"/>
-                          <a:ea typeface="Noto Sans CJK JP"/>
-                          <a:cs typeface="Noto Sans"/>
-                        </a:rPr>
-                        <a:t>-64</a:t>
-                      </a:r>
-                    </a:p>
-                  </a:txBody>
-                  <a:tcPr marL="63500" marR="63500" marT="38100" marB="38100" anchor="ctr">
-                    <a:lnL w="7620">
-                      <a:noFill/>
-                    </a:lnL>
-                    <a:lnR w="7620">
-                      <a:noFill/>
-                    </a:lnR>
-                    <a:lnT w="7620">
-                      <a:noFill/>
-                    </a:lnT>
-                    <a:lnB w="15240">
-                      <a:solidFill>
-                        <a:srgbClr val="626669"/>
-                      </a:solidFill>
-                      <a:prstDash val="solid"/>
-                    </a:lnB>
-                    <a:solidFill>
-                      <a:srgbClr val="FFFEF8"/>
-                    </a:solidFill>
-                  </a:tcPr>
-                </a:tc>
-                <a:tc>
-                  <a:txBody>
-                    <a:bodyPr wrap="square">
-                      <a:noAutofit/>
-                    </a:bodyPr>
-                    <a:lstStyle/>
-                    <a:p>
-                      <a:pPr algn="r">
-                        <a:lnSpc>
-                          <a:spcPts val="2185"/>
-                        </a:lnSpc>
-                        <a:buNone/>
-                        <a:defRPr sz="1900" b="0">
-                          <a:solidFill>
-                            <a:srgbClr val="303437"/>
-                          </a:solidFill>
-                          <a:latin typeface="Noto Sans"/>
-                        </a:defRPr>
-                      </a:pPr>
-                      <a:r>
-                        <a:rPr sz="1900" b="0" lang="ja-JP" altLang="en-US">
-                          <a:solidFill>
-                            <a:srgbClr val="303437"/>
-                          </a:solidFill>
-                          <a:latin typeface="Noto Sans"/>
-                          <a:ea typeface="Noto Sans CJK JP"/>
-                          <a:cs typeface="Noto Sans"/>
-                        </a:rPr>
-                        <a:t>0</a:t>
-                      </a:r>
-                    </a:p>
-                  </a:txBody>
-                  <a:tcPr marL="63500" marR="63500" marT="38100" marB="38100" anchor="ctr">
-                    <a:lnL w="7620">
-                      <a:noFill/>
-                    </a:lnL>
-                    <a:lnR w="7620">
-                      <a:noFill/>
-                    </a:lnR>
-                    <a:lnT w="7620">
-                      <a:noFill/>
-                    </a:lnT>
-                    <a:lnB w="15240">
-                      <a:solidFill>
-                        <a:srgbClr val="626669"/>
-                      </a:solidFill>
-                      <a:prstDash val="solid"/>
-                    </a:lnB>
-                    <a:solidFill>
-                      <a:srgbClr val="FFFEF8"/>
-                    </a:solidFill>
-                  </a:tcPr>
-                </a:tc>
-                <a:tc>
-                  <a:txBody>
-                    <a:bodyPr wrap="square">
-                      <a:noAutofit/>
-                    </a:bodyPr>
-                    <a:lstStyle/>
-                    <a:p>
-                      <a:pPr algn="r">
-                        <a:lnSpc>
-                          <a:spcPts val="2185"/>
-                        </a:lnSpc>
-                        <a:buNone/>
-                        <a:defRPr sz="1900" b="0">
-                          <a:solidFill>
-                            <a:srgbClr val="303437"/>
-                          </a:solidFill>
-                          <a:latin typeface="Noto Sans"/>
-                        </a:defRPr>
-                      </a:pPr>
-                      <a:r>
-                        <a:rPr sz="1900" b="0" lang="ja-JP" altLang="en-US">
-                          <a:solidFill>
-                            <a:srgbClr val="303437"/>
-                          </a:solidFill>
-                          <a:latin typeface="Noto Sans"/>
-                          <a:ea typeface="Noto Sans CJK JP"/>
-                          <a:cs typeface="Noto Sans"/>
-                        </a:rPr>
-                        <a:t>1</a:t>
-                      </a:r>
-                    </a:p>
-                  </a:txBody>
-                  <a:tcPr marL="63500" marR="63500" marT="38100" marB="38100" anchor="ctr">
-                    <a:lnL w="7620">
-                      <a:noFill/>
-                    </a:lnL>
-                    <a:lnR w="7620">
-                      <a:noFill/>
-                    </a:lnR>
-                    <a:lnT w="7620">
-                      <a:noFill/>
-                    </a:lnT>
-                    <a:lnB w="15240">
-                      <a:solidFill>
-                        <a:srgbClr val="626669"/>
-                      </a:solidFill>
-                      <a:prstDash val="solid"/>
-                    </a:lnB>
-                    <a:solidFill>
-                      <a:srgbClr val="FFFEF8"/>
-                    </a:solidFill>
-                  </a:tcPr>
-                </a:tc>
-                <a:tc>
-                  <a:txBody>
-                    <a:bodyPr wrap="square">
-                      <a:noAutofit/>
-                    </a:bodyPr>
-                    <a:lstStyle/>
-                    <a:p>
-                      <a:pPr algn="r">
-                        <a:lnSpc>
-                          <a:spcPts val="2185"/>
-                        </a:lnSpc>
-                        <a:buNone/>
-                        <a:defRPr sz="1900" b="0">
-                          <a:solidFill>
-                            <a:srgbClr val="303437"/>
-                          </a:solidFill>
-                          <a:latin typeface="Noto Sans"/>
-                        </a:defRPr>
-                      </a:pPr>
-                      <a:r>
-                        <a:rPr sz="1900" b="0" lang="ja-JP" altLang="en-US">
-                          <a:solidFill>
-                            <a:srgbClr val="303437"/>
-                          </a:solidFill>
-                          <a:latin typeface="Noto Sans"/>
-                          <a:ea typeface="Noto Sans CJK JP"/>
-                          <a:cs typeface="Noto Sans"/>
-                        </a:rPr>
-                        <a:t>128</a:t>
-                      </a:r>
-                    </a:p>
-                  </a:txBody>
-                  <a:tcPr marL="63500" marR="63500" marT="38100" marB="38100" anchor="ctr">
-                    <a:lnL w="7620">
-                      <a:noFill/>
-                    </a:lnL>
-                    <a:lnR w="7620">
-                      <a:noFill/>
-                    </a:lnR>
-                    <a:lnT w="7620">
-                      <a:noFill/>
-                    </a:lnT>
-                    <a:lnB w="15240">
-                      <a:solidFill>
-                        <a:srgbClr val="626669"/>
-                      </a:solidFill>
-                      <a:prstDash val="solid"/>
-                    </a:lnB>
-                    <a:solidFill>
-                      <a:srgbClr val="FFFEF8"/>
-                    </a:solidFill>
-                  </a:tcPr>
-                </a:tc>
-              </a:tr>
-            </a:tbl>
-          </a:graphicData>
-        </a:graphic>
-      </p:graphicFrame>
-      <p:sp>
-        <p:nvSpPr>
-          <p:cNvPr id="5" name="TextBox 4"/>
-          <p:cNvSpPr txBox="1"/>
-          <p:nvPr/>
-        </p:nvSpPr>
-        <p:spPr>
-          <a:xfrm>
-            <a:off x="594360" y="3813048"/>
-            <a:ext cx="7955279" cy="658368"/>
-          </a:xfrm>
-          <a:prstGeom prst="rect">
-            <a:avLst/>
-          </a:prstGeom>
-          <a:noFill/>
-        </p:spPr>
-        <p:txBody>
-          <a:bodyPr wrap="square" lIns="0" rIns="0" tIns="0" bIns="0">
-            <a:noAutofit/>
-          </a:bodyPr>
-          <a:lstStyle/>
-          <a:p>
-            <a:pPr algn="l">
-              <a:lnSpc>
-                <a:spcPts val="2047"/>
-              </a:lnSpc>
-              <a:spcBef>
-                <a:spcPts val="0"/>
-              </a:spcBef>
-              <a:spcAft>
-                <a:spcPts val="0"/>
-              </a:spcAft>
-              <a:buNone/>
-              <a:defRPr sz="1750" b="0">
-                <a:solidFill>
-                  <a:srgbClr val="303437"/>
-                </a:solidFill>
-                <a:latin typeface="Noto Sans"/>
-              </a:defRPr>
-            </a:pPr>
-            <a:r>
-              <a:rPr sz="1750" b="0" lang="ja-JP" altLang="en-US">
-                <a:solidFill>
-                  <a:srgbClr val="303437"/>
-                </a:solidFill>
-                <a:latin typeface="Noto Sans"/>
-                <a:ea typeface="Noto Sans CJK JP"/>
-                <a:cs typeface="Noto Sans"/>
-              </a:rPr>
-              <a:t>正規化後の一致はquasi_exact_match。符号も句読点として除かれ、-64と64が一致する。</a:t>
-            </a:r>
-          </a:p>
-        </p:txBody>
-      </p:sp>
-      <p:sp>
-        <p:nvSpPr>
-          <p:cNvPr id="6" name="sources"/>
-          <p:cNvSpPr txBox="1"/>
-          <p:nvPr/>
-        </p:nvSpPr>
-        <p:spPr>
-          <a:xfrm>
-            <a:off x="502920" y="4700016"/>
-            <a:ext cx="8183879" cy="530352"/>
-          </a:xfrm>
-          <a:prstGeom prst="rect">
-            <a:avLst/>
-          </a:prstGeom>
-          <a:noFill/>
-        </p:spPr>
-        <p:txBody>
-          <a:bodyPr wrap="square" lIns="0" rIns="0" tIns="0" bIns="0">
-            <a:noAutofit/>
-          </a:bodyPr>
-          <a:lstStyle/>
-          <a:p>
-            <a:pPr algn="l">
-              <a:lnSpc>
-                <a:spcPts val="940"/>
-              </a:lnSpc>
-              <a:spcBef>
-                <a:spcPts val="0"/>
-              </a:spcBef>
-              <a:spcAft>
-                <a:spcPts val="140"/>
-              </a:spcAft>
-              <a:buNone/>
-              <a:defRPr sz="810" b="0">
-                <a:solidFill>
-                  <a:srgbClr val="303437"/>
-                </a:solidFill>
-                <a:latin typeface="Noto Sans"/>
-              </a:defRPr>
-            </a:pPr>
-            <a:r>
-              <a:rPr sz="810" b="0" lang="ja-JP" altLang="en-US">
-                <a:solidFill>
-                  <a:srgbClr val="626669"/>
-                </a:solidFill>
-                <a:latin typeface="Noto Sans"/>
-                <a:ea typeface="Noto Sans CJK JP"/>
-                <a:cs typeface="Noto Sans"/>
-              </a:rPr>
-              <a:t>[1] Stanford CRFM. BasicMetric, HELM v0.3.0.</a:t>
-            </a:r>
-            <a:r>
-              <a:rPr sz="810" b="0" lang="ja-JP" altLang="en-US">
-                <a:solidFill>
-                  <a:srgbClr val="626669"/>
-                </a:solidFill>
-                <a:latin typeface="Noto Sans"/>
-                <a:ea typeface="Noto Sans CJK JP"/>
-                <a:cs typeface="Noto Sans"/>
-              </a:rPr>
-              <a:t>  </a:t>
-            </a:r>
-            <a:r>
-              <a:rPr sz="810" b="0" lang="ja-JP" altLang="en-US">
-                <a:solidFill>
-                  <a:srgbClr val="626669"/>
-                </a:solidFill>
-                <a:latin typeface="Noto Sans"/>
-                <a:ea typeface="Noto Sans CJK JP"/>
-                <a:cs typeface="Noto Sans"/>
-                <a:hlinkClick r:id="rId2"/>
-              </a:rPr>
-              <a:t>https://github.com/stanford-crfm/helm/blob/v0.3.0/src/helm/benchmark/metrics/basic_metrics.py</a:t>
-            </a:r>
-          </a:p>
-        </p:txBody>
-      </p:sp>
-    </p:spTree>
-  </p:cSld>
-  <p:clrMapOvr>
-    <a:masterClrMapping/>
-  </p:clrMapOvr>
-</p:sld>
-</file>
-
-<file path=ppt/slides/slide23.xml><?xml version="1.0" encoding="utf-8"?>
-<p:sld xmlns:a="http://schemas.openxmlformats.org/drawingml/2006/main" xmlns:p="http://schemas.openxmlformats.org/presentationml/2006/main" xmlns:r="http://schemas.openxmlformats.org/officeDocument/2006/relationships">
-  <p:cSld>
-    <p:spTree>
-      <p:nvGrpSpPr>
-        <p:cNvPr id="1" name=""/>
-        <p:cNvGrpSpPr/>
-        <p:nvPr/>
-      </p:nvGrpSpPr>
-      <p:grpSpPr/>
-      <p:sp>
-        <p:nvSpPr>
-          <p:cNvPr id="2" name="Title 1"/>
-          <p:cNvSpPr>
-            <a:spLocks noGrp="1"/>
-          </p:cNvSpPr>
-          <p:nvPr>
-            <p:ph type="title"/>
-          </p:nvPr>
-        </p:nvSpPr>
-        <p:spPr>
-          <a:xfrm>
-            <a:off x="468172" y="650138"/>
-            <a:ext cx="8206740" cy="616305"/>
-          </a:xfrm>
-        </p:spPr>
-        <p:txBody>
-          <a:bodyPr wrap="square" lIns="0" rIns="0" tIns="0" bIns="0">
-            <a:noAutofit/>
-          </a:bodyPr>
-          <a:lstStyle/>
-          <a:p>
-            <a:pPr algn="l">
-              <a:lnSpc>
-                <a:spcPct val="110000"/>
-              </a:lnSpc>
-              <a:buNone/>
-              <a:defRPr sz="2800" b="0">
-                <a:solidFill>
-                  <a:srgbClr val="303437"/>
-                </a:solidFill>
-                <a:latin typeface="Noto Sans"/>
-              </a:defRPr>
-            </a:pPr>
-            <a:r>
-              <a:rPr sz="2800" b="1" lang="ja-JP" altLang="en-US">
-                <a:solidFill>
-                  <a:srgbClr val="303437"/>
-                </a:solidFill>
-                <a:latin typeface="Noto Sans"/>
-                <a:ea typeface="Noto Sans CJK JP"/>
-                <a:cs typeface="Noto Sans"/>
-              </a:rPr>
-              <a:t>整数として読めない出力の扱い</a:t>
-            </a:r>
-          </a:p>
-        </p:txBody>
-      </p:sp>
-      <p:sp>
-        <p:nvSpPr>
-          <p:cNvPr id="3" name="Text Placeholder 2"/>
-          <p:cNvSpPr>
-            <a:spLocks noGrp="1"/>
-          </p:cNvSpPr>
-          <p:nvPr>
-            <p:ph type="body" idx="1"/>
-          </p:nvPr>
-        </p:nvSpPr>
-        <p:spPr>
-          <a:xfrm>
-            <a:off x="594360" y="1463040"/>
-            <a:ext cx="7955279" cy="3044952"/>
-          </a:xfrm>
-        </p:spPr>
-        <p:txBody>
-          <a:bodyPr wrap="square" tIns="91440" bIns="91440">
-            <a:noAutofit/>
-          </a:bodyPr>
-          <a:lstStyle/>
-          <a:p>
-            <a:pPr marL="457200" indent="-355600">
-              <a:lnSpc>
-                <a:spcPts val="2618"/>
-              </a:lnSpc>
-              <a:spcAft>
-                <a:spcPts val="700"/>
-              </a:spcAft>
-              <a:buSzPct val="60455"/>
-              <a:buFont typeface="Noto Sans CJK JP"/>
-              <a:buChar char="●"/>
-              <a:defRPr sz="2200" b="0">
-                <a:solidFill>
-                  <a:srgbClr val="303437"/>
-                </a:solidFill>
-                <a:latin typeface="Noto Sans"/>
-              </a:defRPr>
-            </a:pPr>
-            <a:r>
-              <a:rPr sz="2200" b="0" lang="ja-JP" altLang="en-US">
-                <a:solidFill>
-                  <a:srgbClr val="303437"/>
-                </a:solidFill>
-                <a:latin typeface="Noto Sans"/>
-                <a:ea typeface="Noto Sans CJK JP"/>
-                <a:cs typeface="Noto Sans"/>
-              </a:rPr>
-              <a:t>absolute_value_differenceの実装では、整数として解釈できない出力は、0として採点される。</a:t>
-            </a:r>
-          </a:p>
-          <a:p>
-            <a:pPr marL="457200" indent="-355600">
-              <a:lnSpc>
-                <a:spcPts val="2618"/>
-              </a:lnSpc>
-              <a:spcAft>
-                <a:spcPts val="700"/>
-              </a:spcAft>
-              <a:buSzPct val="60455"/>
-              <a:buFont typeface="Noto Sans CJK JP"/>
-              <a:buChar char="●"/>
-              <a:defRPr sz="2200" b="0">
-                <a:solidFill>
-                  <a:srgbClr val="303437"/>
-                </a:solidFill>
-                <a:latin typeface="Noto Sans"/>
-              </a:defRPr>
-            </a:pPr>
-            <a:r>
-              <a:rPr sz="2200" b="0" lang="ja-JP" altLang="en-US">
-                <a:solidFill>
-                  <a:srgbClr val="303437"/>
-                </a:solidFill>
-                <a:latin typeface="Noto Sans"/>
-                <a:ea typeface="Noto Sans CJK JP"/>
-                <a:cs typeface="Noto Sans"/>
-              </a:rPr>
-              <a:t>たとえば正解が0のとき、出力がerrorでも絶対誤差は0になる。exact_matchは0で、正解文字列とは一致しない。</a:t>
-            </a:r>
-          </a:p>
-          <a:p>
-            <a:pPr marL="457200" indent="-355600">
-              <a:lnSpc>
-                <a:spcPts val="2618"/>
-              </a:lnSpc>
-              <a:spcAft>
-                <a:spcPts val="0"/>
-              </a:spcAft>
-              <a:buSzPct val="60455"/>
-              <a:buFont typeface="Noto Sans CJK JP"/>
-              <a:buChar char="●"/>
-              <a:defRPr sz="2200" b="0">
-                <a:solidFill>
-                  <a:srgbClr val="303437"/>
-                </a:solidFill>
-                <a:latin typeface="Noto Sans"/>
-              </a:defRPr>
-            </a:pPr>
-            <a:r>
-              <a:rPr sz="2200" b="0" lang="ja-JP" altLang="en-US">
-                <a:solidFill>
-                  <a:srgbClr val="303437"/>
-                </a:solidFill>
-                <a:latin typeface="Noto Sans"/>
-                <a:ea typeface="Noto Sans CJK JP"/>
-                <a:cs typeface="Noto Sans"/>
-              </a:rPr>
-              <a:t>数値のずれと出力形式を合わせて確認できるよう、exact matchと実際の出力を併せて保存する。</a:t>
-            </a:r>
-          </a:p>
-        </p:txBody>
-      </p:sp>
-      <p:sp>
-        <p:nvSpPr>
-          <p:cNvPr id="4" name="Title 3"/>
-          <p:cNvSpPr>
-            <a:spLocks noGrp="1"/>
-          </p:cNvSpPr>
-          <p:nvPr>
-            <p:ph type="title" idx="2"/>
-          </p:nvPr>
-        </p:nvSpPr>
-        <p:spPr>
-          <a:xfrm>
-            <a:off x="75895" y="0"/>
-            <a:ext cx="8115300" cy="480060"/>
-          </a:xfrm>
-        </p:spPr>
-        <p:txBody>
-          <a:bodyPr wrap="square" lIns="0" rIns="0" tIns="0" bIns="0" anchor="ctr">
-            <a:noAutofit/>
-          </a:bodyPr>
-          <a:lstStyle/>
-          <a:p>
-            <a:pPr algn="l">
-              <a:lnSpc>
-                <a:spcPct val="110000"/>
-              </a:lnSpc>
-              <a:buNone/>
-              <a:defRPr sz="1400" b="0">
-                <a:solidFill>
-                  <a:srgbClr val="303437"/>
-                </a:solidFill>
-                <a:latin typeface="Noto Sans"/>
-              </a:defRPr>
-            </a:pPr>
-            <a:r>
-              <a:rPr sz="1400" b="1" lang="ja-JP" altLang="en-US">
-                <a:solidFill>
-                  <a:srgbClr val="FFFEF8"/>
-                </a:solidFill>
-                <a:latin typeface="Noto Sans"/>
-                <a:ea typeface="Noto Sans CJK JP"/>
-                <a:cs typeface="Noto Sans"/>
-              </a:rPr>
-              <a:t>3. 数値の採点と公開実行</a:t>
-            </a:r>
-          </a:p>
-        </p:txBody>
-      </p:sp>
-      <p:sp>
-        <p:nvSpPr>
-          <p:cNvPr id="5" name="sources"/>
-          <p:cNvSpPr txBox="1"/>
-          <p:nvPr/>
-        </p:nvSpPr>
-        <p:spPr>
-          <a:xfrm>
-            <a:off x="502920" y="4700016"/>
-            <a:ext cx="8183879" cy="530352"/>
-          </a:xfrm>
-          <a:prstGeom prst="rect">
-            <a:avLst/>
-          </a:prstGeom>
-          <a:noFill/>
-        </p:spPr>
-        <p:txBody>
-          <a:bodyPr wrap="square" lIns="0" rIns="0" tIns="0" bIns="0">
-            <a:noAutofit/>
-          </a:bodyPr>
-          <a:lstStyle/>
-          <a:p>
-            <a:pPr algn="l">
-              <a:lnSpc>
-                <a:spcPts val="940"/>
-              </a:lnSpc>
-              <a:spcBef>
-                <a:spcPts val="0"/>
-              </a:spcBef>
-              <a:spcAft>
-                <a:spcPts val="140"/>
-              </a:spcAft>
-              <a:buNone/>
-              <a:defRPr sz="810" b="0">
-                <a:solidFill>
-                  <a:srgbClr val="303437"/>
-                </a:solidFill>
-                <a:latin typeface="Noto Sans"/>
-              </a:defRPr>
-            </a:pPr>
-            <a:r>
-              <a:rPr sz="810" b="0" lang="ja-JP" altLang="en-US">
-                <a:solidFill>
-                  <a:srgbClr val="626669"/>
-                </a:solidFill>
-                <a:latin typeface="Noto Sans"/>
-                <a:ea typeface="Noto Sans CJK JP"/>
-                <a:cs typeface="Noto Sans"/>
-              </a:rPr>
-              <a:t>[1] Stanford CRFM. BasicMetric, HELM v0.3.0.</a:t>
-            </a:r>
-            <a:r>
-              <a:rPr sz="810" b="0" lang="ja-JP" altLang="en-US">
-                <a:solidFill>
-                  <a:srgbClr val="626669"/>
-                </a:solidFill>
-                <a:latin typeface="Noto Sans"/>
-                <a:ea typeface="Noto Sans CJK JP"/>
-                <a:cs typeface="Noto Sans"/>
-              </a:rPr>
-              <a:t>  </a:t>
-            </a:r>
-            <a:r>
-              <a:rPr sz="810" b="0" lang="ja-JP" altLang="en-US">
-                <a:solidFill>
-                  <a:srgbClr val="626669"/>
-                </a:solidFill>
-                <a:latin typeface="Noto Sans"/>
-                <a:ea typeface="Noto Sans CJK JP"/>
-                <a:cs typeface="Noto Sans"/>
-                <a:hlinkClick r:id="rId2"/>
-              </a:rPr>
-              <a:t>https://github.com/stanford-crfm/helm/blob/v0.3.0/src/helm/benchmark/metrics/basic_metrics.py</a:t>
-            </a:r>
-          </a:p>
-        </p:txBody>
-      </p:sp>
-    </p:spTree>
-  </p:cSld>
-  <p:clrMapOvr>
-    <a:masterClrMapping/>
-  </p:clrMapOvr>
-</p:sld>
-</file>
-
-<file path=ppt/slides/slide24.xml><?xml version="1.0" encoding="utf-8"?>
-<p:sld xmlns:a="http://schemas.openxmlformats.org/drawingml/2006/main" xmlns:p="http://schemas.openxmlformats.org/presentationml/2006/main" xmlns:r="http://schemas.openxmlformats.org/officeDocument/2006/relationships">
-  <p:cSld>
-    <p:spTree>
-      <p:nvGrpSpPr>
-        <p:cNvPr id="1" name=""/>
-        <p:cNvGrpSpPr/>
-        <p:nvPr/>
-      </p:nvGrpSpPr>
-      <p:grpSpPr/>
-      <p:sp>
-        <p:nvSpPr>
-          <p:cNvPr id="2" name="Title 1"/>
-          <p:cNvSpPr>
-            <a:spLocks noGrp="1"/>
-          </p:cNvSpPr>
-          <p:nvPr>
-            <p:ph type="title"/>
-          </p:nvPr>
-        </p:nvSpPr>
-        <p:spPr>
-          <a:xfrm>
-            <a:off x="468172" y="650138"/>
-            <a:ext cx="8206740" cy="616305"/>
-          </a:xfrm>
-        </p:spPr>
-        <p:txBody>
-          <a:bodyPr wrap="square" lIns="0" rIns="0" tIns="0" bIns="0">
-            <a:noAutofit/>
-          </a:bodyPr>
-          <a:lstStyle/>
-          <a:p>
-            <a:pPr algn="l">
-              <a:lnSpc>
-                <a:spcPct val="110000"/>
-              </a:lnSpc>
-              <a:buNone/>
-              <a:defRPr sz="2800" b="0">
-                <a:solidFill>
-                  <a:srgbClr val="303437"/>
-                </a:solidFill>
-                <a:latin typeface="Noto Sans"/>
-              </a:defRPr>
-            </a:pPr>
-            <a:r>
-              <a:rPr sz="2800" b="1" lang="ja-JP" altLang="en-US">
-                <a:solidFill>
-                  <a:srgbClr val="303437"/>
-                </a:solidFill>
-                <a:latin typeface="Noto Sans"/>
-                <a:ea typeface="Noto Sans CJK JP"/>
-                <a:cs typeface="Noto Sans"/>
-              </a:rPr>
-              <a:t>曲線・曲面からの距離も定義される</a:t>
-            </a:r>
-          </a:p>
-        </p:txBody>
-      </p:sp>
-      <p:sp>
-        <p:nvSpPr>
-          <p:cNvPr id="3" name="Text Placeholder 2"/>
-          <p:cNvSpPr>
-            <a:spLocks noGrp="1"/>
-          </p:cNvSpPr>
-          <p:nvPr>
-            <p:ph type="body" idx="1"/>
-          </p:nvPr>
-        </p:nvSpPr>
-        <p:spPr>
-          <a:xfrm>
-            <a:off x="594360" y="1463040"/>
-            <a:ext cx="7955279" cy="3044952"/>
-          </a:xfrm>
-        </p:spPr>
-        <p:txBody>
-          <a:bodyPr wrap="square" tIns="91440" bIns="91440">
-            <a:noAutofit/>
-          </a:bodyPr>
-          <a:lstStyle/>
-          <a:p>
-            <a:pPr marL="457200" indent="-355600">
-              <a:lnSpc>
-                <a:spcPts val="2499"/>
-              </a:lnSpc>
-              <a:spcAft>
-                <a:spcPts val="700"/>
-              </a:spcAft>
-              <a:buSzPct val="63333"/>
-              <a:buFont typeface="Noto Sans CJK JP"/>
-              <a:buChar char="●"/>
-              <a:defRPr sz="2100" b="0">
-                <a:solidFill>
-                  <a:srgbClr val="303437"/>
-                </a:solidFill>
-                <a:latin typeface="Noto Sans"/>
-              </a:defRPr>
-            </a:pPr>
-            <a:r>
-              <a:rPr sz="2100" b="0" lang="ja-JP" altLang="en-US">
-                <a:solidFill>
-                  <a:srgbClr val="303437"/>
-                </a:solidFill>
-                <a:latin typeface="Noto Sans"/>
-                <a:ea typeface="Noto Sans CJK JP"/>
-                <a:cs typeface="Noto Sans"/>
-              </a:rPr>
-              <a:t>run_solver=Trueなら、予測した点から参照曲線・曲面までの最短距離と、整数として読めた出力の割合を追加できる。</a:t>
-            </a:r>
-          </a:p>
-          <a:p>
-            <a:pPr marL="457200" indent="-355600">
-              <a:lnSpc>
-                <a:spcPts val="2499"/>
-              </a:lnSpc>
-              <a:spcAft>
-                <a:spcPts val="700"/>
-              </a:spcAft>
-              <a:buSzPct val="63333"/>
-              <a:buFont typeface="Noto Sans CJK JP"/>
-              <a:buChar char="●"/>
-              <a:defRPr sz="2100" b="0">
-                <a:solidFill>
-                  <a:srgbClr val="303437"/>
-                </a:solidFill>
-                <a:latin typeface="Noto Sans"/>
-              </a:defRPr>
-            </a:pPr>
-            <a:r>
-              <a:rPr sz="2100" b="0" lang="ja-JP" altLang="en-US">
-                <a:solidFill>
-                  <a:srgbClr val="303437"/>
-                </a:solidFill>
-                <a:latin typeface="Noto Sans"/>
-                <a:ea typeface="Noto Sans CJK JP"/>
-                <a:cs typeface="Noto Sans"/>
-              </a:rPr>
-              <a:t>実例1で65を予測すると、点(15, 65)は直線y=4x+4から1/√17、約0.243だけ離れる。</a:t>
-            </a:r>
-          </a:p>
-          <a:p>
-            <a:pPr marL="457200" indent="-355600">
-              <a:lnSpc>
-                <a:spcPts val="2499"/>
-              </a:lnSpc>
-              <a:spcAft>
-                <a:spcPts val="0"/>
-              </a:spcAft>
-              <a:buSzPct val="63333"/>
-              <a:buFont typeface="Noto Sans CJK JP"/>
-              <a:buChar char="●"/>
-              <a:defRPr sz="2100" b="0">
-                <a:solidFill>
-                  <a:srgbClr val="303437"/>
-                </a:solidFill>
-                <a:latin typeface="Noto Sans"/>
-              </a:defRPr>
-            </a:pPr>
-            <a:r>
-              <a:rPr sz="2100" b="0" lang="ja-JP" altLang="en-US">
-                <a:solidFill>
-                  <a:srgbClr val="303437"/>
-                </a:solidFill>
-                <a:latin typeface="Noto Sans"/>
-                <a:ea typeface="Noto Sans CJK JP"/>
-                <a:cs typeface="Noto Sans"/>
-              </a:rPr>
-              <a:t>これは任意の追加指標。既定の指標は数値の絶対誤差であり、Classicの表示設定でも主指標になっている。</a:t>
-            </a:r>
-          </a:p>
-        </p:txBody>
-      </p:sp>
-      <p:sp>
-        <p:nvSpPr>
-          <p:cNvPr id="4" name="Title 3"/>
-          <p:cNvSpPr>
-            <a:spLocks noGrp="1"/>
-          </p:cNvSpPr>
-          <p:nvPr>
-            <p:ph type="title" idx="2"/>
-          </p:nvPr>
-        </p:nvSpPr>
-        <p:spPr>
-          <a:xfrm>
-            <a:off x="75895" y="0"/>
-            <a:ext cx="8115300" cy="480060"/>
-          </a:xfrm>
-        </p:spPr>
-        <p:txBody>
-          <a:bodyPr wrap="square" lIns="0" rIns="0" tIns="0" bIns="0" anchor="ctr">
-            <a:noAutofit/>
-          </a:bodyPr>
-          <a:lstStyle/>
-          <a:p>
-            <a:pPr algn="l">
-              <a:lnSpc>
-                <a:spcPct val="110000"/>
-              </a:lnSpc>
-              <a:buNone/>
-              <a:defRPr sz="1400" b="0">
-                <a:solidFill>
-                  <a:srgbClr val="303437"/>
-                </a:solidFill>
-                <a:latin typeface="Noto Sans"/>
-              </a:defRPr>
-            </a:pPr>
-            <a:r>
-              <a:rPr sz="1400" b="1" lang="ja-JP" altLang="en-US">
-                <a:solidFill>
-                  <a:srgbClr val="FFFEF8"/>
-                </a:solidFill>
-                <a:latin typeface="Noto Sans"/>
-                <a:ea typeface="Noto Sans CJK JP"/>
-                <a:cs typeface="Noto Sans"/>
-              </a:rPr>
-              <a:t>3. 数値の採点と公開実行</a:t>
-            </a:r>
-          </a:p>
-        </p:txBody>
-      </p:sp>
-      <p:sp>
-        <p:nvSpPr>
-          <p:cNvPr id="5" name="sources"/>
-          <p:cNvSpPr txBox="1"/>
-          <p:nvPr/>
-        </p:nvSpPr>
-        <p:spPr>
-          <a:xfrm>
-            <a:off x="502920" y="4700016"/>
-            <a:ext cx="8183879" cy="530352"/>
-          </a:xfrm>
-          <a:prstGeom prst="rect">
-            <a:avLst/>
-          </a:prstGeom>
-          <a:noFill/>
-        </p:spPr>
-        <p:txBody>
-          <a:bodyPr wrap="square" lIns="0" rIns="0" tIns="0" bIns="0">
-            <a:noAutofit/>
-          </a:bodyPr>
-          <a:lstStyle/>
-          <a:p>
-            <a:pPr algn="l">
-              <a:lnSpc>
-                <a:spcPts val="940"/>
-              </a:lnSpc>
-              <a:spcBef>
-                <a:spcPts val="0"/>
-              </a:spcBef>
-              <a:spcAft>
-                <a:spcPts val="140"/>
-              </a:spcAft>
-              <a:buNone/>
-              <a:defRPr sz="810" b="0">
-                <a:solidFill>
-                  <a:srgbClr val="303437"/>
-                </a:solidFill>
-                <a:latin typeface="Noto Sans"/>
-              </a:defRPr>
-            </a:pPr>
-            <a:r>
-              <a:rPr sz="810" b="0" lang="ja-JP" altLang="en-US">
-                <a:solidFill>
-                  <a:srgbClr val="626669"/>
-                </a:solidFill>
-                <a:latin typeface="Noto Sans"/>
-                <a:ea typeface="Noto Sans CJK JP"/>
-                <a:cs typeface="Noto Sans"/>
-              </a:rPr>
-              <a:t>[1] Stanford CRFM. get_numeracy_spec, HELM v0.3.0.</a:t>
-            </a:r>
-            <a:r>
-              <a:rPr sz="810" b="0" lang="ja-JP" altLang="en-US">
-                <a:solidFill>
-                  <a:srgbClr val="626669"/>
-                </a:solidFill>
-                <a:latin typeface="Noto Sans"/>
-                <a:ea typeface="Noto Sans CJK JP"/>
-                <a:cs typeface="Noto Sans"/>
-              </a:rPr>
-              <a:t>  </a:t>
-            </a:r>
-            <a:r>
-              <a:rPr sz="810" b="0" lang="ja-JP" altLang="en-US">
-                <a:solidFill>
-                  <a:srgbClr val="626669"/>
-                </a:solidFill>
-                <a:latin typeface="Noto Sans"/>
-                <a:ea typeface="Noto Sans CJK JP"/>
-                <a:cs typeface="Noto Sans"/>
-                <a:hlinkClick r:id="rId2"/>
-              </a:rPr>
-              <a:t>https://github.com/stanford-crfm/helm/blob/v0.3.0/src/helm/benchmark/run_specs.py</a:t>
-            </a:r>
-          </a:p>
-          <a:p>
-            <a:pPr>
-              <a:lnSpc>
-                <a:spcPts val="940"/>
-              </a:lnSpc>
-              <a:spcAft>
-                <a:spcPts val="140"/>
-              </a:spcAft>
-              <a:buNone/>
-              <a:defRPr sz="810" b="0">
-                <a:solidFill>
-                  <a:srgbClr val="303437"/>
-                </a:solidFill>
-                <a:latin typeface="Noto Sans"/>
-              </a:defRPr>
-            </a:pPr>
-            <a:r>
-              <a:rPr sz="810" b="0" lang="ja-JP" altLang="en-US">
-                <a:solidFill>
-                  <a:srgbClr val="626669"/>
-                </a:solidFill>
-                <a:latin typeface="Noto Sans"/>
-                <a:ea typeface="Noto Sans CJK JP"/>
-                <a:cs typeface="Noto Sans"/>
-              </a:rPr>
-              <a:t>[2] Stanford CRFM. DistanceMetric, HELM v0.3.0.</a:t>
-            </a:r>
-            <a:r>
-              <a:rPr sz="810" b="0" lang="ja-JP" altLang="en-US">
-                <a:solidFill>
-                  <a:srgbClr val="626669"/>
-                </a:solidFill>
-                <a:latin typeface="Noto Sans"/>
-                <a:ea typeface="Noto Sans CJK JP"/>
-                <a:cs typeface="Noto Sans"/>
-              </a:rPr>
-              <a:t>  </a:t>
-            </a:r>
-            <a:r>
-              <a:rPr sz="810" b="0" lang="ja-JP" altLang="en-US">
-                <a:solidFill>
-                  <a:srgbClr val="626669"/>
-                </a:solidFill>
-                <a:latin typeface="Noto Sans"/>
-                <a:ea typeface="Noto Sans CJK JP"/>
-                <a:cs typeface="Noto Sans"/>
-                <a:hlinkClick r:id="rId3"/>
-              </a:rPr>
-              <a:t>https://github.com/stanford-crfm/helm/blob/v0.3.0/src/helm/benchmark/metrics/numeracy_metrics.py</a:t>
-            </a:r>
-          </a:p>
-        </p:txBody>
-      </p:sp>
-    </p:spTree>
-  </p:cSld>
-  <p:clrMapOvr>
-    <a:masterClrMapping/>
-  </p:clrMapOvr>
-</p:sld>
-</file>
-
-<file path=ppt/slides/slide25.xml><?xml version="1.0" encoding="utf-8"?>
-<p:sld xmlns:a="http://schemas.openxmlformats.org/drawingml/2006/main" xmlns:p="http://schemas.openxmlformats.org/presentationml/2006/main" xmlns:r="http://schemas.openxmlformats.org/officeDocument/2006/relationships">
-  <p:cSld>
-    <p:spTree>
-      <p:nvGrpSpPr>
-        <p:cNvPr id="1" name=""/>
-        <p:cNvGrpSpPr/>
-        <p:nvPr/>
-      </p:nvGrpSpPr>
-      <p:grpSpPr/>
-      <p:sp>
-        <p:nvSpPr>
-          <p:cNvPr id="2" name="Title 1"/>
-          <p:cNvSpPr>
-            <a:spLocks noGrp="1"/>
-          </p:cNvSpPr>
-          <p:nvPr>
-            <p:ph type="title"/>
-          </p:nvPr>
-        </p:nvSpPr>
-        <p:spPr>
-          <a:xfrm>
-            <a:off x="468172" y="650138"/>
-            <a:ext cx="8206740" cy="616305"/>
-          </a:xfrm>
-        </p:spPr>
-        <p:txBody>
-          <a:bodyPr wrap="square" lIns="0" rIns="0" tIns="0" bIns="0">
-            <a:noAutofit/>
-          </a:bodyPr>
-          <a:lstStyle/>
-          <a:p>
-            <a:pPr algn="l">
-              <a:lnSpc>
-                <a:spcPct val="110000"/>
-              </a:lnSpc>
-              <a:buNone/>
-              <a:defRPr sz="2800" b="0">
-                <a:solidFill>
-                  <a:srgbClr val="303437"/>
-                </a:solidFill>
-                <a:latin typeface="Noto Sans"/>
-              </a:defRPr>
-            </a:pPr>
-            <a:r>
-              <a:rPr sz="2800" b="1" lang="ja-JP" altLang="en-US">
-                <a:solidFill>
-                  <a:srgbClr val="303437"/>
-                </a:solidFill>
-                <a:latin typeface="Noto Sans"/>
-                <a:ea typeface="Noto Sans CJK JP"/>
-                <a:cs typeface="Noto Sans"/>
-              </a:rPr>
-              <a:t>Classic v0.4.0の公開実行は0件</a:t>
-            </a:r>
-          </a:p>
-        </p:txBody>
-      </p:sp>
-      <p:sp>
-        <p:nvSpPr>
-          <p:cNvPr id="3" name="Title 2"/>
-          <p:cNvSpPr>
-            <a:spLocks noGrp="1"/>
-          </p:cNvSpPr>
-          <p:nvPr>
-            <p:ph type="title" idx="2"/>
-          </p:nvPr>
-        </p:nvSpPr>
-        <p:spPr>
-          <a:xfrm>
-            <a:off x="75895" y="0"/>
-            <a:ext cx="8115300" cy="480060"/>
-          </a:xfrm>
-        </p:spPr>
-        <p:txBody>
-          <a:bodyPr wrap="square" lIns="0" rIns="0" tIns="0" bIns="0" anchor="ctr">
-            <a:noAutofit/>
-          </a:bodyPr>
-          <a:lstStyle/>
-          <a:p>
-            <a:pPr algn="l">
-              <a:lnSpc>
-                <a:spcPct val="110000"/>
-              </a:lnSpc>
-              <a:buNone/>
-              <a:defRPr sz="1400" b="0">
-                <a:solidFill>
-                  <a:srgbClr val="303437"/>
-                </a:solidFill>
-                <a:latin typeface="Noto Sans"/>
-              </a:defRPr>
-            </a:pPr>
-            <a:r>
-              <a:rPr sz="1400" b="1" lang="ja-JP" altLang="en-US">
-                <a:solidFill>
-                  <a:srgbClr val="FFFEF8"/>
-                </a:solidFill>
-                <a:latin typeface="Noto Sans"/>
-                <a:ea typeface="Noto Sans CJK JP"/>
-                <a:cs typeface="Noto Sans"/>
-              </a:rPr>
-              <a:t>3. 数値の採点と公開実行</a:t>
-            </a:r>
-          </a:p>
-        </p:txBody>
-      </p:sp>
-      <p:graphicFrame>
-        <p:nvGraphicFramePr>
-          <p:cNvPr id="4" name="Table 3"/>
-          <p:cNvGraphicFramePr>
-            <a:graphicFrameLocks noGrp="1"/>
-          </p:cNvGraphicFramePr>
-          <p:nvPr/>
-        </p:nvGraphicFramePr>
-        <p:xfrm>
-          <a:off x="548640" y="1508760"/>
-          <a:ext cx="8046720" cy="2286000"/>
-        </p:xfrm>
-        <a:graphic>
-          <a:graphicData uri="http://schemas.openxmlformats.org/drawingml/2006/table">
-            <a:tbl>
-              <a:tblPr firstRow="0" bandRow="0"/>
-              <a:tblGrid>
-                <a:gridCol w="3474720"/>
-                <a:gridCol w="4572000"/>
-              </a:tblGrid>
-              <a:tr h="457200">
-                <a:tc>
-                  <a:txBody>
-                    <a:bodyPr wrap="square">
-                      <a:noAutofit/>
-                    </a:bodyPr>
-                    <a:lstStyle/>
-                    <a:p>
-                      <a:pPr algn="l">
-                        <a:lnSpc>
-                          <a:spcPts val="2300"/>
-                        </a:lnSpc>
-                        <a:buNone/>
-                        <a:defRPr sz="2000" b="0">
-                          <a:solidFill>
-                            <a:srgbClr val="303437"/>
-                          </a:solidFill>
-                          <a:latin typeface="Noto Sans"/>
-                        </a:defRPr>
-                      </a:pPr>
-                      <a:r>
-                        <a:rPr sz="2000" b="0" lang="ja-JP" altLang="en-US">
-                          <a:solidFill>
-                            <a:srgbClr val="303437"/>
-                          </a:solidFill>
-                          <a:latin typeface="Noto Sans"/>
-                          <a:ea typeface="Noto Sans CJK JP"/>
-                          <a:cs typeface="Noto Sans"/>
-                        </a:rPr>
-                        <a:t>確認した対象</a:t>
-                      </a:r>
-                    </a:p>
-                  </a:txBody>
-                  <a:tcPr marL="63500" marR="63500" marT="38100" marB="38100" anchor="ctr">
-                    <a:lnL w="7620">
-                      <a:noFill/>
-                    </a:lnL>
-                    <a:lnR w="7620">
-                      <a:noFill/>
-                    </a:lnR>
-                    <a:lnT w="15240">
-                      <a:solidFill>
-                        <a:srgbClr val="626669"/>
-                      </a:solidFill>
-                      <a:prstDash val="solid"/>
-                    </a:lnT>
-                    <a:lnB w="7620">
-                      <a:solidFill>
-                        <a:srgbClr val="626669"/>
-                      </a:solidFill>
-                      <a:prstDash val="solid"/>
-                    </a:lnB>
-                    <a:solidFill>
-                      <a:srgbClr val="FFFEF8"/>
-                    </a:solidFill>
-                  </a:tcPr>
-                </a:tc>
-                <a:tc>
-                  <a:txBody>
-                    <a:bodyPr wrap="square">
-                      <a:noAutofit/>
-                    </a:bodyPr>
-                    <a:lstStyle/>
-                    <a:p>
-                      <a:pPr algn="l">
-                        <a:lnSpc>
-                          <a:spcPts val="2300"/>
-                        </a:lnSpc>
-                        <a:buNone/>
-                        <a:defRPr sz="2000" b="0">
-                          <a:solidFill>
-                            <a:srgbClr val="303437"/>
-                          </a:solidFill>
-                          <a:latin typeface="Noto Sans"/>
-                        </a:defRPr>
-                      </a:pPr>
-                      <a:r>
-                        <a:rPr sz="2000" b="0" lang="ja-JP" altLang="en-US">
-                          <a:solidFill>
-                            <a:srgbClr val="303437"/>
-                          </a:solidFill>
-                          <a:latin typeface="Noto Sans"/>
-                          <a:ea typeface="Noto Sans CJK JP"/>
-                          <a:cs typeface="Noto Sans"/>
-                        </a:rPr>
-                        <a:t>公開内容</a:t>
-                      </a:r>
-                    </a:p>
-                  </a:txBody>
-                  <a:tcPr marL="63500" marR="63500" marT="38100" marB="38100" anchor="ctr">
-                    <a:lnL w="7620">
-                      <a:noFill/>
-                    </a:lnL>
-                    <a:lnR w="7620">
-                      <a:noFill/>
-                    </a:lnR>
-                    <a:lnT w="15240">
-                      <a:solidFill>
-                        <a:srgbClr val="626669"/>
-                      </a:solidFill>
-                      <a:prstDash val="solid"/>
-                    </a:lnT>
-                    <a:lnB w="7620">
-                      <a:solidFill>
-                        <a:srgbClr val="626669"/>
-                      </a:solidFill>
-                      <a:prstDash val="solid"/>
-                    </a:lnB>
-                    <a:solidFill>
-                      <a:srgbClr val="FFFEF8"/>
-                    </a:solidFill>
-                  </a:tcPr>
-                </a:tc>
-              </a:tr>
-              <a:tr h="457200">
-                <a:tc>
-                  <a:txBody>
-                    <a:bodyPr wrap="square">
-                      <a:noAutofit/>
-                    </a:bodyPr>
-                    <a:lstStyle/>
-                    <a:p>
-                      <a:pPr algn="l">
-                        <a:lnSpc>
-                          <a:spcPts val="2300"/>
-                        </a:lnSpc>
-                        <a:buNone/>
-                        <a:defRPr sz="2000" b="0">
-                          <a:solidFill>
-                            <a:srgbClr val="303437"/>
-                          </a:solidFill>
-                          <a:latin typeface="Noto Sans"/>
-                        </a:defRPr>
-                      </a:pPr>
-                      <a:r>
-                        <a:rPr sz="2000" b="0" lang="ja-JP" altLang="en-US">
-                          <a:solidFill>
-                            <a:srgbClr val="303437"/>
-                          </a:solidFill>
-                          <a:latin typeface="Noto Sans"/>
-                          <a:ea typeface="Noto Sans CJK JP"/>
-                          <a:cs typeface="Noto Sans"/>
-                        </a:rPr>
-                        <a:t>シナリオ定義</a:t>
-                      </a:r>
-                    </a:p>
-                  </a:txBody>
-                  <a:tcPr marL="63500" marR="63500" marT="38100" marB="38100" anchor="ctr">
-                    <a:lnL w="7620">
-                      <a:noFill/>
-                    </a:lnL>
-                    <a:lnR w="7620">
-                      <a:noFill/>
-                    </a:lnR>
-                    <a:lnT w="7620">
-                      <a:solidFill>
-                        <a:srgbClr val="626669"/>
-                      </a:solidFill>
-                      <a:prstDash val="solid"/>
-                    </a:lnT>
-                    <a:lnB w="7620">
-                      <a:noFill/>
-                    </a:lnB>
-                    <a:solidFill>
-                      <a:srgbClr val="FFFEF8"/>
-                    </a:solidFill>
-                  </a:tcPr>
-                </a:tc>
-                <a:tc>
-                  <a:txBody>
-                    <a:bodyPr wrap="square">
-                      <a:noAutofit/>
-                    </a:bodyPr>
-                    <a:lstStyle/>
-                    <a:p>
-                      <a:pPr algn="l">
-                        <a:lnSpc>
-                          <a:spcPts val="2300"/>
-                        </a:lnSpc>
-                        <a:buNone/>
-                        <a:defRPr sz="2000" b="0">
-                          <a:solidFill>
-                            <a:srgbClr val="303437"/>
-                          </a:solidFill>
-                          <a:latin typeface="Noto Sans"/>
-                        </a:defRPr>
-                      </a:pPr>
-                      <a:r>
-                        <a:rPr sz="2000" b="0" lang="ja-JP" altLang="en-US">
-                          <a:solidFill>
-                            <a:srgbClr val="303437"/>
-                          </a:solidFill>
-                          <a:latin typeface="Noto Sans"/>
-                          <a:ea typeface="Noto Sans CJK JP"/>
-                          <a:cs typeface="Noto Sans"/>
-                        </a:rPr>
-                        <a:t>numeracyが登録されている</a:t>
-                      </a:r>
-                    </a:p>
-                  </a:txBody>
-                  <a:tcPr marL="63500" marR="63500" marT="38100" marB="38100" anchor="ctr">
-                    <a:lnL w="7620">
-                      <a:noFill/>
-                    </a:lnL>
-                    <a:lnR w="7620">
-                      <a:noFill/>
-                    </a:lnR>
-                    <a:lnT w="7620">
-                      <a:solidFill>
-                        <a:srgbClr val="626669"/>
-                      </a:solidFill>
-                      <a:prstDash val="solid"/>
-                    </a:lnT>
-                    <a:lnB w="7620">
-                      <a:noFill/>
-                    </a:lnB>
-                    <a:solidFill>
-                      <a:srgbClr val="FFFEF8"/>
-                    </a:solidFill>
-                  </a:tcPr>
-                </a:tc>
-              </a:tr>
-              <a:tr h="457200">
-                <a:tc>
-                  <a:txBody>
-                    <a:bodyPr wrap="square">
-                      <a:noAutofit/>
-                    </a:bodyPr>
-                    <a:lstStyle/>
-                    <a:p>
-                      <a:pPr algn="l">
-                        <a:lnSpc>
-                          <a:spcPts val="2300"/>
-                        </a:lnSpc>
-                        <a:buNone/>
-                        <a:defRPr sz="2000" b="0">
-                          <a:solidFill>
-                            <a:srgbClr val="303437"/>
-                          </a:solidFill>
-                          <a:latin typeface="Noto Sans"/>
-                        </a:defRPr>
-                      </a:pPr>
-                      <a:r>
-                        <a:rPr sz="2000" b="0" lang="ja-JP" altLang="en-US">
-                          <a:solidFill>
-                            <a:srgbClr val="303437"/>
-                          </a:solidFill>
-                          <a:latin typeface="Noto Sans"/>
-                          <a:ea typeface="Noto Sans CJK JP"/>
-                          <a:cs typeface="Noto Sans"/>
-                        </a:rPr>
-                        <a:t>主指標</a:t>
-                      </a:r>
-                    </a:p>
-                  </a:txBody>
-                  <a:tcPr marL="63500" marR="63500" marT="38100" marB="38100" anchor="ctr">
-                    <a:lnL w="7620">
-                      <a:noFill/>
-                    </a:lnL>
-                    <a:lnR w="7620">
-                      <a:noFill/>
-                    </a:lnR>
-                    <a:lnT w="7620">
-                      <a:noFill/>
-                    </a:lnT>
-                    <a:lnB w="7620">
-                      <a:noFill/>
-                    </a:lnB>
-                    <a:solidFill>
-                      <a:srgbClr val="FFFEF8"/>
-                    </a:solidFill>
-                  </a:tcPr>
-                </a:tc>
-                <a:tc>
-                  <a:txBody>
-                    <a:bodyPr wrap="square">
-                      <a:noAutofit/>
-                    </a:bodyPr>
-                    <a:lstStyle/>
-                    <a:p>
-                      <a:pPr algn="l">
-                        <a:lnSpc>
-                          <a:spcPts val="2300"/>
-                        </a:lnSpc>
-                        <a:buNone/>
-                        <a:defRPr sz="2000" b="0">
-                          <a:solidFill>
-                            <a:srgbClr val="303437"/>
-                          </a:solidFill>
-                          <a:latin typeface="Noto Sans"/>
-                        </a:defRPr>
-                      </a:pPr>
-                      <a:r>
-                        <a:rPr sz="2000" b="0" lang="ja-JP" altLang="en-US">
-                          <a:solidFill>
-                            <a:srgbClr val="303437"/>
-                          </a:solidFill>
-                          <a:latin typeface="Noto Sans"/>
-                          <a:ea typeface="Noto Sans CJK JP"/>
-                          <a:cs typeface="Noto Sans"/>
-                        </a:rPr>
-                        <a:t>absolute_value_difference / test</a:t>
-                      </a:r>
-                    </a:p>
-                  </a:txBody>
-                  <a:tcPr marL="63500" marR="63500" marT="38100" marB="38100" anchor="ctr">
-                    <a:lnL w="7620">
-                      <a:noFill/>
-                    </a:lnL>
-                    <a:lnR w="7620">
-                      <a:noFill/>
-                    </a:lnR>
-                    <a:lnT w="7620">
-                      <a:noFill/>
-                    </a:lnT>
-                    <a:lnB w="7620">
-                      <a:noFill/>
-                    </a:lnB>
-                    <a:solidFill>
-                      <a:srgbClr val="FFFEF8"/>
-                    </a:solidFill>
-                  </a:tcPr>
-                </a:tc>
-              </a:tr>
-              <a:tr h="457200">
-                <a:tc>
-                  <a:txBody>
-                    <a:bodyPr wrap="square">
-                      <a:noAutofit/>
-                    </a:bodyPr>
-                    <a:lstStyle/>
-                    <a:p>
-                      <a:pPr algn="l">
-                        <a:lnSpc>
-                          <a:spcPts val="2300"/>
-                        </a:lnSpc>
-                        <a:buNone/>
-                        <a:defRPr sz="2000" b="0">
-                          <a:solidFill>
-                            <a:srgbClr val="303437"/>
-                          </a:solidFill>
-                          <a:latin typeface="Noto Sans"/>
-                        </a:defRPr>
-                      </a:pPr>
-                      <a:r>
-                        <a:rPr sz="2000" b="0" lang="ja-JP" altLang="en-US">
-                          <a:solidFill>
-                            <a:srgbClr val="303437"/>
-                          </a:solidFill>
-                          <a:latin typeface="Noto Sans"/>
-                          <a:ea typeface="Noto Sans CJK JP"/>
-                          <a:cs typeface="Noto Sans"/>
-                        </a:rPr>
-                        <a:t>公開run_specs</a:t>
-                      </a:r>
-                    </a:p>
-                  </a:txBody>
-                  <a:tcPr marL="63500" marR="63500" marT="38100" marB="38100" anchor="ctr">
-                    <a:lnL w="7620">
-                      <a:noFill/>
-                    </a:lnL>
-                    <a:lnR w="7620">
-                      <a:noFill/>
-                    </a:lnR>
-                    <a:lnT w="7620">
-                      <a:noFill/>
-                    </a:lnT>
-                    <a:lnB w="7620">
-                      <a:noFill/>
-                    </a:lnB>
-                    <a:solidFill>
-                      <a:srgbClr val="FFFEF8"/>
-                    </a:solidFill>
-                  </a:tcPr>
-                </a:tc>
-                <a:tc>
-                  <a:txBody>
-                    <a:bodyPr wrap="square">
-                      <a:noAutofit/>
-                    </a:bodyPr>
-                    <a:lstStyle/>
-                    <a:p>
-                      <a:pPr algn="l">
-                        <a:lnSpc>
-                          <a:spcPts val="2300"/>
-                        </a:lnSpc>
-                        <a:buNone/>
-                        <a:defRPr sz="2000" b="0">
-                          <a:solidFill>
-                            <a:srgbClr val="303437"/>
-                          </a:solidFill>
-                          <a:latin typeface="Noto Sans"/>
-                        </a:defRPr>
-                      </a:pPr>
-                      <a:r>
-                        <a:rPr sz="2000" b="0" lang="ja-JP" altLang="en-US">
-                          <a:solidFill>
-                            <a:srgbClr val="303437"/>
-                          </a:solidFill>
-                          <a:latin typeface="Noto Sans"/>
-                          <a:ea typeface="Noto Sans CJK JP"/>
-                          <a:cs typeface="Noto Sans"/>
-                        </a:rPr>
-                        <a:t>該当runは0件</a:t>
-                      </a:r>
-                    </a:p>
-                  </a:txBody>
-                  <a:tcPr marL="63500" marR="63500" marT="38100" marB="38100" anchor="ctr">
-                    <a:lnL w="7620">
-                      <a:noFill/>
-                    </a:lnL>
-                    <a:lnR w="7620">
-                      <a:noFill/>
-                    </a:lnR>
-                    <a:lnT w="7620">
-                      <a:noFill/>
-                    </a:lnT>
-                    <a:lnB w="7620">
-                      <a:noFill/>
-                    </a:lnB>
-                    <a:solidFill>
-                      <a:srgbClr val="FFFEF8"/>
-                    </a:solidFill>
-                  </a:tcPr>
-                </a:tc>
-              </a:tr>
-              <a:tr h="457200">
-                <a:tc>
-                  <a:txBody>
-                    <a:bodyPr wrap="square">
-                      <a:noAutofit/>
-                    </a:bodyPr>
-                    <a:lstStyle/>
-                    <a:p>
-                      <a:pPr algn="l">
-                        <a:lnSpc>
-                          <a:spcPts val="2300"/>
-                        </a:lnSpc>
-                        <a:buNone/>
-                        <a:defRPr sz="2000" b="0">
-                          <a:solidFill>
-                            <a:srgbClr val="303437"/>
-                          </a:solidFill>
-                          <a:latin typeface="Noto Sans"/>
-                        </a:defRPr>
-                      </a:pPr>
-                      <a:r>
-                        <a:rPr sz="2000" b="0" lang="ja-JP" altLang="en-US">
-                          <a:solidFill>
-                            <a:srgbClr val="303437"/>
-                          </a:solidFill>
-                          <a:latin typeface="Noto Sans"/>
-                          <a:ea typeface="Noto Sans CJK JP"/>
-                          <a:cs typeface="Noto Sans"/>
-                        </a:rPr>
-                        <a:t>モデル別の成績</a:t>
-                      </a:r>
-                    </a:p>
-                  </a:txBody>
-                  <a:tcPr marL="63500" marR="63500" marT="38100" marB="38100" anchor="ctr">
-                    <a:lnL w="7620">
-                      <a:noFill/>
-                    </a:lnL>
-                    <a:lnR w="7620">
-                      <a:noFill/>
-                    </a:lnR>
-                    <a:lnT w="7620">
-                      <a:noFill/>
-                    </a:lnT>
-                    <a:lnB w="15240">
-                      <a:solidFill>
-                        <a:srgbClr val="626669"/>
-                      </a:solidFill>
-                      <a:prstDash val="solid"/>
-                    </a:lnB>
-                    <a:solidFill>
-                      <a:srgbClr val="FFFEF8"/>
-                    </a:solidFill>
-                  </a:tcPr>
-                </a:tc>
-                <a:tc>
-                  <a:txBody>
-                    <a:bodyPr wrap="square">
-                      <a:noAutofit/>
-                    </a:bodyPr>
-                    <a:lstStyle/>
-                    <a:p>
-                      <a:pPr algn="l">
-                        <a:lnSpc>
-                          <a:spcPts val="2300"/>
-                        </a:lnSpc>
-                        <a:buNone/>
-                        <a:defRPr sz="2000" b="0">
-                          <a:solidFill>
-                            <a:srgbClr val="303437"/>
-                          </a:solidFill>
-                          <a:latin typeface="Noto Sans"/>
-                        </a:defRPr>
-                      </a:pPr>
-                      <a:r>
-                        <a:rPr sz="2000" b="0" lang="ja-JP" altLang="en-US">
-                          <a:solidFill>
-                            <a:srgbClr val="303437"/>
-                          </a:solidFill>
-                          <a:latin typeface="Noto Sans"/>
-                          <a:ea typeface="Noto Sans CJK JP"/>
-                          <a:cs typeface="Noto Sans"/>
-                        </a:rPr>
-                        <a:t>掲載された値はない</a:t>
-                      </a:r>
-                    </a:p>
-                  </a:txBody>
-                  <a:tcPr marL="63500" marR="63500" marT="38100" marB="38100" anchor="ctr">
-                    <a:lnL w="7620">
-                      <a:noFill/>
-                    </a:lnL>
-                    <a:lnR w="7620">
-                      <a:noFill/>
-                    </a:lnR>
-                    <a:lnT w="7620">
-                      <a:noFill/>
-                    </a:lnT>
-                    <a:lnB w="15240">
-                      <a:solidFill>
-                        <a:srgbClr val="626669"/>
-                      </a:solidFill>
-                      <a:prstDash val="solid"/>
-                    </a:lnB>
-                    <a:solidFill>
-                      <a:srgbClr val="FFFEF8"/>
-                    </a:solidFill>
-                  </a:tcPr>
-                </a:tc>
-              </a:tr>
-            </a:tbl>
-          </a:graphicData>
-        </a:graphic>
-      </p:graphicFrame>
-      <p:sp>
-        <p:nvSpPr>
-          <p:cNvPr id="5" name="TextBox 4"/>
-          <p:cNvSpPr txBox="1"/>
-          <p:nvPr/>
-        </p:nvSpPr>
-        <p:spPr>
-          <a:xfrm>
-            <a:off x="594360" y="3995928"/>
-            <a:ext cx="7955279" cy="658368"/>
-          </a:xfrm>
-          <a:prstGeom prst="rect">
-            <a:avLst/>
-          </a:prstGeom>
-          <a:noFill/>
-        </p:spPr>
-        <p:txBody>
-          <a:bodyPr wrap="square" lIns="0" rIns="0" tIns="0" bIns="0">
-            <a:noAutofit/>
-          </a:bodyPr>
-          <a:lstStyle/>
-          <a:p>
-            <a:pPr algn="l">
-              <a:lnSpc>
-                <a:spcPts val="2047"/>
-              </a:lnSpc>
-              <a:spcBef>
-                <a:spcPts val="0"/>
-              </a:spcBef>
-              <a:spcAft>
-                <a:spcPts val="0"/>
-              </a:spcAft>
-              <a:buNone/>
-              <a:defRPr sz="1750" b="0">
-                <a:solidFill>
-                  <a:srgbClr val="303437"/>
-                </a:solidFill>
-                <a:latin typeface="Noto Sans"/>
-              </a:defRPr>
-            </a:pPr>
-            <a:r>
-              <a:rPr sz="1750" b="0" lang="ja-JP" altLang="en-US">
-                <a:solidFill>
-                  <a:srgbClr val="303437"/>
-                </a:solidFill>
-                <a:latin typeface="Noto Sans"/>
-                <a:ea typeface="Noto Sans CJK JP"/>
-                <a:cs typeface="Noto Sans"/>
-              </a:rPr>
-              <a:t>2026-10-18にlatest設定とv0.4.0の配布JSONを確認した。</a:t>
-            </a:r>
-          </a:p>
-        </p:txBody>
-      </p:sp>
-      <p:sp>
-        <p:nvSpPr>
-          <p:cNvPr id="6" name="sources"/>
-          <p:cNvSpPr txBox="1"/>
-          <p:nvPr/>
-        </p:nvSpPr>
-        <p:spPr>
-          <a:xfrm>
-            <a:off x="502920" y="4700016"/>
-            <a:ext cx="8183879" cy="530352"/>
-          </a:xfrm>
-          <a:prstGeom prst="rect">
-            <a:avLst/>
-          </a:prstGeom>
-          <a:noFill/>
-        </p:spPr>
-        <p:txBody>
-          <a:bodyPr wrap="square" lIns="0" rIns="0" tIns="0" bIns="0">
-            <a:noAutofit/>
-          </a:bodyPr>
-          <a:lstStyle/>
-          <a:p>
-            <a:pPr algn="l">
-              <a:lnSpc>
-                <a:spcPts val="940"/>
-              </a:lnSpc>
-              <a:spcBef>
-                <a:spcPts val="0"/>
-              </a:spcBef>
-              <a:spcAft>
-                <a:spcPts val="140"/>
-              </a:spcAft>
-              <a:buNone/>
-              <a:defRPr sz="810" b="0">
-                <a:solidFill>
-                  <a:srgbClr val="303437"/>
-                </a:solidFill>
-                <a:latin typeface="Noto Sans"/>
-              </a:defRPr>
-            </a:pPr>
-            <a:r>
-              <a:rPr sz="810" b="0" lang="ja-JP" altLang="en-US">
-                <a:solidFill>
-                  <a:srgbClr val="626669"/>
-                </a:solidFill>
-                <a:latin typeface="Noto Sans"/>
-                <a:ea typeface="Noto Sans CJK JP"/>
-                <a:cs typeface="Noto Sans"/>
-              </a:rPr>
-              <a:t>[1] Stanford CRFM. HELM Classic v0.4.0 (2023-11-17).</a:t>
-            </a:r>
-            <a:r>
-              <a:rPr sz="810" b="0" lang="ja-JP" altLang="en-US">
-                <a:solidFill>
-                  <a:srgbClr val="626669"/>
-                </a:solidFill>
-                <a:latin typeface="Noto Sans"/>
-                <a:ea typeface="Noto Sans CJK JP"/>
-                <a:cs typeface="Noto Sans"/>
-              </a:rPr>
-              <a:t>  </a:t>
-            </a:r>
-            <a:r>
-              <a:rPr sz="810" b="0" lang="ja-JP" altLang="en-US">
-                <a:solidFill>
-                  <a:srgbClr val="626669"/>
-                </a:solidFill>
-                <a:latin typeface="Noto Sans"/>
-                <a:ea typeface="Noto Sans CJK JP"/>
-                <a:cs typeface="Noto Sans"/>
-                <a:hlinkClick r:id="rId2"/>
-              </a:rPr>
-              <a:t>https://crfm.stanford.edu/helm/classic/v0.4.0/</a:t>
-            </a:r>
-          </a:p>
-        </p:txBody>
-      </p:sp>
-    </p:spTree>
-  </p:cSld>
-  <p:clrMapOvr>
-    <a:masterClrMapping/>
-  </p:clrMapOvr>
-</p:sld>
-</file>
-
-<file path=ppt/slides/slide26.xml><?xml version="1.0" encoding="utf-8"?>
-<p:sld xmlns:a="http://schemas.openxmlformats.org/drawingml/2006/main" xmlns:p="http://schemas.openxmlformats.org/presentationml/2006/main" xmlns:r="http://schemas.openxmlformats.org/officeDocument/2006/relationships">
-  <p:cSld>
-    <p:spTree>
-      <p:nvGrpSpPr>
-        <p:cNvPr id="1" name=""/>
-        <p:cNvGrpSpPr/>
-        <p:nvPr/>
-      </p:nvGrpSpPr>
-      <p:grpSpPr/>
-      <p:sp>
-        <p:nvSpPr>
-          <p:cNvPr id="2" name="Title 1"/>
-          <p:cNvSpPr>
-            <a:spLocks noGrp="1"/>
-          </p:cNvSpPr>
-          <p:nvPr>
-            <p:ph type="title"/>
-          </p:nvPr>
-        </p:nvSpPr>
-        <p:spPr>
-          <a:xfrm>
-            <a:off x="468172" y="650138"/>
-            <a:ext cx="8206740" cy="616305"/>
-          </a:xfrm>
-        </p:spPr>
-        <p:txBody>
-          <a:bodyPr wrap="square" lIns="0" rIns="0" tIns="0" bIns="0">
-            <a:noAutofit/>
-          </a:bodyPr>
-          <a:lstStyle/>
-          <a:p>
-            <a:pPr algn="l">
-              <a:lnSpc>
-                <a:spcPct val="110000"/>
-              </a:lnSpc>
-              <a:buNone/>
-              <a:defRPr sz="2800" b="0">
-                <a:solidFill>
-                  <a:srgbClr val="303437"/>
-                </a:solidFill>
-                <a:latin typeface="Noto Sans"/>
-              </a:defRPr>
-            </a:pPr>
-            <a:r>
-              <a:rPr sz="2800" b="1" lang="ja-JP" altLang="en-US">
-                <a:solidFill>
-                  <a:srgbClr val="303437"/>
-                </a:solidFill>
-                <a:latin typeface="Noto Sans"/>
-                <a:ea typeface="Noto Sans CJK JP"/>
-                <a:cs typeface="Noto Sans"/>
-              </a:rPr>
-              <a:t>生成できる設定と公開成績を区別する</a:t>
-            </a:r>
-          </a:p>
-        </p:txBody>
-      </p:sp>
-      <p:sp>
-        <p:nvSpPr>
-          <p:cNvPr id="3" name="Text Placeholder 2"/>
-          <p:cNvSpPr>
-            <a:spLocks noGrp="1"/>
-          </p:cNvSpPr>
-          <p:nvPr>
-            <p:ph type="body" idx="1"/>
-          </p:nvPr>
-        </p:nvSpPr>
-        <p:spPr>
-          <a:xfrm>
-            <a:off x="594360" y="1463040"/>
-            <a:ext cx="7955279" cy="3044952"/>
-          </a:xfrm>
-        </p:spPr>
-        <p:txBody>
-          <a:bodyPr wrap="square" tIns="91440" bIns="91440">
-            <a:noAutofit/>
-          </a:bodyPr>
-          <a:lstStyle/>
-          <a:p>
-            <a:pPr marL="457200" indent="-355600">
-              <a:lnSpc>
-                <a:spcPts val="2618"/>
-              </a:lnSpc>
-              <a:spcAft>
-                <a:spcPts val="700"/>
-              </a:spcAft>
-              <a:buSzPct val="60455"/>
-              <a:buFont typeface="Noto Sans CJK JP"/>
-              <a:buChar char="●"/>
-              <a:defRPr sz="2200" b="0">
-                <a:solidFill>
-                  <a:srgbClr val="303437"/>
-                </a:solidFill>
-                <a:latin typeface="Noto Sans"/>
-              </a:defRPr>
-            </a:pPr>
-            <a:r>
-              <a:rPr sz="2200" b="0" lang="ja-JP" altLang="en-US">
-                <a:solidFill>
-                  <a:srgbClr val="303437"/>
-                </a:solidFill>
-                <a:latin typeface="Noto Sans"/>
-                <a:ea typeface="Noto Sans CJK JP"/>
-                <a:cs typeface="Noto Sans"/>
-              </a:rPr>
-              <a:t>公開runは0件だった。0点というモデル成績が記録されているのではない。</a:t>
-            </a:r>
-          </a:p>
-          <a:p>
-            <a:pPr marL="457200" indent="-355600">
-              <a:lnSpc>
-                <a:spcPts val="2618"/>
-              </a:lnSpc>
-              <a:spcAft>
-                <a:spcPts val="700"/>
-              </a:spcAft>
-              <a:buSzPct val="60455"/>
-              <a:buFont typeface="Noto Sans CJK JP"/>
-              <a:buChar char="●"/>
-              <a:defRPr sz="2200" b="0">
-                <a:solidFill>
-                  <a:srgbClr val="303437"/>
-                </a:solidFill>
-                <a:latin typeface="Noto Sans"/>
-              </a:defRPr>
-            </a:pPr>
-            <a:r>
-              <a:rPr sz="2200" b="0" lang="ja-JP" altLang="en-US">
-                <a:solidFill>
-                  <a:srgbClr val="303437"/>
-                </a:solidFill>
-                <a:latin typeface="Noto Sans"/>
-                <a:ea typeface="Noto Sans CJK JP"/>
-                <a:cs typeface="Noto Sans"/>
-              </a:rPr>
-              <a:t>v0.3.0のexample／standardはレコードを生成する一方、既定のfunctionは空のリストを返す。</a:t>
-            </a:r>
-          </a:p>
-          <a:p>
-            <a:pPr marL="457200" indent="-355600">
-              <a:lnSpc>
-                <a:spcPts val="2618"/>
-              </a:lnSpc>
-              <a:spcAft>
-                <a:spcPts val="0"/>
-              </a:spcAft>
-              <a:buSzPct val="60455"/>
-              <a:buFont typeface="Noto Sans CJK JP"/>
-              <a:buChar char="●"/>
-              <a:defRPr sz="2200" b="0">
-                <a:solidFill>
-                  <a:srgbClr val="303437"/>
-                </a:solidFill>
-                <a:latin typeface="Noto Sans"/>
-              </a:defRPr>
-            </a:pPr>
-            <a:r>
-              <a:rPr sz="2200" b="0" lang="ja-JP" altLang="en-US">
-                <a:solidFill>
-                  <a:srgbClr val="303437"/>
-                </a:solidFill>
-                <a:latin typeface="Noto Sans"/>
-                <a:ea typeface="Noto Sans CJK JP"/>
-                <a:cs typeface="Noto Sans"/>
-              </a:rPr>
-              <a:t>この資料では、動作する生成器の出力と採点実装を説明する。未実行のモデル得点を補っていない。</a:t>
-            </a:r>
-          </a:p>
-        </p:txBody>
-      </p:sp>
-      <p:sp>
-        <p:nvSpPr>
-          <p:cNvPr id="4" name="Title 3"/>
-          <p:cNvSpPr>
-            <a:spLocks noGrp="1"/>
-          </p:cNvSpPr>
-          <p:nvPr>
-            <p:ph type="title" idx="2"/>
-          </p:nvPr>
-        </p:nvSpPr>
-        <p:spPr>
-          <a:xfrm>
-            <a:off x="75895" y="0"/>
-            <a:ext cx="8115300" cy="480060"/>
-          </a:xfrm>
-        </p:spPr>
-        <p:txBody>
-          <a:bodyPr wrap="square" lIns="0" rIns="0" tIns="0" bIns="0" anchor="ctr">
-            <a:noAutofit/>
-          </a:bodyPr>
-          <a:lstStyle/>
-          <a:p>
-            <a:pPr algn="l">
-              <a:lnSpc>
-                <a:spcPct val="110000"/>
-              </a:lnSpc>
-              <a:buNone/>
-              <a:defRPr sz="1400" b="0">
-                <a:solidFill>
-                  <a:srgbClr val="303437"/>
-                </a:solidFill>
-                <a:latin typeface="Noto Sans"/>
-              </a:defRPr>
-            </a:pPr>
-            <a:r>
-              <a:rPr sz="1400" b="1" lang="ja-JP" altLang="en-US">
-                <a:solidFill>
-                  <a:srgbClr val="FFFEF8"/>
-                </a:solidFill>
-                <a:latin typeface="Noto Sans"/>
-                <a:ea typeface="Noto Sans CJK JP"/>
-                <a:cs typeface="Noto Sans"/>
-              </a:rPr>
-              <a:t>3. 数値の採点と公開実行</a:t>
-            </a:r>
-          </a:p>
-        </p:txBody>
-      </p:sp>
-      <p:sp>
-        <p:nvSpPr>
-          <p:cNvPr id="5" name="sources"/>
-          <p:cNvSpPr txBox="1"/>
-          <p:nvPr/>
-        </p:nvSpPr>
-        <p:spPr>
-          <a:xfrm>
-            <a:off x="502920" y="4700016"/>
-            <a:ext cx="8183879" cy="530352"/>
-          </a:xfrm>
-          <a:prstGeom prst="rect">
-            <a:avLst/>
-          </a:prstGeom>
-          <a:noFill/>
-        </p:spPr>
-        <p:txBody>
-          <a:bodyPr wrap="square" lIns="0" rIns="0" tIns="0" bIns="0">
-            <a:noAutofit/>
-          </a:bodyPr>
-          <a:lstStyle/>
-          <a:p>
-            <a:pPr algn="l">
-              <a:lnSpc>
-                <a:spcPts val="940"/>
-              </a:lnSpc>
-              <a:spcBef>
-                <a:spcPts val="0"/>
-              </a:spcBef>
-              <a:spcAft>
-                <a:spcPts val="140"/>
-              </a:spcAft>
-              <a:buNone/>
-              <a:defRPr sz="810" b="0">
-                <a:solidFill>
-                  <a:srgbClr val="303437"/>
-                </a:solidFill>
-                <a:latin typeface="Noto Sans"/>
-              </a:defRPr>
-            </a:pPr>
-            <a:r>
-              <a:rPr sz="810" b="0" lang="ja-JP" altLang="en-US">
-                <a:solidFill>
-                  <a:srgbClr val="626669"/>
-                </a:solidFill>
-                <a:latin typeface="Noto Sans"/>
-                <a:ea typeface="Noto Sans CJK JP"/>
-                <a:cs typeface="Noto Sans"/>
-              </a:rPr>
-              <a:t>[1] Stanford CRFM. NumeracyScenario, HELM v0.3.0.</a:t>
-            </a:r>
-            <a:r>
-              <a:rPr sz="810" b="0" lang="ja-JP" altLang="en-US">
-                <a:solidFill>
-                  <a:srgbClr val="626669"/>
-                </a:solidFill>
-                <a:latin typeface="Noto Sans"/>
-                <a:ea typeface="Noto Sans CJK JP"/>
-                <a:cs typeface="Noto Sans"/>
-              </a:rPr>
-              <a:t>  </a:t>
-            </a:r>
-            <a:r>
-              <a:rPr sz="810" b="0" lang="ja-JP" altLang="en-US">
-                <a:solidFill>
-                  <a:srgbClr val="626669"/>
-                </a:solidFill>
-                <a:latin typeface="Noto Sans"/>
-                <a:ea typeface="Noto Sans CJK JP"/>
-                <a:cs typeface="Noto Sans"/>
-                <a:hlinkClick r:id="rId2"/>
-              </a:rPr>
-              <a:t>https://github.com/stanford-crfm/helm/blob/v0.3.0/src/helm/benchmark/scenarios/numeracy_scenario.py</a:t>
-            </a:r>
-          </a:p>
-          <a:p>
-            <a:pPr>
-              <a:lnSpc>
-                <a:spcPts val="940"/>
-              </a:lnSpc>
-              <a:spcAft>
-                <a:spcPts val="140"/>
-              </a:spcAft>
-              <a:buNone/>
-              <a:defRPr sz="810" b="0">
-                <a:solidFill>
-                  <a:srgbClr val="303437"/>
-                </a:solidFill>
-                <a:latin typeface="Noto Sans"/>
-              </a:defRPr>
-            </a:pPr>
-            <a:r>
-              <a:rPr sz="810" b="0" lang="ja-JP" altLang="en-US">
-                <a:solidFill>
-                  <a:srgbClr val="626669"/>
-                </a:solidFill>
-                <a:latin typeface="Noto Sans"/>
-                <a:ea typeface="Noto Sans CJK JP"/>
-                <a:cs typeface="Noto Sans"/>
-              </a:rPr>
-              <a:t>[2] Stanford CRFM. HELM Classic v0.4.0 (2023-11-17).</a:t>
-            </a:r>
-            <a:r>
-              <a:rPr sz="810" b="0" lang="ja-JP" altLang="en-US">
-                <a:solidFill>
-                  <a:srgbClr val="626669"/>
-                </a:solidFill>
-                <a:latin typeface="Noto Sans"/>
-                <a:ea typeface="Noto Sans CJK JP"/>
-                <a:cs typeface="Noto Sans"/>
-              </a:rPr>
-              <a:t>  </a:t>
-            </a:r>
-            <a:r>
-              <a:rPr sz="810" b="0" lang="ja-JP" altLang="en-US">
-                <a:solidFill>
-                  <a:srgbClr val="626669"/>
-                </a:solidFill>
-                <a:latin typeface="Noto Sans"/>
-                <a:ea typeface="Noto Sans CJK JP"/>
-                <a:cs typeface="Noto Sans"/>
-                <a:hlinkClick r:id="rId3"/>
-              </a:rPr>
-              <a:t>https://crfm.stanford.edu/helm/classic/v0.4.0/</a:t>
             </a:r>
           </a:p>
         </p:txBody>
@@ -17831,7 +14149,7 @@
                 <a:ea typeface="Noto Sans CJK JP"/>
                 <a:cs typeface="Noto Sans"/>
               </a:rPr>
-              <a:t>4. 再現方法と利用の範囲</a:t>
+              <a:t>4. 生成器を使って試す</a:t>
             </a:r>
           </a:p>
         </p:txBody>
@@ -17879,7 +14197,7 @@
                 <a:ea typeface="Noto Sans CJK JP"/>
                 <a:cs typeface="Noto Sans"/>
               </a:rPr>
-              <a:t>4. 再現方法と利用の範囲</a:t>
+              <a:t>4. 生成器を使って試す</a:t>
             </a:r>
           </a:p>
         </p:txBody>
@@ -17945,7 +14263,7 @@
                 <a:ea typeface="Noto Sans CJK JP"/>
                 <a:cs typeface="Noto Sans"/>
               </a:rPr>
-              <a:t>規則の推測と適用を切り分けて調べる</a:t>
+              <a:t>例の数や入力範囲を変えて、推論を調べる</a:t>
             </a:r>
           </a:p>
         </p:txBody>
@@ -17998,7 +14316,7 @@
                 <a:ea typeface="Noto Sans CJK JP"/>
                 <a:cs typeface="Noto Sans"/>
               </a:rPr>
-              <a:t>一つの式に多くの入出力例を与え、未知の入力点へ適用できるかを調べる。</a:t>
+              <a:t>一つの式について、学習用の例を何組見せれば、新しい入力に正しく答えられるかを調べられる。</a:t>
             </a:r>
           </a:p>
           <a:p>
@@ -18028,7 +14346,7 @@
                 <a:ea typeface="Noto Sans CJK JP"/>
                 <a:cs typeface="Noto Sans"/>
               </a:rPr>
-              <a:t>入力範囲、係数範囲、訓練例の数、表示順序を固定すると、数値の規則への適合を比較する評価を組める。</a:t>
+              <a:t>係数の範囲、入力の範囲、例の数や並び順を決めると、モデルを同じ条件で比較できる。</a:t>
             </a:r>
           </a:p>
           <a:p>
@@ -18058,7 +14376,7 @@
                 <a:ea typeface="Noto Sans CJK JP"/>
                 <a:cs typeface="Noto Sans"/>
               </a:rPr>
-              <a:t>答えの規模によって、同じ割合のずれでも絶対誤差が変わる。関数型と出力範囲も結果と対応させる。</a:t>
+              <a:t>1変数から2変数へ、一次式から二次式へと、規則の形を変えて推論の違いを見ることもできる。</a:t>
             </a:r>
           </a:p>
         </p:txBody>
@@ -18106,7 +14424,7 @@
                 <a:ea typeface="Noto Sans CJK JP"/>
                 <a:cs typeface="Noto Sans"/>
               </a:rPr>
-              <a:t>4. 再現方法と利用の範囲</a:t>
+              <a:t>4. 生成器を使って試す</a:t>
             </a:r>
           </a:p>
         </p:txBody>
@@ -18211,7 +14529,7 @@
                 <a:ea typeface="Noto Sans CJK JP"/>
                 <a:cs typeface="Noto Sans"/>
               </a:rPr>
-              <a:t>[2] Stanford CRFM. NumeracyScenario, HELM v0.3.0.</a:t>
+              <a:t>[2] Stanford CRFM. NumeracyScenario（v0.3.0）。</a:t>
             </a:r>
             <a:r>
               <a:rPr sz="810" b="0" lang="ja-JP" altLang="en-US">
@@ -18348,7 +14666,7 @@
                 <a:ea typeface="Noto Sans CJK JP"/>
                 <a:cs typeface="Noto Sans"/>
               </a:rPr>
-              <a:t>4. 再現方法と利用の範囲</a:t>
+              <a:t>4. 生成器を使って試す</a:t>
             </a:r>
           </a:p>
         </p:txBody>
@@ -18361,8 +14679,8 @@
         </p:nvSpPr>
         <p:spPr>
           <a:xfrm>
-            <a:off x="548640" y="1536192"/>
-            <a:ext cx="8046720" cy="1912743"/>
+            <a:off x="548640" y="1511300"/>
+            <a:ext cx="8046720" cy="2002366"/>
           </a:xfrm>
           <a:prstGeom prst="rect">
             <a:avLst/>
@@ -18390,14 +14708,14 @@
           </a:fontRef>
         </p:style>
         <p:txBody>
-          <a:bodyPr rtlCol="0" anchor="t" wrap="none" lIns="152400" rIns="152400" tIns="63500" bIns="127000">
+          <a:bodyPr rtlCol="0" anchor="t" wrap="none" lIns="152400" rIns="152400" tIns="88900" bIns="127000">
             <a:noAutofit/>
           </a:bodyPr>
           <a:lstStyle/>
           <a:p>
             <a:pPr algn="l">
               <a:lnSpc>
-                <a:spcPts val="2261"/>
+                <a:spcPct val="110000"/>
               </a:lnSpc>
               <a:spcBef>
                 <a:spcPts val="0"/>
@@ -18414,21 +14732,21 @@
               </a:defRPr>
             </a:pPr>
             <a:r>
-              <a:rPr sz="1900" b="0" lang="ja-JP" altLang="en-US">
-                <a:solidFill>
-                  <a:srgbClr val="303437"/>
-                </a:solidFill>
-                <a:latin typeface="Liberation Mono"/>
+              <a:rPr sz="1500" b="0" lang="ja-JP" altLang="en-US">
+                <a:solidFill>
+                  <a:srgbClr val="303437"/>
+                </a:solidFill>
+                <a:latin typeface="DejaVu Sans Mono"/>
                 <a:ea typeface="Noto Sans CJK JP"/>
                 <a:cs typeface="Liberation Mono"/>
               </a:rPr>
-              <a:t>scenario = NumeracyScenario(</a:t>
-            </a:r>
-          </a:p>
-          <a:p>
-            <a:pPr algn="l">
-              <a:lnSpc>
-                <a:spcPts val="2261"/>
+              <a:t>task = NumeracyScenario(</a:t>
+            </a:r>
+          </a:p>
+          <a:p>
+            <a:pPr algn="l">
+              <a:lnSpc>
+                <a:spcPct val="110000"/>
               </a:lnSpc>
               <a:spcBef>
                 <a:spcPts val="0"/>
@@ -18445,21 +14763,21 @@
               </a:defRPr>
             </a:pPr>
             <a:r>
-              <a:rPr sz="1900" b="0" lang="ja-JP" altLang="en-US">
-                <a:solidFill>
-                  <a:srgbClr val="303437"/>
-                </a:solidFill>
-                <a:latin typeface="Liberation Mono"/>
+              <a:rPr sz="1500" b="0" lang="ja-JP" altLang="en-US">
+                <a:solidFill>
+                  <a:srgbClr val="303437"/>
+                </a:solidFill>
+                <a:latin typeface="DejaVu Sans Mono"/>
                 <a:ea typeface="Noto Sans CJK JP"/>
                 <a:cs typeface="Liberation Mono"/>
               </a:rPr>
-              <a:t>    relation_type="linear",</a:t>
-            </a:r>
-          </a:p>
-          <a:p>
-            <a:pPr algn="l">
-              <a:lnSpc>
-                <a:spcPts val="2261"/>
+              <a:t>    relation_type="linear", mode="standard", seed=0</a:t>
+            </a:r>
+          </a:p>
+          <a:p>
+            <a:pPr algn="l">
+              <a:lnSpc>
+                <a:spcPct val="110000"/>
               </a:lnSpc>
               <a:spcBef>
                 <a:spcPts val="0"/>
@@ -18476,21 +14794,21 @@
               </a:defRPr>
             </a:pPr>
             <a:r>
-              <a:rPr sz="1900" b="0" lang="ja-JP" altLang="en-US">
-                <a:solidFill>
-                  <a:srgbClr val="303437"/>
-                </a:solidFill>
-                <a:latin typeface="Liberation Mono"/>
+              <a:rPr sz="1500" b="0" lang="ja-JP" altLang="en-US">
+                <a:solidFill>
+                  <a:srgbClr val="303437"/>
+                </a:solidFill>
+                <a:latin typeface="DejaVu Sans Mono"/>
                 <a:ea typeface="Noto Sans CJK JP"/>
                 <a:cs typeface="Liberation Mono"/>
               </a:rPr>
-              <a:t>    mode="standard", seed=0</a:t>
-            </a:r>
-          </a:p>
-          <a:p>
-            <a:pPr algn="l">
-              <a:lnSpc>
-                <a:spcPts val="2261"/>
+              <a:t>)</a:t>
+            </a:r>
+          </a:p>
+          <a:p>
+            <a:pPr algn="l">
+              <a:lnSpc>
+                <a:spcPct val="110000"/>
               </a:lnSpc>
               <a:spcBef>
                 <a:spcPts val="0"/>
@@ -18507,21 +14825,21 @@
               </a:defRPr>
             </a:pPr>
             <a:r>
-              <a:rPr sz="1900" b="0" lang="ja-JP" altLang="en-US">
-                <a:solidFill>
-                  <a:srgbClr val="303437"/>
-                </a:solidFill>
-                <a:latin typeface="Liberation Mono"/>
+              <a:rPr sz="1500" b="0" lang="ja-JP" altLang="en-US">
+                <a:solidFill>
+                  <a:srgbClr val="303437"/>
+                </a:solidFill>
+                <a:latin typeface="DejaVu Sans Mono"/>
                 <a:ea typeface="Noto Sans CJK JP"/>
                 <a:cs typeface="Liberation Mono"/>
               </a:rPr>
-              <a:t>)</a:t>
-            </a:r>
-          </a:p>
-          <a:p>
-            <a:pPr algn="l">
-              <a:lnSpc>
-                <a:spcPts val="2261"/>
+              <a:t>records = task.get_instances("output")</a:t>
+            </a:r>
+          </a:p>
+          <a:p>
+            <a:pPr algn="l">
+              <a:lnSpc>
+                <a:spcPct val="110000"/>
               </a:lnSpc>
               <a:spcBef>
                 <a:spcPts val="0"/>
@@ -18538,21 +14856,21 @@
               </a:defRPr>
             </a:pPr>
             <a:r>
-              <a:rPr sz="1900" b="0" lang="ja-JP" altLang="en-US">
-                <a:solidFill>
-                  <a:srgbClr val="303437"/>
-                </a:solidFill>
-                <a:latin typeface="Liberation Mono"/>
+              <a:rPr sz="1500" b="0" lang="ja-JP" altLang="en-US">
+                <a:solidFill>
+                  <a:srgbClr val="303437"/>
+                </a:solidFill>
+                <a:latin typeface="DejaVu Sans Mono"/>
                 <a:ea typeface="Noto Sans CJK JP"/>
                 <a:cs typeface="Liberation Mono"/>
               </a:rPr>
-              <a:t>records = scenario.get_instances("output")</a:t>
-            </a:r>
-          </a:p>
-          <a:p>
-            <a:pPr algn="l">
-              <a:lnSpc>
-                <a:spcPts val="2261"/>
+              <a:t>example = next(r for r in records if r.split == "test")</a:t>
+            </a:r>
+          </a:p>
+          <a:p>
+            <a:pPr algn="l">
+              <a:lnSpc>
+                <a:spcPct val="110000"/>
               </a:lnSpc>
               <a:spcBef>
                 <a:spcPts val="0"/>
@@ -18569,15 +14887,46 @@
               </a:defRPr>
             </a:pPr>
             <a:r>
-              <a:rPr sz="1900" b="0" lang="ja-JP" altLang="en-US">
-                <a:solidFill>
-                  <a:srgbClr val="303437"/>
-                </a:solidFill>
-                <a:latin typeface="Liberation Mono"/>
+              <a:rPr sz="1500" b="0" lang="ja-JP" altLang="en-US">
+                <a:solidFill>
+                  <a:srgbClr val="303437"/>
+                </a:solidFill>
+                <a:latin typeface="DejaVu Sans Mono"/>
                 <a:ea typeface="Noto Sans CJK JP"/>
                 <a:cs typeface="Liberation Mono"/>
               </a:rPr>
-              <a:t>len(records)  # 200</a:t>
+              <a:t>print(example.input.text)</a:t>
+            </a:r>
+          </a:p>
+          <a:p>
+            <a:pPr algn="l">
+              <a:lnSpc>
+                <a:spcPct val="110000"/>
+              </a:lnSpc>
+              <a:spcBef>
+                <a:spcPts val="0"/>
+              </a:spcBef>
+              <a:spcAft>
+                <a:spcPts val="0"/>
+              </a:spcAft>
+              <a:buNone/>
+              <a:defRPr sz="1900" b="0">
+                <a:solidFill>
+                  <a:srgbClr val="303437"/>
+                </a:solidFill>
+                <a:latin typeface="Noto Sans"/>
+              </a:defRPr>
+            </a:pPr>
+            <a:r>
+              <a:rPr sz="1500" b="0" lang="ja-JP" altLang="en-US">
+                <a:solidFill>
+                  <a:srgbClr val="303437"/>
+                </a:solidFill>
+                <a:latin typeface="DejaVu Sans Mono"/>
+                <a:ea typeface="Noto Sans CJK JP"/>
+                <a:cs typeface="Liberation Mono"/>
+              </a:rPr>
+              <a:t>print(example.references[0].output.text)</a:t>
             </a:r>
           </a:p>
         </p:txBody>
@@ -18591,7 +14940,7 @@
         <p:spPr>
           <a:xfrm>
             <a:off x="594360" y="3723386"/>
-            <a:ext cx="7955279" cy="685800"/>
+            <a:ext cx="7955279" cy="609600"/>
           </a:xfrm>
           <a:prstGeom prst="rect">
             <a:avLst/>
@@ -18631,7 +14980,7 @@
                 <a:ea typeface="Noto Sans CJK JP"/>
                 <a:cs typeface="Noto Sans"/>
               </a:rPr>
-              <a:t>HELM v0.3.0のNumeracyScenarioを読み込んだ後の例。train 100件とtest 100件が返る。</a:t>
+              <a:t>公開生成器のNumeracyScenarioを読み込んだ後の例。学習用・評価用の数値を作り、最初の評価入力と正解を表示する。</a:t>
             </a:r>
           </a:p>
         </p:txBody>
@@ -18685,7 +15034,7 @@
                 <a:ea typeface="Noto Sans CJK JP"/>
                 <a:cs typeface="Noto Sans"/>
               </a:rPr>
-              <a:t>[1] Stanford CRFM. NumeracyScenario, HELM v0.3.0.</a:t>
+              <a:t>[1] Stanford CRFM. NumeracyScenario（v0.3.0）。</a:t>
             </a:r>
             <a:r>
               <a:rPr sz="810" b="0" lang="ja-JP" altLang="en-US">
@@ -18887,7 +15236,7 @@
                 <a:ea typeface="Noto Sans CJK JP"/>
                 <a:cs typeface="Noto Sans"/>
               </a:rPr>
-              <a:t>数値の採点と公開実行</a:t>
+              <a:t>予測値と正解を比べる</a:t>
             </a:r>
           </a:p>
           <a:p>
@@ -18917,7 +15266,7 @@
                 <a:ea typeface="Noto Sans CJK JP"/>
                 <a:cs typeface="Noto Sans"/>
               </a:rPr>
-              <a:t>再現方法と利用の範囲</a:t>
+              <a:t>生成器を使って試す</a:t>
             </a:r>
           </a:p>
         </p:txBody>
@@ -18966,313 +15315,6 @@
                 <a:cs typeface="Noto Sans"/>
               </a:rPr>
               <a:t>目次</a:t>
-            </a:r>
-          </a:p>
-        </p:txBody>
-      </p:sp>
-    </p:spTree>
-  </p:cSld>
-  <p:clrMapOvr>
-    <a:masterClrMapping/>
-  </p:clrMapOvr>
-</p:sld>
-</file>
-
-<file path=ppt/slides/slide30.xml><?xml version="1.0" encoding="utf-8"?>
-<p:sld xmlns:a="http://schemas.openxmlformats.org/drawingml/2006/main" xmlns:p="http://schemas.openxmlformats.org/presentationml/2006/main" xmlns:r="http://schemas.openxmlformats.org/officeDocument/2006/relationships">
-  <p:cSld>
-    <p:spTree>
-      <p:nvGrpSpPr>
-        <p:cNvPr id="1" name=""/>
-        <p:cNvGrpSpPr/>
-        <p:nvPr/>
-      </p:nvGrpSpPr>
-      <p:grpSpPr/>
-      <p:sp>
-        <p:nvSpPr>
-          <p:cNvPr id="2" name="Title 1"/>
-          <p:cNvSpPr>
-            <a:spLocks noGrp="1"/>
-          </p:cNvSpPr>
-          <p:nvPr>
-            <p:ph type="title"/>
-          </p:nvPr>
-        </p:nvSpPr>
-        <p:spPr>
-          <a:xfrm>
-            <a:off x="468172" y="650138"/>
-            <a:ext cx="8206740" cy="616305"/>
-          </a:xfrm>
-        </p:spPr>
-        <p:txBody>
-          <a:bodyPr wrap="square" lIns="0" rIns="0" tIns="0" bIns="0">
-            <a:noAutofit/>
-          </a:bodyPr>
-          <a:lstStyle/>
-          <a:p>
-            <a:pPr algn="l">
-              <a:lnSpc>
-                <a:spcPct val="110000"/>
-              </a:lnSpc>
-              <a:buNone/>
-              <a:defRPr sz="2800" b="0">
-                <a:solidFill>
-                  <a:srgbClr val="303437"/>
-                </a:solidFill>
-                <a:latin typeface="Noto Sans"/>
-              </a:defRPr>
-            </a:pPr>
-            <a:r>
-              <a:rPr sz="2800" b="1" lang="ja-JP" altLang="en-US">
-                <a:solidFill>
-                  <a:srgbClr val="303437"/>
-                </a:solidFill>
-                <a:latin typeface="Noto Sans"/>
-                <a:ea typeface="Noto Sans CJK JP"/>
-                <a:cs typeface="Noto Sans"/>
-              </a:rPr>
-              <a:t>再現にはバージョンと乱数を保存する</a:t>
-            </a:r>
-          </a:p>
-        </p:txBody>
-      </p:sp>
-      <p:sp>
-        <p:nvSpPr>
-          <p:cNvPr id="3" name="Text Placeholder 2"/>
-          <p:cNvSpPr>
-            <a:spLocks noGrp="1"/>
-          </p:cNvSpPr>
-          <p:nvPr>
-            <p:ph type="body" idx="1"/>
-          </p:nvPr>
-        </p:nvSpPr>
-        <p:spPr>
-          <a:xfrm>
-            <a:off x="594360" y="1463040"/>
-            <a:ext cx="7955279" cy="3044952"/>
-          </a:xfrm>
-        </p:spPr>
-        <p:txBody>
-          <a:bodyPr wrap="square" tIns="91440" bIns="91440">
-            <a:noAutofit/>
-          </a:bodyPr>
-          <a:lstStyle/>
-          <a:p>
-            <a:pPr marL="457200" indent="-355600">
-              <a:lnSpc>
-                <a:spcPts val="2558"/>
-              </a:lnSpc>
-              <a:spcAft>
-                <a:spcPts val="700"/>
-              </a:spcAft>
-              <a:buSzPct val="61860"/>
-              <a:buFont typeface="Noto Sans CJK JP"/>
-              <a:buChar char="●"/>
-              <a:defRPr sz="2150" b="0">
-                <a:solidFill>
-                  <a:srgbClr val="303437"/>
-                </a:solidFill>
-                <a:latin typeface="Noto Sans"/>
-              </a:defRPr>
-            </a:pPr>
-            <a:r>
-              <a:rPr sz="2150" b="0" lang="ja-JP" altLang="en-US">
-                <a:solidFill>
-                  <a:srgbClr val="303437"/>
-                </a:solidFill>
-                <a:latin typeface="Noto Sans"/>
-                <a:ea typeface="Noto Sans CJK JP"/>
-                <a:cs typeface="Noto Sans"/>
-              </a:rPr>
-              <a:t>再現にはseedに加えて実行環境も保存する。ここではPython 3.12、NumPy 2.3.5、SymPy 1.14.0で公式の生成処理を実行した。</a:t>
-            </a:r>
-          </a:p>
-          <a:p>
-            <a:pPr marL="457200" indent="-355600">
-              <a:lnSpc>
-                <a:spcPts val="2558"/>
-              </a:lnSpc>
-              <a:spcAft>
-                <a:spcPts val="700"/>
-              </a:spcAft>
-              <a:buSzPct val="61860"/>
-              <a:buFont typeface="Noto Sans CJK JP"/>
-              <a:buChar char="●"/>
-              <a:defRPr sz="2150" b="0">
-                <a:solidFill>
-                  <a:srgbClr val="303437"/>
-                </a:solidFill>
-                <a:latin typeface="Noto Sans"/>
-              </a:defRPr>
-            </a:pPr>
-            <a:r>
-              <a:rPr sz="2150" b="0" lang="ja-JP" altLang="en-US">
-                <a:solidFill>
-                  <a:srgbClr val="303437"/>
-                </a:solidFill>
-                <a:latin typeface="Noto Sans"/>
-                <a:ea typeface="Noto Sans CJK JP"/>
-                <a:cs typeface="Noto Sans"/>
-              </a:rPr>
-              <a:t>seed、関数型、モードに加え、overlap=True、sort_vals=Falseを固定した。</a:t>
-            </a:r>
-          </a:p>
-          <a:p>
-            <a:pPr marL="457200" indent="-355600">
-              <a:lnSpc>
-                <a:spcPts val="2558"/>
-              </a:lnSpc>
-              <a:spcAft>
-                <a:spcPts val="0"/>
-              </a:spcAft>
-              <a:buSzPct val="61860"/>
-              <a:buFont typeface="Noto Sans CJK JP"/>
-              <a:buChar char="●"/>
-              <a:defRPr sz="2150" b="0">
-                <a:solidFill>
-                  <a:srgbClr val="303437"/>
-                </a:solidFill>
-                <a:latin typeface="Noto Sans"/>
-              </a:defRPr>
-            </a:pPr>
-            <a:r>
-              <a:rPr sz="2150" b="0" lang="ja-JP" altLang="en-US">
-                <a:solidFill>
-                  <a:srgbClr val="303437"/>
-                </a:solidFill>
-                <a:latin typeface="Noto Sans"/>
-                <a:ea typeface="Noto Sans CJK JP"/>
-                <a:cs typeface="Noto Sans"/>
-              </a:rPr>
-              <a:t>公式ソースのSHA-256、全生成レコード、13実例の位置とハッシュを保存した。</a:t>
-            </a:r>
-          </a:p>
-        </p:txBody>
-      </p:sp>
-      <p:sp>
-        <p:nvSpPr>
-          <p:cNvPr id="4" name="Title 3"/>
-          <p:cNvSpPr>
-            <a:spLocks noGrp="1"/>
-          </p:cNvSpPr>
-          <p:nvPr>
-            <p:ph type="title" idx="2"/>
-          </p:nvPr>
-        </p:nvSpPr>
-        <p:spPr>
-          <a:xfrm>
-            <a:off x="75895" y="0"/>
-            <a:ext cx="8115300" cy="480060"/>
-          </a:xfrm>
-        </p:spPr>
-        <p:txBody>
-          <a:bodyPr wrap="square" lIns="0" rIns="0" tIns="0" bIns="0" anchor="ctr">
-            <a:noAutofit/>
-          </a:bodyPr>
-          <a:lstStyle/>
-          <a:p>
-            <a:pPr algn="l">
-              <a:lnSpc>
-                <a:spcPct val="110000"/>
-              </a:lnSpc>
-              <a:buNone/>
-              <a:defRPr sz="1400" b="0">
-                <a:solidFill>
-                  <a:srgbClr val="303437"/>
-                </a:solidFill>
-                <a:latin typeface="Noto Sans"/>
-              </a:defRPr>
-            </a:pPr>
-            <a:r>
-              <a:rPr sz="1400" b="1" lang="ja-JP" altLang="en-US">
-                <a:solidFill>
-                  <a:srgbClr val="FFFEF8"/>
-                </a:solidFill>
-                <a:latin typeface="Noto Sans"/>
-                <a:ea typeface="Noto Sans CJK JP"/>
-                <a:cs typeface="Noto Sans"/>
-              </a:rPr>
-              <a:t>4. 再現方法と利用の範囲</a:t>
-            </a:r>
-          </a:p>
-        </p:txBody>
-      </p:sp>
-      <p:sp>
-        <p:nvSpPr>
-          <p:cNvPr id="5" name="sources"/>
-          <p:cNvSpPr txBox="1"/>
-          <p:nvPr/>
-        </p:nvSpPr>
-        <p:spPr>
-          <a:xfrm>
-            <a:off x="502920" y="4700016"/>
-            <a:ext cx="8183879" cy="530352"/>
-          </a:xfrm>
-          <a:prstGeom prst="rect">
-            <a:avLst/>
-          </a:prstGeom>
-          <a:noFill/>
-        </p:spPr>
-        <p:txBody>
-          <a:bodyPr wrap="square" lIns="0" rIns="0" tIns="0" bIns="0">
-            <a:noAutofit/>
-          </a:bodyPr>
-          <a:lstStyle/>
-          <a:p>
-            <a:pPr algn="l">
-              <a:lnSpc>
-                <a:spcPts val="940"/>
-              </a:lnSpc>
-              <a:spcBef>
-                <a:spcPts val="0"/>
-              </a:spcBef>
-              <a:spcAft>
-                <a:spcPts val="140"/>
-              </a:spcAft>
-              <a:buNone/>
-              <a:defRPr sz="810" b="0">
-                <a:solidFill>
-                  <a:srgbClr val="303437"/>
-                </a:solidFill>
-                <a:latin typeface="Noto Sans"/>
-              </a:defRPr>
-            </a:pPr>
-            <a:r>
-              <a:rPr sz="810" b="0" lang="ja-JP" altLang="en-US">
-                <a:solidFill>
-                  <a:srgbClr val="626669"/>
-                </a:solidFill>
-                <a:latin typeface="Noto Sans"/>
-                <a:ea typeface="Noto Sans CJK JP"/>
-                <a:cs typeface="Noto Sans"/>
-              </a:rPr>
-              <a:t>[1] HELM v0.3.0の公式生成器をseed=0で実行。Python 3.12 / NumPy 2.3.5。</a:t>
-            </a:r>
-          </a:p>
-          <a:p>
-            <a:pPr>
-              <a:lnSpc>
-                <a:spcPts val="940"/>
-              </a:lnSpc>
-              <a:buNone/>
-              <a:defRPr sz="810" b="0">
-                <a:solidFill>
-                  <a:srgbClr val="303437"/>
-                </a:solidFill>
-                <a:latin typeface="Noto Sans"/>
-              </a:defRPr>
-            </a:pPr>
-            <a:r>
-              <a:rPr sz="810" b="0" lang="ja-JP" altLang="en-US">
-                <a:solidFill>
-                  <a:srgbClr val="626669"/>
-                </a:solidFill>
-                <a:latin typeface="Noto Sans"/>
-                <a:ea typeface="Noto Sans CJK JP"/>
-                <a:cs typeface="Noto Sans"/>
-                <a:hlinkClick r:id="rId2"/>
-              </a:rPr>
-              <a:t>https://github.com/stanford-crfm/helm/blob/v0.3.0/src/helm/benchmark/scenarios/numeracy_scenario.py</a:t>
             </a:r>
           </a:p>
         </p:txBody>
@@ -19391,7 +15433,7 @@
                 <a:ea typeface="Noto Sans CJK JP"/>
                 <a:cs typeface="Noto Sans"/>
               </a:rPr>
-              <a:t>HELMのコードはApache License 2.0で公開されている。Numeracyの入力と正解は、このコードが人工的に生成する。</a:t>
+              <a:t>公開生成器はApache License 2.0で提供される。式の種類、係数を選ぶ方法、乱数のseedを指定して、数値の組と正解を作れる。</a:t>
             </a:r>
           </a:p>
           <a:p>
@@ -19421,37 +15463,7 @@
                 <a:ea typeface="Noto Sans CJK JP"/>
                 <a:cs typeface="Noto Sans"/>
               </a:rPr>
-              <a:t>人が書いた問題文や既存Web文章のコレクションをダウンロードする課題ではない。</a:t>
-            </a:r>
-          </a:p>
-          <a:p>
-            <a:pPr marL="457200" indent="-355600">
-              <a:lnSpc>
-                <a:spcPts val="2558"/>
-              </a:lnSpc>
-              <a:spcAft>
-                <a:spcPts val="0"/>
-              </a:spcAft>
-              <a:buSzPct val="61860"/>
-              <a:buFont typeface="Noto Sans CJK JP"/>
-              <a:buChar char="●"/>
-              <a:defRPr sz="2150" b="0">
-                <a:solidFill>
-                  <a:srgbClr val="303437"/>
-                </a:solidFill>
-                <a:latin typeface="Noto Sans"/>
-              </a:defRPr>
-            </a:pPr>
-            <a:r>
-              <a:rPr sz="2150" b="0" lang="ja-JP" altLang="en-US">
-                <a:solidFill>
-                  <a:srgbClr val="303437"/>
-                </a:solidFill>
-                <a:latin typeface="Noto Sans"/>
-                <a:ea typeface="Noto Sans CJK JP"/>
-                <a:cs typeface="Noto Sans"/>
-              </a:rPr>
-              <a:t>公式リポジトリのv0.3.0を選び、生成器と採点実装を同じバージョンでそろえて使う。</a:t>
+              <a:t>同じ数値を再現するときは、生成器のバージョンと実行環境も記録する。ここで示す実例はv0.3.0の生成器を使っている。</a:t>
             </a:r>
           </a:p>
         </p:txBody>
@@ -19499,7 +15511,7 @@
                 <a:ea typeface="Noto Sans CJK JP"/>
                 <a:cs typeface="Noto Sans"/>
               </a:rPr>
-              <a:t>4. 再現方法と利用の範囲</a:t>
+              <a:t>4. 生成器を使って試す</a:t>
             </a:r>
           </a:p>
         </p:txBody>
@@ -19553,7 +15565,7 @@
                 <a:ea typeface="Noto Sans CJK JP"/>
                 <a:cs typeface="Noto Sans"/>
               </a:rPr>
-              <a:t>[1] Stanford CRFM. NumeracyScenario, HELM v0.3.0.</a:t>
+              <a:t>[1] Stanford CRFM. NumeracyScenario（v0.3.0）。</a:t>
             </a:r>
             <a:r>
               <a:rPr sz="810" b="0" lang="ja-JP" altLang="en-US">
@@ -19604,7 +15616,7 @@
                 <a:ea typeface="Noto Sans CJK JP"/>
                 <a:cs typeface="Noto Sans"/>
               </a:rPr>
-              <a:t>[2] Stanford CRFM. HELM v0.3.0, Apache License 2.0.</a:t>
+              <a:t>[2] Stanford CRFM. Apache License 2.0。</a:t>
             </a:r>
             <a:r>
               <a:rPr sz="810" b="0" lang="ja-JP" altLang="en-US">
@@ -19746,7 +15758,7 @@
                 <a:ea typeface="Noto Sans CJK JP"/>
                 <a:cs typeface="Noto Sans"/>
               </a:rPr>
-              <a:t>Numeracyは、一次・二次、1変数・2変数の多項式を使い、例から規則を推測して新しい入力へ適用する課題。</a:t>
+              <a:t>Numeracyは、多項式から作った入出力の例を見せ、未知の入力に対応する数値を予測させる課題である。</a:t>
             </a:r>
           </a:p>
           <a:p>
@@ -19776,7 +15788,7 @@
                 <a:ea typeface="Noto Sans CJK JP"/>
                 <a:cs typeface="Noto Sans"/>
               </a:rPr>
-              <a:t>既定の採点には文字列一致と絶対誤差があり、整数として読めない出力の扱いも得点に影響する。</a:t>
+              <a:t>一次・二次、1変数・2変数の式を使い、既知の計算式を直接与えずに、数の対応から規則を見つけられるかを調べる。</a:t>
             </a:r>
           </a:p>
           <a:p>
@@ -19806,7 +15818,7 @@
                 <a:ea typeface="Noto Sans CJK JP"/>
                 <a:cs typeface="Noto Sans"/>
               </a:rPr>
-              <a:t>Classic v0.4.0には公開モデル成績がない。動作するexample／standardの生成器から、条件を固定して評価を組み立てられる。</a:t>
+              <a:t>生成器の条件をそろえることで、正答率や数値誤差を使った比較実験を組み立てられる。</a:t>
             </a:r>
           </a:p>
         </p:txBody>
@@ -19854,7 +15866,7 @@
                 <a:ea typeface="Noto Sans CJK JP"/>
                 <a:cs typeface="Noto Sans"/>
               </a:rPr>
-              <a:t>4. 再現方法と利用の範囲</a:t>
+              <a:t>4. 生成器を使って試す</a:t>
             </a:r>
           </a:p>
         </p:txBody>
@@ -19908,7 +15920,7 @@
                 <a:ea typeface="Noto Sans CJK JP"/>
                 <a:cs typeface="Noto Sans"/>
               </a:rPr>
-              <a:t>[1] Stanford CRFM. NumeracyScenario, HELM v0.3.0.</a:t>
+              <a:t>[1] Stanford CRFM. NumeracyScenario（v0.3.0）。</a:t>
             </a:r>
             <a:r>
               <a:rPr sz="810" b="0" lang="ja-JP" altLang="en-US">
@@ -19932,57 +15944,6 @@
                 <a:hlinkClick r:id="rId2"/>
               </a:rPr>
               <a:t>https://github.com/stanford-crfm/helm/blob/v0.3.0/src/helm/benchmark/scenarios/numeracy_scenario.py</a:t>
-            </a:r>
-          </a:p>
-          <a:p>
-            <a:pPr>
-              <a:lnSpc>
-                <a:spcPts val="940"/>
-              </a:lnSpc>
-              <a:spcAft>
-                <a:spcPts val="140"/>
-              </a:spcAft>
-              <a:buNone/>
-              <a:defRPr sz="810" b="0">
-                <a:solidFill>
-                  <a:srgbClr val="303437"/>
-                </a:solidFill>
-                <a:latin typeface="Noto Sans"/>
-              </a:defRPr>
-            </a:pPr>
-            <a:r>
-              <a:rPr sz="810" b="0" lang="ja-JP" altLang="en-US">
-                <a:solidFill>
-                  <a:srgbClr val="626669"/>
-                </a:solidFill>
-                <a:latin typeface="Noto Sans"/>
-                <a:ea typeface="Noto Sans CJK JP"/>
-                <a:cs typeface="Noto Sans"/>
-              </a:rPr>
-              <a:t>[2] Stanford CRFM. HELM Classic v0.4.0 (2023-11-17).</a:t>
-            </a:r>
-            <a:r>
-              <a:rPr sz="810" b="0" lang="ja-JP" altLang="en-US">
-                <a:solidFill>
-                  <a:srgbClr val="626669"/>
-                </a:solidFill>
-                <a:latin typeface="Noto Sans"/>
-                <a:ea typeface="Noto Sans CJK JP"/>
-                <a:cs typeface="Noto Sans"/>
-              </a:rPr>
-              <a:t>  </a:t>
-            </a:r>
-            <a:r>
-              <a:rPr sz="810" b="0" lang="ja-JP" altLang="en-US">
-                <a:solidFill>
-                  <a:srgbClr val="626669"/>
-                </a:solidFill>
-                <a:latin typeface="Noto Sans"/>
-                <a:ea typeface="Noto Sans CJK JP"/>
-                <a:cs typeface="Noto Sans"/>
-                <a:hlinkClick r:id="rId3"/>
-              </a:rPr>
-              <a:t>https://crfm.stanford.edu/helm/classic/v0.4.0/</a:t>
             </a:r>
           </a:p>
         </p:txBody>
@@ -20018,11 +15979,11 @@
         <p:spPr>
           <a:xfrm>
             <a:off x="548640" y="2484835"/>
-            <a:ext cx="8046720" cy="585216"/>
+            <a:ext cx="8046720" cy="686816"/>
           </a:xfrm>
         </p:spPr>
         <p:txBody>
-          <a:bodyPr wrap="square" lIns="0" rIns="0" tIns="0" bIns="0" anchor="ctr">
+          <a:bodyPr wrap="square" lIns="0" rIns="0" tIns="0" bIns="101600" anchor="ctr">
             <a:noAutofit/>
           </a:bodyPr>
           <a:lstStyle/>
@@ -20245,7 +16206,7 @@
                 <a:ea typeface="Noto Sans CJK JP"/>
                 <a:cs typeface="Noto Sans"/>
               </a:rPr>
-              <a:t>生成と採点の詳細</a:t>
+              <a:t>式とデータ形式の補足</a:t>
             </a:r>
           </a:p>
           <a:p>
@@ -20491,7 +16452,7 @@
                 <a:ea typeface="Noto Sans CJK JP"/>
                 <a:cs typeface="Noto Sans"/>
               </a:rPr>
-              <a:t>paraboloid / mode=standard / seed=0 / test[0]</a:t>
+              <a:t>式の種類：paraboloid</a:t>
             </a:r>
           </a:p>
         </p:txBody>
@@ -20545,7 +16506,7 @@
                 <a:ea typeface="Noto Sans CJK JP"/>
                 <a:cs typeface="Noto Sans"/>
               </a:rPr>
-              <a:t>原データ：訓練100件の先頭6件（連続）</a:t>
+              <a:t>学習用100組から6組を抜粋</a:t>
             </a:r>
           </a:p>
         </p:txBody>
@@ -20558,8 +16519,8 @@
         </p:nvSpPr>
         <p:spPr>
           <a:xfrm>
-            <a:off x="548640" y="1965960"/>
-            <a:ext cx="3886200" cy="2304796"/>
+            <a:off x="548640" y="1991360"/>
+            <a:ext cx="3886200" cy="2296330"/>
           </a:xfrm>
           <a:prstGeom prst="rect">
             <a:avLst/>
@@ -20587,7 +16548,7 @@
           </a:fontRef>
         </p:style>
         <p:txBody>
-          <a:bodyPr rtlCol="0" anchor="t" wrap="none" lIns="152400" rIns="152400" tIns="63500" bIns="127000">
+          <a:bodyPr rtlCol="0" anchor="t" wrap="none" lIns="152400" rIns="152400" tIns="38100" bIns="127000">
             <a:noAutofit/>
           </a:bodyPr>
           <a:lstStyle/>
@@ -20859,7 +16820,7 @@
                 <a:ea typeface="Noto Sans CJK JP"/>
                 <a:cs typeface="Noto Sans"/>
               </a:rPr>
-              <a:t>予測対象：testレコードの入力（全文）</a:t>
+              <a:t>予測する入力</a:t>
             </a:r>
           </a:p>
         </p:txBody>
@@ -20873,7 +16834,7 @@
         <p:spPr>
           <a:xfrm>
             <a:off x="4663440" y="1965960"/>
-            <a:ext cx="3931920" cy="541691"/>
+            <a:ext cx="3931920" cy="550157"/>
           </a:xfrm>
           <a:prstGeom prst="rect">
             <a:avLst/>
@@ -21095,7 +17056,7 @@
                 <a:ea typeface="Noto Sans CJK JP"/>
                 <a:cs typeface="Noto Sans"/>
               </a:rPr>
-              <a:t>参照メタデータ（入力には含めない）</a:t>
+              <a:t>正解の計算に使う式</a:t>
             </a:r>
           </a:p>
         </p:txBody>
@@ -21203,7 +17164,7 @@
                 <a:ea typeface="Noto Sans CJK JP"/>
                 <a:cs typeface="Noto Sans"/>
               </a:rPr>
-              <a:t>[1] HELM v0.3.0の公式生成器をseed=0で実行。Python 3.12 / NumPy 2.3.5。</a:t>
+              <a:t>[1] Stanford CRFM. NumeracyScenario（v0.3.0）。 </a:t>
             </a:r>
           </a:p>
           <a:p>
@@ -21397,7 +17358,7 @@
                 <a:ea typeface="Noto Sans CJK JP"/>
                 <a:cs typeface="Noto Sans"/>
               </a:rPr>
-              <a:t>linear / mode=example / seed=0 / test[0]</a:t>
+              <a:t>式の種類：linear</a:t>
             </a:r>
           </a:p>
         </p:txBody>
@@ -21451,7 +17412,7 @@
                 <a:ea typeface="Noto Sans CJK JP"/>
                 <a:cs typeface="Noto Sans"/>
               </a:rPr>
-              <a:t>原データ：訓練100件の先頭4件（連続）</a:t>
+              <a:t>学習用100組から4組を抜粋</a:t>
             </a:r>
           </a:p>
         </p:txBody>
@@ -21464,8 +17425,8 @@
         </p:nvSpPr>
         <p:spPr>
           <a:xfrm>
-            <a:off x="548640" y="1965960"/>
-            <a:ext cx="3886200" cy="1700353"/>
+            <a:off x="548640" y="1991360"/>
+            <a:ext cx="3886200" cy="1691887"/>
           </a:xfrm>
           <a:prstGeom prst="rect">
             <a:avLst/>
@@ -21493,7 +17454,7 @@
           </a:fontRef>
         </p:style>
         <p:txBody>
-          <a:bodyPr rtlCol="0" anchor="t" wrap="none" lIns="152400" rIns="152400" tIns="63500" bIns="127000">
+          <a:bodyPr rtlCol="0" anchor="t" wrap="none" lIns="152400" rIns="152400" tIns="38100" bIns="127000">
             <a:noAutofit/>
           </a:bodyPr>
           <a:lstStyle/>
@@ -21703,7 +17664,7 @@
                 <a:ea typeface="Noto Sans CJK JP"/>
                 <a:cs typeface="Noto Sans"/>
               </a:rPr>
-              <a:t>予測対象：testレコードの入力（全文）</a:t>
+              <a:t>予測する入力</a:t>
             </a:r>
           </a:p>
         </p:txBody>
@@ -21717,7 +17678,7 @@
         <p:spPr>
           <a:xfrm>
             <a:off x="4663440" y="1965960"/>
-            <a:ext cx="3931920" cy="541691"/>
+            <a:ext cx="3931920" cy="499358"/>
           </a:xfrm>
           <a:prstGeom prst="rect">
             <a:avLst/>
@@ -21939,7 +17900,7 @@
                 <a:ea typeface="Noto Sans CJK JP"/>
                 <a:cs typeface="Noto Sans"/>
               </a:rPr>
-              <a:t>参照メタデータ（入力には含めない）</a:t>
+              <a:t>正解の計算に使う式</a:t>
             </a:r>
           </a:p>
         </p:txBody>
@@ -22047,7 +18008,7 @@
                 <a:ea typeface="Noto Sans CJK JP"/>
                 <a:cs typeface="Noto Sans"/>
               </a:rPr>
-              <a:t>[1] HELM v0.3.0の公式生成器をseed=0で実行。Python 3.12 / NumPy 2.3.5。</a:t>
+              <a:t>[1] Stanford CRFM. NumeracyScenario（v0.3.0）。 </a:t>
             </a:r>
           </a:p>
           <a:p>
@@ -22241,7 +18202,7 @@
                 <a:ea typeface="Noto Sans CJK JP"/>
                 <a:cs typeface="Noto Sans"/>
               </a:rPr>
-              <a:t>parabola / mode=example / seed=0 / test[0]</a:t>
+              <a:t>式の種類：parabola</a:t>
             </a:r>
           </a:p>
         </p:txBody>
@@ -22295,7 +18256,7 @@
                 <a:ea typeface="Noto Sans CJK JP"/>
                 <a:cs typeface="Noto Sans"/>
               </a:rPr>
-              <a:t>原データ：訓練100件の先頭4件（連続）</a:t>
+              <a:t>学習用100組から4組を抜粋</a:t>
             </a:r>
           </a:p>
         </p:txBody>
@@ -22308,8 +18269,8 @@
         </p:nvSpPr>
         <p:spPr>
           <a:xfrm>
-            <a:off x="548640" y="1965960"/>
-            <a:ext cx="3886200" cy="1700353"/>
+            <a:off x="548640" y="1991360"/>
+            <a:ext cx="3886200" cy="1691887"/>
           </a:xfrm>
           <a:prstGeom prst="rect">
             <a:avLst/>
@@ -22337,7 +18298,7 @@
           </a:fontRef>
         </p:style>
         <p:txBody>
-          <a:bodyPr rtlCol="0" anchor="t" wrap="none" lIns="152400" rIns="152400" tIns="63500" bIns="127000">
+          <a:bodyPr rtlCol="0" anchor="t" wrap="none" lIns="152400" rIns="152400" tIns="38100" bIns="127000">
             <a:noAutofit/>
           </a:bodyPr>
           <a:lstStyle/>
@@ -22547,7 +18508,7 @@
                 <a:ea typeface="Noto Sans CJK JP"/>
                 <a:cs typeface="Noto Sans"/>
               </a:rPr>
-              <a:t>予測対象：testレコードの入力（全文）</a:t>
+              <a:t>予測する入力</a:t>
             </a:r>
           </a:p>
         </p:txBody>
@@ -22561,7 +18522,7 @@
         <p:spPr>
           <a:xfrm>
             <a:off x="4663440" y="1965960"/>
-            <a:ext cx="3931920" cy="541691"/>
+            <a:ext cx="3931920" cy="499358"/>
           </a:xfrm>
           <a:prstGeom prst="rect">
             <a:avLst/>
@@ -22783,7 +18744,7 @@
                 <a:ea typeface="Noto Sans CJK JP"/>
                 <a:cs typeface="Noto Sans"/>
               </a:rPr>
-              <a:t>参照メタデータ（入力には含めない）</a:t>
+              <a:t>正解の計算に使う式</a:t>
             </a:r>
           </a:p>
         </p:txBody>
@@ -22891,7 +18852,7 @@
                 <a:ea typeface="Noto Sans CJK JP"/>
                 <a:cs typeface="Noto Sans"/>
               </a:rPr>
-              <a:t>[1] HELM v0.3.0の公式生成器をseed=0で実行。Python 3.12 / NumPy 2.3.5。</a:t>
+              <a:t>[1] Stanford CRFM. NumeracyScenario（v0.3.0）。 </a:t>
             </a:r>
           </a:p>
           <a:p>
@@ -23085,7 +19046,7 @@
                 <a:ea typeface="Noto Sans CJK JP"/>
                 <a:cs typeface="Noto Sans"/>
               </a:rPr>
-              <a:t>plane / mode=example / seed=0 / test[0]</a:t>
+              <a:t>式の種類：plane</a:t>
             </a:r>
           </a:p>
         </p:txBody>
@@ -23139,7 +19100,7 @@
                 <a:ea typeface="Noto Sans CJK JP"/>
                 <a:cs typeface="Noto Sans"/>
               </a:rPr>
-              <a:t>原データ：訓練100件の先頭6件（連続）</a:t>
+              <a:t>学習用100組から6組を抜粋</a:t>
             </a:r>
           </a:p>
         </p:txBody>
@@ -23152,8 +19113,8 @@
         </p:nvSpPr>
         <p:spPr>
           <a:xfrm>
-            <a:off x="548640" y="1965960"/>
-            <a:ext cx="3886200" cy="2304796"/>
+            <a:off x="548640" y="1991360"/>
+            <a:ext cx="3886200" cy="2296330"/>
           </a:xfrm>
           <a:prstGeom prst="rect">
             <a:avLst/>
@@ -23181,7 +19142,7 @@
           </a:fontRef>
         </p:style>
         <p:txBody>
-          <a:bodyPr rtlCol="0" anchor="t" wrap="none" lIns="152400" rIns="152400" tIns="63500" bIns="127000">
+          <a:bodyPr rtlCol="0" anchor="t" wrap="none" lIns="152400" rIns="152400" tIns="38100" bIns="127000">
             <a:noAutofit/>
           </a:bodyPr>
           <a:lstStyle/>
@@ -23453,7 +19414,7 @@
                 <a:ea typeface="Noto Sans CJK JP"/>
                 <a:cs typeface="Noto Sans"/>
               </a:rPr>
-              <a:t>予測対象：testレコードの入力（全文）</a:t>
+              <a:t>予測する入力</a:t>
             </a:r>
           </a:p>
         </p:txBody>
@@ -23467,7 +19428,7 @@
         <p:spPr>
           <a:xfrm>
             <a:off x="4663440" y="1965960"/>
-            <a:ext cx="3931920" cy="541691"/>
+            <a:ext cx="3931920" cy="550157"/>
           </a:xfrm>
           <a:prstGeom prst="rect">
             <a:avLst/>
@@ -23689,7 +19650,7 @@
                 <a:ea typeface="Noto Sans CJK JP"/>
                 <a:cs typeface="Noto Sans"/>
               </a:rPr>
-              <a:t>参照メタデータ（入力には含めない）</a:t>
+              <a:t>正解の計算に使う式</a:t>
             </a:r>
           </a:p>
         </p:txBody>
@@ -23797,7 +19758,7 @@
                 <a:ea typeface="Noto Sans CJK JP"/>
                 <a:cs typeface="Noto Sans"/>
               </a:rPr>
-              <a:t>[1] HELM v0.3.0の公式生成器をseed=0で実行。Python 3.12 / NumPy 2.3.5。</a:t>
+              <a:t>[1] Stanford CRFM. NumeracyScenario（v0.3.0）。 </a:t>
             </a:r>
           </a:p>
           <a:p>
@@ -23991,7 +19952,7 @@
                 <a:ea typeface="Noto Sans CJK JP"/>
                 <a:cs typeface="Noto Sans"/>
               </a:rPr>
-              <a:t>paraboloid / mode=example / seed=0 / test[0]</a:t>
+              <a:t>式の種類：paraboloid</a:t>
             </a:r>
           </a:p>
         </p:txBody>
@@ -24045,7 +20006,7 @@
                 <a:ea typeface="Noto Sans CJK JP"/>
                 <a:cs typeface="Noto Sans"/>
               </a:rPr>
-              <a:t>原データ：訓練100件の先頭6件（連続）</a:t>
+              <a:t>学習用100組から6組を抜粋</a:t>
             </a:r>
           </a:p>
         </p:txBody>
@@ -24058,8 +20019,8 @@
         </p:nvSpPr>
         <p:spPr>
           <a:xfrm>
-            <a:off x="548640" y="1965960"/>
-            <a:ext cx="3886200" cy="2304796"/>
+            <a:off x="548640" y="1991360"/>
+            <a:ext cx="3886200" cy="2296330"/>
           </a:xfrm>
           <a:prstGeom prst="rect">
             <a:avLst/>
@@ -24087,7 +20048,7 @@
           </a:fontRef>
         </p:style>
         <p:txBody>
-          <a:bodyPr rtlCol="0" anchor="t" wrap="none" lIns="152400" rIns="152400" tIns="63500" bIns="127000">
+          <a:bodyPr rtlCol="0" anchor="t" wrap="none" lIns="152400" rIns="152400" tIns="38100" bIns="127000">
             <a:noAutofit/>
           </a:bodyPr>
           <a:lstStyle/>
@@ -24359,7 +20320,7 @@
                 <a:ea typeface="Noto Sans CJK JP"/>
                 <a:cs typeface="Noto Sans"/>
               </a:rPr>
-              <a:t>予測対象：testレコードの入力（全文）</a:t>
+              <a:t>予測する入力</a:t>
             </a:r>
           </a:p>
         </p:txBody>
@@ -24373,7 +20334,7 @@
         <p:spPr>
           <a:xfrm>
             <a:off x="4663440" y="1965960"/>
-            <a:ext cx="3931920" cy="541691"/>
+            <a:ext cx="3931920" cy="550157"/>
           </a:xfrm>
           <a:prstGeom prst="rect">
             <a:avLst/>
@@ -24595,7 +20556,7 @@
                 <a:ea typeface="Noto Sans CJK JP"/>
                 <a:cs typeface="Noto Sans"/>
               </a:rPr>
-              <a:t>参照メタデータ（入力には含めない）</a:t>
+              <a:t>正解の計算に使う式</a:t>
             </a:r>
           </a:p>
         </p:txBody>
@@ -24703,7 +20664,7 @@
                 <a:ea typeface="Noto Sans CJK JP"/>
                 <a:cs typeface="Noto Sans"/>
               </a:rPr>
-              <a:t>[1] HELM v0.3.0の公式生成器をseed=0で実行。Python 3.12 / NumPy 2.3.5。</a:t>
+              <a:t>[1] Stanford CRFM. NumeracyScenario（v0.3.0）。 </a:t>
             </a:r>
           </a:p>
           <a:p>
@@ -25011,7 +20972,7 @@
                 <a:ea typeface="Noto Sans CJK JP"/>
                 <a:cs typeface="Noto Sans"/>
               </a:rPr>
-              <a:t>linear / mode=standard / seed=0 / test[1]</a:t>
+              <a:t>式の種類：linear</a:t>
             </a:r>
           </a:p>
         </p:txBody>
@@ -25065,7 +21026,7 @@
                 <a:ea typeface="Noto Sans CJK JP"/>
                 <a:cs typeface="Noto Sans"/>
               </a:rPr>
-              <a:t>原データ：訓練100件の先頭4件（連続）</a:t>
+              <a:t>学習用100組から4組を抜粋</a:t>
             </a:r>
           </a:p>
         </p:txBody>
@@ -25078,8 +21039,8 @@
         </p:nvSpPr>
         <p:spPr>
           <a:xfrm>
-            <a:off x="548640" y="1965960"/>
-            <a:ext cx="3886200" cy="1700353"/>
+            <a:off x="548640" y="1991360"/>
+            <a:ext cx="3886200" cy="1691887"/>
           </a:xfrm>
           <a:prstGeom prst="rect">
             <a:avLst/>
@@ -25107,7 +21068,7 @@
           </a:fontRef>
         </p:style>
         <p:txBody>
-          <a:bodyPr rtlCol="0" anchor="t" wrap="none" lIns="152400" rIns="152400" tIns="63500" bIns="127000">
+          <a:bodyPr rtlCol="0" anchor="t" wrap="none" lIns="152400" rIns="152400" tIns="38100" bIns="127000">
             <a:noAutofit/>
           </a:bodyPr>
           <a:lstStyle/>
@@ -25317,7 +21278,7 @@
                 <a:ea typeface="Noto Sans CJK JP"/>
                 <a:cs typeface="Noto Sans"/>
               </a:rPr>
-              <a:t>予測対象：testレコードの入力（全文）</a:t>
+              <a:t>予測する入力</a:t>
             </a:r>
           </a:p>
         </p:txBody>
@@ -25331,7 +21292,7 @@
         <p:spPr>
           <a:xfrm>
             <a:off x="4663440" y="1965960"/>
-            <a:ext cx="3931920" cy="541691"/>
+            <a:ext cx="3931920" cy="499358"/>
           </a:xfrm>
           <a:prstGeom prst="rect">
             <a:avLst/>
@@ -25553,7 +21514,7 @@
                 <a:ea typeface="Noto Sans CJK JP"/>
                 <a:cs typeface="Noto Sans"/>
               </a:rPr>
-              <a:t>参照メタデータ（入力には含めない）</a:t>
+              <a:t>正解の計算に使う式</a:t>
             </a:r>
           </a:p>
         </p:txBody>
@@ -25661,7 +21622,7 @@
                 <a:ea typeface="Noto Sans CJK JP"/>
                 <a:cs typeface="Noto Sans"/>
               </a:rPr>
-              <a:t>[1] HELM v0.3.0の公式生成器をseed=0で実行。Python 3.12 / NumPy 2.3.5。</a:t>
+              <a:t>[1] Stanford CRFM. NumeracyScenario（v0.3.0）。 </a:t>
             </a:r>
           </a:p>
           <a:p>
@@ -25855,7 +21816,7 @@
                 <a:ea typeface="Noto Sans CJK JP"/>
                 <a:cs typeface="Noto Sans"/>
               </a:rPr>
-              <a:t>parabola / mode=standard / seed=0 / test[1]</a:t>
+              <a:t>式の種類：parabola</a:t>
             </a:r>
           </a:p>
         </p:txBody>
@@ -25909,7 +21870,7 @@
                 <a:ea typeface="Noto Sans CJK JP"/>
                 <a:cs typeface="Noto Sans"/>
               </a:rPr>
-              <a:t>原データ：訓練100件の先頭4件（連続）</a:t>
+              <a:t>学習用100組から4組を抜粋</a:t>
             </a:r>
           </a:p>
         </p:txBody>
@@ -25922,8 +21883,8 @@
         </p:nvSpPr>
         <p:spPr>
           <a:xfrm>
-            <a:off x="548640" y="1965960"/>
-            <a:ext cx="3886200" cy="1700353"/>
+            <a:off x="548640" y="1991360"/>
+            <a:ext cx="3886200" cy="1691887"/>
           </a:xfrm>
           <a:prstGeom prst="rect">
             <a:avLst/>
@@ -25951,7 +21912,7 @@
           </a:fontRef>
         </p:style>
         <p:txBody>
-          <a:bodyPr rtlCol="0" anchor="t" wrap="none" lIns="152400" rIns="152400" tIns="63500" bIns="127000">
+          <a:bodyPr rtlCol="0" anchor="t" wrap="none" lIns="152400" rIns="152400" tIns="38100" bIns="127000">
             <a:noAutofit/>
           </a:bodyPr>
           <a:lstStyle/>
@@ -26161,7 +22122,7 @@
                 <a:ea typeface="Noto Sans CJK JP"/>
                 <a:cs typeface="Noto Sans"/>
               </a:rPr>
-              <a:t>予測対象：testレコードの入力（全文）</a:t>
+              <a:t>予測する入力</a:t>
             </a:r>
           </a:p>
         </p:txBody>
@@ -26175,7 +22136,7 @@
         <p:spPr>
           <a:xfrm>
             <a:off x="4663440" y="1965960"/>
-            <a:ext cx="3931920" cy="541691"/>
+            <a:ext cx="3931920" cy="499358"/>
           </a:xfrm>
           <a:prstGeom prst="rect">
             <a:avLst/>
@@ -26397,7 +22358,7 @@
                 <a:ea typeface="Noto Sans CJK JP"/>
                 <a:cs typeface="Noto Sans"/>
               </a:rPr>
-              <a:t>参照メタデータ（入力には含めない）</a:t>
+              <a:t>正解の計算に使う式</a:t>
             </a:r>
           </a:p>
         </p:txBody>
@@ -26505,7 +22466,7 @@
                 <a:ea typeface="Noto Sans CJK JP"/>
                 <a:cs typeface="Noto Sans"/>
               </a:rPr>
-              <a:t>[1] HELM v0.3.0の公式生成器をseed=0で実行。Python 3.12 / NumPy 2.3.5。</a:t>
+              <a:t>[1] Stanford CRFM. NumeracyScenario（v0.3.0）。 </a:t>
             </a:r>
           </a:p>
           <a:p>
@@ -26699,7 +22660,7 @@
                 <a:ea typeface="Noto Sans CJK JP"/>
                 <a:cs typeface="Noto Sans"/>
               </a:rPr>
-              <a:t>plane / mode=standard / seed=0 / test[1]</a:t>
+              <a:t>式の種類：plane</a:t>
             </a:r>
           </a:p>
         </p:txBody>
@@ -26753,7 +22714,7 @@
                 <a:ea typeface="Noto Sans CJK JP"/>
                 <a:cs typeface="Noto Sans"/>
               </a:rPr>
-              <a:t>原データ：訓練100件の先頭6件（連続）</a:t>
+              <a:t>学習用100組から6組を抜粋</a:t>
             </a:r>
           </a:p>
         </p:txBody>
@@ -26766,8 +22727,8 @@
         </p:nvSpPr>
         <p:spPr>
           <a:xfrm>
-            <a:off x="548640" y="1965960"/>
-            <a:ext cx="3886200" cy="2304796"/>
+            <a:off x="548640" y="1991360"/>
+            <a:ext cx="3886200" cy="2296330"/>
           </a:xfrm>
           <a:prstGeom prst="rect">
             <a:avLst/>
@@ -26795,7 +22756,7 @@
           </a:fontRef>
         </p:style>
         <p:txBody>
-          <a:bodyPr rtlCol="0" anchor="t" wrap="none" lIns="152400" rIns="152400" tIns="63500" bIns="127000">
+          <a:bodyPr rtlCol="0" anchor="t" wrap="none" lIns="152400" rIns="152400" tIns="38100" bIns="127000">
             <a:noAutofit/>
           </a:bodyPr>
           <a:lstStyle/>
@@ -27067,7 +23028,7 @@
                 <a:ea typeface="Noto Sans CJK JP"/>
                 <a:cs typeface="Noto Sans"/>
               </a:rPr>
-              <a:t>予測対象：testレコードの入力（全文）</a:t>
+              <a:t>予測する入力</a:t>
             </a:r>
           </a:p>
         </p:txBody>
@@ -27081,7 +23042,7 @@
         <p:spPr>
           <a:xfrm>
             <a:off x="4663440" y="1965960"/>
-            <a:ext cx="3931920" cy="541691"/>
+            <a:ext cx="3931920" cy="550157"/>
           </a:xfrm>
           <a:prstGeom prst="rect">
             <a:avLst/>
@@ -27303,7 +23264,7 @@
                 <a:ea typeface="Noto Sans CJK JP"/>
                 <a:cs typeface="Noto Sans"/>
               </a:rPr>
-              <a:t>参照メタデータ（入力には含めない）</a:t>
+              <a:t>正解の計算に使う式</a:t>
             </a:r>
           </a:p>
         </p:txBody>
@@ -27411,7 +23372,7 @@
                 <a:ea typeface="Noto Sans CJK JP"/>
                 <a:cs typeface="Noto Sans"/>
               </a:rPr>
-              <a:t>[1] HELM v0.3.0の公式生成器をseed=0で実行。Python 3.12 / NumPy 2.3.5。</a:t>
+              <a:t>[1] Stanford CRFM. NumeracyScenario（v0.3.0）。 </a:t>
             </a:r>
           </a:p>
           <a:p>
@@ -27605,7 +23566,7 @@
                 <a:ea typeface="Noto Sans CJK JP"/>
                 <a:cs typeface="Noto Sans"/>
               </a:rPr>
-              <a:t>paraboloid / mode=standard / seed=0 / test[1]</a:t>
+              <a:t>式の種類：paraboloid</a:t>
             </a:r>
           </a:p>
         </p:txBody>
@@ -27659,7 +23620,7 @@
                 <a:ea typeface="Noto Sans CJK JP"/>
                 <a:cs typeface="Noto Sans"/>
               </a:rPr>
-              <a:t>原データ：訓練100件の先頭6件（連続）</a:t>
+              <a:t>学習用100組から6組を抜粋</a:t>
             </a:r>
           </a:p>
         </p:txBody>
@@ -27672,8 +23633,8 @@
         </p:nvSpPr>
         <p:spPr>
           <a:xfrm>
-            <a:off x="548640" y="1965960"/>
-            <a:ext cx="3886200" cy="2304796"/>
+            <a:off x="548640" y="1991360"/>
+            <a:ext cx="3886200" cy="2296330"/>
           </a:xfrm>
           <a:prstGeom prst="rect">
             <a:avLst/>
@@ -27701,7 +23662,7 @@
           </a:fontRef>
         </p:style>
         <p:txBody>
-          <a:bodyPr rtlCol="0" anchor="t" wrap="none" lIns="152400" rIns="152400" tIns="63500" bIns="127000">
+          <a:bodyPr rtlCol="0" anchor="t" wrap="none" lIns="152400" rIns="152400" tIns="38100" bIns="127000">
             <a:noAutofit/>
           </a:bodyPr>
           <a:lstStyle/>
@@ -27973,7 +23934,7 @@
                 <a:ea typeface="Noto Sans CJK JP"/>
                 <a:cs typeface="Noto Sans"/>
               </a:rPr>
-              <a:t>予測対象：testレコードの入力（全文）</a:t>
+              <a:t>予測する入力</a:t>
             </a:r>
           </a:p>
         </p:txBody>
@@ -27987,7 +23948,7 @@
         <p:spPr>
           <a:xfrm>
             <a:off x="4663440" y="1965960"/>
-            <a:ext cx="3931920" cy="541691"/>
+            <a:ext cx="3931920" cy="550157"/>
           </a:xfrm>
           <a:prstGeom prst="rect">
             <a:avLst/>
@@ -28209,7 +24170,7 @@
                 <a:ea typeface="Noto Sans CJK JP"/>
                 <a:cs typeface="Noto Sans"/>
               </a:rPr>
-              <a:t>参照メタデータ（入力には含めない）</a:t>
+              <a:t>正解の計算に使う式</a:t>
             </a:r>
           </a:p>
         </p:txBody>
@@ -28317,7 +24278,7 @@
                 <a:ea typeface="Noto Sans CJK JP"/>
                 <a:cs typeface="Noto Sans"/>
               </a:rPr>
-              <a:t>[1] HELM v0.3.0の公式生成器をseed=0で実行。Python 3.12 / NumPy 2.3.5。</a:t>
+              <a:t>[1] Stanford CRFM. NumeracyScenario（v0.3.0）。 </a:t>
             </a:r>
           </a:p>
           <a:p>
@@ -28511,7 +24472,7 @@
                 <a:ea typeface="Noto Sans CJK JP"/>
                 <a:cs typeface="Noto Sans"/>
               </a:rPr>
-              <a:t>linear / mode=standard / seed=0 / test[2]</a:t>
+              <a:t>式の種類：linear</a:t>
             </a:r>
           </a:p>
         </p:txBody>
@@ -28565,7 +24526,7 @@
                 <a:ea typeface="Noto Sans CJK JP"/>
                 <a:cs typeface="Noto Sans"/>
               </a:rPr>
-              <a:t>原データ：訓練100件の先頭4件（連続）</a:t>
+              <a:t>学習用100組から4組を抜粋</a:t>
             </a:r>
           </a:p>
         </p:txBody>
@@ -28578,8 +24539,8 @@
         </p:nvSpPr>
         <p:spPr>
           <a:xfrm>
-            <a:off x="548640" y="1965960"/>
-            <a:ext cx="3886200" cy="1700353"/>
+            <a:off x="548640" y="1991360"/>
+            <a:ext cx="3886200" cy="1691887"/>
           </a:xfrm>
           <a:prstGeom prst="rect">
             <a:avLst/>
@@ -28607,7 +24568,7 @@
           </a:fontRef>
         </p:style>
         <p:txBody>
-          <a:bodyPr rtlCol="0" anchor="t" wrap="none" lIns="152400" rIns="152400" tIns="63500" bIns="127000">
+          <a:bodyPr rtlCol="0" anchor="t" wrap="none" lIns="152400" rIns="152400" tIns="38100" bIns="127000">
             <a:noAutofit/>
           </a:bodyPr>
           <a:lstStyle/>
@@ -28817,7 +24778,7 @@
                 <a:ea typeface="Noto Sans CJK JP"/>
                 <a:cs typeface="Noto Sans"/>
               </a:rPr>
-              <a:t>予測対象：testレコードの入力（全文）</a:t>
+              <a:t>予測する入力</a:t>
             </a:r>
           </a:p>
         </p:txBody>
@@ -28831,7 +24792,7 @@
         <p:spPr>
           <a:xfrm>
             <a:off x="4663440" y="1965960"/>
-            <a:ext cx="3931920" cy="541691"/>
+            <a:ext cx="3931920" cy="499358"/>
           </a:xfrm>
           <a:prstGeom prst="rect">
             <a:avLst/>
@@ -29053,7 +25014,7 @@
                 <a:ea typeface="Noto Sans CJK JP"/>
                 <a:cs typeface="Noto Sans"/>
               </a:rPr>
-              <a:t>参照メタデータ（入力には含めない）</a:t>
+              <a:t>正解の計算に使う式</a:t>
             </a:r>
           </a:p>
         </p:txBody>
@@ -29161,7 +25122,7 @@
                 <a:ea typeface="Noto Sans CJK JP"/>
                 <a:cs typeface="Noto Sans"/>
               </a:rPr>
-              <a:t>[1] HELM v0.3.0の公式生成器をseed=0で実行。Python 3.12 / NumPy 2.3.5。</a:t>
+              <a:t>[1] Stanford CRFM. NumeracyScenario（v0.3.0）。 </a:t>
             </a:r>
           </a:p>
           <a:p>
@@ -29301,7 +25262,7 @@
                 <a:ea typeface="Noto Sans CJK JP"/>
                 <a:cs typeface="Noto Sans"/>
               </a:rPr>
-              <a:t>Appendix: 2. 生成と採点の詳細</a:t>
+              <a:t>Appendix: 2. 式とデータ形式の補足</a:t>
             </a:r>
           </a:p>
         </p:txBody>
@@ -29914,7 +25875,7 @@
                 <a:ea typeface="Noto Sans CJK JP"/>
                 <a:cs typeface="Noto Sans"/>
               </a:rPr>
-              <a:t>[1] Stanford CRFM. NumeracyScenario, HELM v0.3.0.</a:t>
+              <a:t>[1] Stanford CRFM. NumeracyScenario（v0.3.0）。</a:t>
             </a:r>
             <a:r>
               <a:rPr sz="810" b="0" lang="ja-JP" altLang="en-US">
@@ -29927,1379 +25888,6 @@
               </a:rPr>
               <a:t>  </a:t>
             </a:r>
-            <a:r>
-              <a:rPr sz="810" b="0" lang="ja-JP" altLang="en-US">
-                <a:solidFill>
-                  <a:srgbClr val="626669"/>
-                </a:solidFill>
-                <a:latin typeface="Noto Sans"/>
-                <a:ea typeface="Noto Sans CJK JP"/>
-                <a:cs typeface="Noto Sans"/>
-                <a:hlinkClick r:id="rId2"/>
-              </a:rPr>
-              <a:t>https://github.com/stanford-crfm/helm/blob/v0.3.0/src/helm/benchmark/scenarios/numeracy_scenario.py</a:t>
-            </a:r>
-          </a:p>
-        </p:txBody>
-      </p:sp>
-    </p:spTree>
-  </p:cSld>
-  <p:clrMapOvr>
-    <a:masterClrMapping/>
-  </p:clrMapOvr>
-</p:sld>
-</file>
-
-<file path=ppt/slides/slide46.xml><?xml version="1.0" encoding="utf-8"?>
-<p:sld xmlns:a="http://schemas.openxmlformats.org/drawingml/2006/main" xmlns:p="http://schemas.openxmlformats.org/presentationml/2006/main" xmlns:r="http://schemas.openxmlformats.org/officeDocument/2006/relationships">
-  <p:cSld>
-    <p:spTree>
-      <p:nvGrpSpPr>
-        <p:cNvPr id="1" name=""/>
-        <p:cNvGrpSpPr/>
-        <p:nvPr/>
-      </p:nvGrpSpPr>
-      <p:grpSpPr/>
-      <p:sp>
-        <p:nvSpPr>
-          <p:cNvPr id="2" name="Title 1"/>
-          <p:cNvSpPr>
-            <a:spLocks noGrp="1"/>
-          </p:cNvSpPr>
-          <p:nvPr>
-            <p:ph type="title"/>
-          </p:nvPr>
-        </p:nvSpPr>
-        <p:spPr>
-          <a:xfrm>
-            <a:off x="468172" y="650138"/>
-            <a:ext cx="8206740" cy="616305"/>
-          </a:xfrm>
-        </p:spPr>
-        <p:txBody>
-          <a:bodyPr wrap="square" lIns="0" rIns="0" tIns="0" bIns="0">
-            <a:noAutofit/>
-          </a:bodyPr>
-          <a:lstStyle/>
-          <a:p>
-            <a:pPr algn="l">
-              <a:lnSpc>
-                <a:spcPct val="110000"/>
-              </a:lnSpc>
-              <a:buNone/>
-              <a:defRPr sz="2800" b="0">
-                <a:solidFill>
-                  <a:srgbClr val="303437"/>
-                </a:solidFill>
-                <a:latin typeface="Noto Sans"/>
-              </a:defRPr>
-            </a:pPr>
-            <a:r>
-              <a:rPr sz="2800" b="1" lang="ja-JP" altLang="en-US">
-                <a:solidFill>
-                  <a:srgbClr val="303437"/>
-                </a:solidFill>
-                <a:latin typeface="Noto Sans"/>
-                <a:ea typeface="Noto Sans CJK JP"/>
-                <a:cs typeface="Noto Sans"/>
-              </a:rPr>
-              <a:t>2変数の二次式には交差項も現れる</a:t>
-            </a:r>
-          </a:p>
-        </p:txBody>
-      </p:sp>
-      <p:sp>
-        <p:nvSpPr>
-          <p:cNvPr id="3" name="Text Placeholder 2"/>
-          <p:cNvSpPr>
-            <a:spLocks noGrp="1"/>
-          </p:cNvSpPr>
-          <p:nvPr>
-            <p:ph type="body" idx="1"/>
-          </p:nvPr>
-        </p:nvSpPr>
-        <p:spPr>
-          <a:xfrm>
-            <a:off x="594360" y="1463040"/>
-            <a:ext cx="7955279" cy="3044952"/>
-          </a:xfrm>
-        </p:spPr>
-        <p:txBody>
-          <a:bodyPr wrap="square" tIns="91440" bIns="91440">
-            <a:noAutofit/>
-          </a:bodyPr>
-          <a:lstStyle/>
-          <a:p>
-            <a:pPr marL="457200" indent="-355600">
-              <a:lnSpc>
-                <a:spcPts val="2618"/>
-              </a:lnSpc>
-              <a:spcAft>
-                <a:spcPts val="700"/>
-              </a:spcAft>
-              <a:buSzPct val="60455"/>
-              <a:buFont typeface="Noto Sans CJK JP"/>
-              <a:buChar char="●"/>
-              <a:defRPr sz="2200" b="0">
-                <a:solidFill>
-                  <a:srgbClr val="303437"/>
-                </a:solidFill>
-                <a:latin typeface="Noto Sans"/>
-              </a:defRPr>
-            </a:pPr>
-            <a:r>
-              <a:rPr sz="2200" b="0" lang="ja-JP" altLang="en-US">
-                <a:solidFill>
-                  <a:srgbClr val="303437"/>
-                </a:solidFill>
-                <a:latin typeface="Noto Sans"/>
-                <a:ea typeface="Noto Sans CJK JP"/>
-                <a:cs typeface="Noto Sans"/>
-              </a:rPr>
-              <a:t>v0.3.0の係数範囲では、paraboloidのxyの係数は0または1。xとyに関する一次項は0に固定される。</a:t>
-            </a:r>
-          </a:p>
-          <a:p>
-            <a:pPr marL="457200" indent="-355600">
-              <a:lnSpc>
-                <a:spcPts val="2618"/>
-              </a:lnSpc>
-              <a:spcAft>
-                <a:spcPts val="700"/>
-              </a:spcAft>
-              <a:buSzPct val="60455"/>
-              <a:buFont typeface="Noto Sans CJK JP"/>
-              <a:buChar char="●"/>
-              <a:defRPr sz="2200" b="0">
-                <a:solidFill>
-                  <a:srgbClr val="303437"/>
-                </a:solidFill>
-                <a:latin typeface="Noto Sans"/>
-              </a:defRPr>
-            </a:pPr>
-            <a:r>
-              <a:rPr sz="2200" b="0" lang="ja-JP" altLang="en-US">
-                <a:solidFill>
-                  <a:srgbClr val="303437"/>
-                </a:solidFill>
-                <a:latin typeface="Noto Sans"/>
-                <a:ea typeface="Noto Sans CJK JP"/>
-                <a:cs typeface="Noto Sans"/>
-              </a:rPr>
-              <a:t>standard／seed=0の参照式はz=2x²+xy+y²+4となり、交差項xyを含む。</a:t>
-            </a:r>
-          </a:p>
-          <a:p>
-            <a:pPr marL="457200" indent="-355600">
-              <a:lnSpc>
-                <a:spcPts val="2618"/>
-              </a:lnSpc>
-              <a:spcAft>
-                <a:spcPts val="0"/>
-              </a:spcAft>
-              <a:buSzPct val="60455"/>
-              <a:buFont typeface="Noto Sans CJK JP"/>
-              <a:buChar char="●"/>
-              <a:defRPr sz="2200" b="0">
-                <a:solidFill>
-                  <a:srgbClr val="303437"/>
-                </a:solidFill>
-                <a:latin typeface="Noto Sans"/>
-              </a:defRPr>
-            </a:pPr>
-            <a:r>
-              <a:rPr sz="2200" b="0" lang="ja-JP" altLang="en-US">
-                <a:solidFill>
-                  <a:srgbClr val="303437"/>
-                </a:solidFill>
-                <a:latin typeface="Noto Sans"/>
-                <a:ea typeface="Noto Sans CJK JP"/>
-                <a:cs typeface="Noto Sans"/>
-              </a:rPr>
-              <a:t>コードのコメントにはaxis-alignedのみとあるが、実際の係数範囲と生成結果には交差項がある。</a:t>
-            </a:r>
-          </a:p>
-        </p:txBody>
-      </p:sp>
-      <p:sp>
-        <p:nvSpPr>
-          <p:cNvPr id="4" name="Title 3"/>
-          <p:cNvSpPr>
-            <a:spLocks noGrp="1"/>
-          </p:cNvSpPr>
-          <p:nvPr>
-            <p:ph type="title" idx="2"/>
-          </p:nvPr>
-        </p:nvSpPr>
-        <p:spPr>
-          <a:xfrm>
-            <a:off x="75895" y="0"/>
-            <a:ext cx="8115300" cy="480060"/>
-          </a:xfrm>
-        </p:spPr>
-        <p:txBody>
-          <a:bodyPr wrap="square" lIns="0" rIns="0" tIns="0" bIns="0" anchor="ctr">
-            <a:noAutofit/>
-          </a:bodyPr>
-          <a:lstStyle/>
-          <a:p>
-            <a:pPr algn="l">
-              <a:lnSpc>
-                <a:spcPct val="110000"/>
-              </a:lnSpc>
-              <a:buNone/>
-              <a:defRPr sz="1400" b="0">
-                <a:solidFill>
-                  <a:srgbClr val="303437"/>
-                </a:solidFill>
-                <a:latin typeface="Noto Sans"/>
-              </a:defRPr>
-            </a:pPr>
-            <a:r>
-              <a:rPr sz="1400" b="1" lang="ja-JP" altLang="en-US">
-                <a:solidFill>
-                  <a:srgbClr val="FFFEF8"/>
-                </a:solidFill>
-                <a:latin typeface="Noto Sans"/>
-                <a:ea typeface="Noto Sans CJK JP"/>
-                <a:cs typeface="Noto Sans"/>
-              </a:rPr>
-              <a:t>Appendix: 2. 生成と採点の詳細</a:t>
-            </a:r>
-          </a:p>
-        </p:txBody>
-      </p:sp>
-      <p:sp>
-        <p:nvSpPr>
-          <p:cNvPr id="5" name="sources"/>
-          <p:cNvSpPr txBox="1"/>
-          <p:nvPr/>
-        </p:nvSpPr>
-        <p:spPr>
-          <a:xfrm>
-            <a:off x="502920" y="4700016"/>
-            <a:ext cx="8183879" cy="530352"/>
-          </a:xfrm>
-          <a:prstGeom prst="rect">
-            <a:avLst/>
-          </a:prstGeom>
-          <a:noFill/>
-        </p:spPr>
-        <p:txBody>
-          <a:bodyPr wrap="square" lIns="0" rIns="0" tIns="0" bIns="0">
-            <a:noAutofit/>
-          </a:bodyPr>
-          <a:lstStyle/>
-          <a:p>
-            <a:pPr algn="l">
-              <a:lnSpc>
-                <a:spcPts val="940"/>
-              </a:lnSpc>
-              <a:spcBef>
-                <a:spcPts val="0"/>
-              </a:spcBef>
-              <a:spcAft>
-                <a:spcPts val="140"/>
-              </a:spcAft>
-              <a:buNone/>
-              <a:defRPr sz="810" b="0">
-                <a:solidFill>
-                  <a:srgbClr val="303437"/>
-                </a:solidFill>
-                <a:latin typeface="Noto Sans"/>
-              </a:defRPr>
-            </a:pPr>
-            <a:r>
-              <a:rPr sz="810" b="0" lang="ja-JP" altLang="en-US">
-                <a:solidFill>
-                  <a:srgbClr val="626669"/>
-                </a:solidFill>
-                <a:latin typeface="Noto Sans"/>
-                <a:ea typeface="Noto Sans CJK JP"/>
-                <a:cs typeface="Noto Sans"/>
-              </a:rPr>
-              <a:t>[1] Stanford CRFM. NumeracyScenario, HELM v0.3.0.</a:t>
-            </a:r>
-            <a:r>
-              <a:rPr sz="810" b="0" lang="ja-JP" altLang="en-US">
-                <a:solidFill>
-                  <a:srgbClr val="626669"/>
-                </a:solidFill>
-                <a:latin typeface="Noto Sans"/>
-                <a:ea typeface="Noto Sans CJK JP"/>
-                <a:cs typeface="Noto Sans"/>
-              </a:rPr>
-              <a:t>  </a:t>
-            </a:r>
-            <a:r>
-              <a:rPr sz="810" b="0" lang="ja-JP" altLang="en-US">
-                <a:solidFill>
-                  <a:srgbClr val="626669"/>
-                </a:solidFill>
-                <a:latin typeface="Noto Sans"/>
-                <a:ea typeface="Noto Sans CJK JP"/>
-                <a:cs typeface="Noto Sans"/>
-                <a:hlinkClick r:id="rId2"/>
-              </a:rPr>
-              <a:t>https://github.com/stanford-crfm/helm/blob/v0.3.0/src/helm/benchmark/scenarios/numeracy_scenario.py</a:t>
-            </a:r>
-          </a:p>
-        </p:txBody>
-      </p:sp>
-    </p:spTree>
-  </p:cSld>
-  <p:clrMapOvr>
-    <a:masterClrMapping/>
-  </p:clrMapOvr>
-</p:sld>
-</file>
-
-<file path=ppt/slides/slide47.xml><?xml version="1.0" encoding="utf-8"?>
-<p:sld xmlns:a="http://schemas.openxmlformats.org/drawingml/2006/main" xmlns:p="http://schemas.openxmlformats.org/presentationml/2006/main" xmlns:r="http://schemas.openxmlformats.org/officeDocument/2006/relationships">
-  <p:cSld>
-    <p:spTree>
-      <p:nvGrpSpPr>
-        <p:cNvPr id="1" name=""/>
-        <p:cNvGrpSpPr/>
-        <p:nvPr/>
-      </p:nvGrpSpPr>
-      <p:grpSpPr/>
-      <p:sp>
-        <p:nvSpPr>
-          <p:cNvPr id="2" name="Title 1"/>
-          <p:cNvSpPr>
-            <a:spLocks noGrp="1"/>
-          </p:cNvSpPr>
-          <p:nvPr>
-            <p:ph type="title"/>
-          </p:nvPr>
-        </p:nvSpPr>
-        <p:spPr>
-          <a:xfrm>
-            <a:off x="468172" y="650138"/>
-            <a:ext cx="8206740" cy="616305"/>
-          </a:xfrm>
-        </p:spPr>
-        <p:txBody>
-          <a:bodyPr wrap="square" lIns="0" rIns="0" tIns="0" bIns="0">
-            <a:noAutofit/>
-          </a:bodyPr>
-          <a:lstStyle/>
-          <a:p>
-            <a:pPr algn="l">
-              <a:lnSpc>
-                <a:spcPct val="110000"/>
-              </a:lnSpc>
-              <a:buNone/>
-              <a:defRPr sz="2800" b="0">
-                <a:solidFill>
-                  <a:srgbClr val="303437"/>
-                </a:solidFill>
-                <a:latin typeface="Noto Sans"/>
-              </a:defRPr>
-            </a:pPr>
-            <a:r>
-              <a:rPr sz="2800" b="1" lang="ja-JP" altLang="en-US">
-                <a:solidFill>
-                  <a:srgbClr val="303437"/>
-                </a:solidFill>
-                <a:latin typeface="Noto Sans"/>
-                <a:ea typeface="Noto Sans CJK JP"/>
-                <a:cs typeface="Noto Sans"/>
-              </a:rPr>
-              <a:t>seed=0のstandard出力の範囲</a:t>
-            </a:r>
-          </a:p>
-        </p:txBody>
-      </p:sp>
-      <p:sp>
-        <p:nvSpPr>
-          <p:cNvPr id="3" name="Title 2"/>
-          <p:cNvSpPr>
-            <a:spLocks noGrp="1"/>
-          </p:cNvSpPr>
-          <p:nvPr>
-            <p:ph type="title" idx="2"/>
-          </p:nvPr>
-        </p:nvSpPr>
-        <p:spPr>
-          <a:xfrm>
-            <a:off x="75895" y="0"/>
-            <a:ext cx="8115300" cy="480060"/>
-          </a:xfrm>
-        </p:spPr>
-        <p:txBody>
-          <a:bodyPr wrap="square" lIns="0" rIns="0" tIns="0" bIns="0" anchor="ctr">
-            <a:noAutofit/>
-          </a:bodyPr>
-          <a:lstStyle/>
-          <a:p>
-            <a:pPr algn="l">
-              <a:lnSpc>
-                <a:spcPct val="110000"/>
-              </a:lnSpc>
-              <a:buNone/>
-              <a:defRPr sz="1400" b="0">
-                <a:solidFill>
-                  <a:srgbClr val="303437"/>
-                </a:solidFill>
-                <a:latin typeface="Noto Sans"/>
-              </a:defRPr>
-            </a:pPr>
-            <a:r>
-              <a:rPr sz="1400" b="1" lang="ja-JP" altLang="en-US">
-                <a:solidFill>
-                  <a:srgbClr val="FFFEF8"/>
-                </a:solidFill>
-                <a:latin typeface="Noto Sans"/>
-                <a:ea typeface="Noto Sans CJK JP"/>
-                <a:cs typeface="Noto Sans"/>
-              </a:rPr>
-              <a:t>Appendix: 2. 生成と採点の詳細</a:t>
-            </a:r>
-          </a:p>
-        </p:txBody>
-      </p:sp>
-      <p:graphicFrame>
-        <p:nvGraphicFramePr>
-          <p:cNvPr id="4" name="Table 3"/>
-          <p:cNvGraphicFramePr>
-            <a:graphicFrameLocks noGrp="1"/>
-          </p:cNvGraphicFramePr>
-          <p:nvPr/>
-        </p:nvGraphicFramePr>
-        <p:xfrm>
-          <a:off x="548640" y="1508760"/>
-          <a:ext cx="8046720" cy="2103120"/>
-        </p:xfrm>
-        <a:graphic>
-          <a:graphicData uri="http://schemas.openxmlformats.org/drawingml/2006/table">
-            <a:tbl>
-              <a:tblPr firstRow="0" bandRow="0"/>
-              <a:tblGrid>
-                <a:gridCol w="2560320"/>
-                <a:gridCol w="3291840"/>
-                <a:gridCol w="2194560"/>
-              </a:tblGrid>
-              <a:tr h="420624">
-                <a:tc>
-                  <a:txBody>
-                    <a:bodyPr wrap="square">
-                      <a:noAutofit/>
-                    </a:bodyPr>
-                    <a:lstStyle/>
-                    <a:p>
-                      <a:pPr algn="l">
-                        <a:lnSpc>
-                          <a:spcPts val="2185"/>
-                        </a:lnSpc>
-                        <a:buNone/>
-                        <a:defRPr sz="1900" b="0">
-                          <a:solidFill>
-                            <a:srgbClr val="303437"/>
-                          </a:solidFill>
-                          <a:latin typeface="Noto Sans"/>
-                        </a:defRPr>
-                      </a:pPr>
-                      <a:r>
-                        <a:rPr sz="1900" b="0" lang="ja-JP" altLang="en-US">
-                          <a:solidFill>
-                            <a:srgbClr val="303437"/>
-                          </a:solidFill>
-                          <a:latin typeface="Noto Sans"/>
-                          <a:ea typeface="Noto Sans CJK JP"/>
-                          <a:cs typeface="Noto Sans"/>
-                        </a:rPr>
-                        <a:t>型</a:t>
-                      </a:r>
-                    </a:p>
-                  </a:txBody>
-                  <a:tcPr marL="63500" marR="63500" marT="38100" marB="38100" anchor="ctr">
-                    <a:lnL w="7620">
-                      <a:noFill/>
-                    </a:lnL>
-                    <a:lnR w="7620">
-                      <a:noFill/>
-                    </a:lnR>
-                    <a:lnT w="15240">
-                      <a:solidFill>
-                        <a:srgbClr val="626669"/>
-                      </a:solidFill>
-                      <a:prstDash val="solid"/>
-                    </a:lnT>
-                    <a:lnB w="7620">
-                      <a:solidFill>
-                        <a:srgbClr val="626669"/>
-                      </a:solidFill>
-                      <a:prstDash val="solid"/>
-                    </a:lnB>
-                    <a:solidFill>
-                      <a:srgbClr val="FFFEF8"/>
-                    </a:solidFill>
-                  </a:tcPr>
-                </a:tc>
-                <a:tc>
-                  <a:txBody>
-                    <a:bodyPr wrap="square">
-                      <a:noAutofit/>
-                    </a:bodyPr>
-                    <a:lstStyle/>
-                    <a:p>
-                      <a:pPr algn="r">
-                        <a:lnSpc>
-                          <a:spcPts val="2185"/>
-                        </a:lnSpc>
-                        <a:buNone/>
-                        <a:defRPr sz="1900" b="0">
-                          <a:solidFill>
-                            <a:srgbClr val="303437"/>
-                          </a:solidFill>
-                          <a:latin typeface="Noto Sans"/>
-                        </a:defRPr>
-                      </a:pPr>
-                      <a:r>
-                        <a:rPr sz="1900" b="0" lang="ja-JP" altLang="en-US">
-                          <a:solidFill>
-                            <a:srgbClr val="303437"/>
-                          </a:solidFill>
-                          <a:latin typeface="Noto Sans"/>
-                          <a:ea typeface="Noto Sans CJK JP"/>
-                          <a:cs typeface="Noto Sans"/>
-                        </a:rPr>
-                        <a:t>train＋testの最小値</a:t>
-                      </a:r>
-                    </a:p>
-                  </a:txBody>
-                  <a:tcPr marL="63500" marR="63500" marT="38100" marB="38100" anchor="ctr">
-                    <a:lnL w="7620">
-                      <a:noFill/>
-                    </a:lnL>
-                    <a:lnR w="7620">
-                      <a:noFill/>
-                    </a:lnR>
-                    <a:lnT w="15240">
-                      <a:solidFill>
-                        <a:srgbClr val="626669"/>
-                      </a:solidFill>
-                      <a:prstDash val="solid"/>
-                    </a:lnT>
-                    <a:lnB w="7620">
-                      <a:solidFill>
-                        <a:srgbClr val="626669"/>
-                      </a:solidFill>
-                      <a:prstDash val="solid"/>
-                    </a:lnB>
-                    <a:solidFill>
-                      <a:srgbClr val="FFFEF8"/>
-                    </a:solidFill>
-                  </a:tcPr>
-                </a:tc>
-                <a:tc>
-                  <a:txBody>
-                    <a:bodyPr wrap="square">
-                      <a:noAutofit/>
-                    </a:bodyPr>
-                    <a:lstStyle/>
-                    <a:p>
-                      <a:pPr algn="r">
-                        <a:lnSpc>
-                          <a:spcPts val="2185"/>
-                        </a:lnSpc>
-                        <a:buNone/>
-                        <a:defRPr sz="1900" b="0">
-                          <a:solidFill>
-                            <a:srgbClr val="303437"/>
-                          </a:solidFill>
-                          <a:latin typeface="Noto Sans"/>
-                        </a:defRPr>
-                      </a:pPr>
-                      <a:r>
-                        <a:rPr sz="1900" b="0" lang="ja-JP" altLang="en-US">
-                          <a:solidFill>
-                            <a:srgbClr val="303437"/>
-                          </a:solidFill>
-                          <a:latin typeface="Noto Sans"/>
-                          <a:ea typeface="Noto Sans CJK JP"/>
-                          <a:cs typeface="Noto Sans"/>
-                        </a:rPr>
-                        <a:t>最大値</a:t>
-                      </a:r>
-                    </a:p>
-                  </a:txBody>
-                  <a:tcPr marL="63500" marR="63500" marT="38100" marB="38100" anchor="ctr">
-                    <a:lnL w="7620">
-                      <a:noFill/>
-                    </a:lnL>
-                    <a:lnR w="7620">
-                      <a:noFill/>
-                    </a:lnR>
-                    <a:lnT w="15240">
-                      <a:solidFill>
-                        <a:srgbClr val="626669"/>
-                      </a:solidFill>
-                      <a:prstDash val="solid"/>
-                    </a:lnT>
-                    <a:lnB w="7620">
-                      <a:solidFill>
-                        <a:srgbClr val="626669"/>
-                      </a:solidFill>
-                      <a:prstDash val="solid"/>
-                    </a:lnB>
-                    <a:solidFill>
-                      <a:srgbClr val="FFFEF8"/>
-                    </a:solidFill>
-                  </a:tcPr>
-                </a:tc>
-              </a:tr>
-              <a:tr h="420624">
-                <a:tc>
-                  <a:txBody>
-                    <a:bodyPr wrap="square">
-                      <a:noAutofit/>
-                    </a:bodyPr>
-                    <a:lstStyle/>
-                    <a:p>
-                      <a:pPr algn="l">
-                        <a:lnSpc>
-                          <a:spcPts val="2185"/>
-                        </a:lnSpc>
-                        <a:buNone/>
-                        <a:defRPr sz="1900" b="0">
-                          <a:solidFill>
-                            <a:srgbClr val="303437"/>
-                          </a:solidFill>
-                          <a:latin typeface="Noto Sans"/>
-                        </a:defRPr>
-                      </a:pPr>
-                      <a:r>
-                        <a:rPr sz="1900" b="0" lang="ja-JP" altLang="en-US">
-                          <a:solidFill>
-                            <a:srgbClr val="303437"/>
-                          </a:solidFill>
-                          <a:latin typeface="Noto Sans"/>
-                          <a:ea typeface="Noto Sans CJK JP"/>
-                          <a:cs typeface="Noto Sans"/>
-                        </a:rPr>
-                        <a:t>linear</a:t>
-                      </a:r>
-                    </a:p>
-                  </a:txBody>
-                  <a:tcPr marL="63500" marR="63500" marT="38100" marB="38100" anchor="ctr">
-                    <a:lnL w="7620">
-                      <a:noFill/>
-                    </a:lnL>
-                    <a:lnR w="7620">
-                      <a:noFill/>
-                    </a:lnR>
-                    <a:lnT w="7620">
-                      <a:solidFill>
-                        <a:srgbClr val="626669"/>
-                      </a:solidFill>
-                      <a:prstDash val="solid"/>
-                    </a:lnT>
-                    <a:lnB w="7620">
-                      <a:noFill/>
-                    </a:lnB>
-                    <a:solidFill>
-                      <a:srgbClr val="FFFEF8"/>
-                    </a:solidFill>
-                  </a:tcPr>
-                </a:tc>
-                <a:tc>
-                  <a:txBody>
-                    <a:bodyPr wrap="square">
-                      <a:noAutofit/>
-                    </a:bodyPr>
-                    <a:lstStyle/>
-                    <a:p>
-                      <a:pPr algn="r">
-                        <a:lnSpc>
-                          <a:spcPts val="2185"/>
-                        </a:lnSpc>
-                        <a:buNone/>
-                        <a:defRPr sz="1900" b="0">
-                          <a:solidFill>
-                            <a:srgbClr val="303437"/>
-                          </a:solidFill>
-                          <a:latin typeface="Noto Sans"/>
-                        </a:defRPr>
-                      </a:pPr>
-                      <a:r>
-                        <a:rPr sz="1900" b="0" lang="ja-JP" altLang="en-US">
-                          <a:solidFill>
-                            <a:srgbClr val="303437"/>
-                          </a:solidFill>
-                          <a:latin typeface="Noto Sans"/>
-                          <a:ea typeface="Noto Sans CJK JP"/>
-                          <a:cs typeface="Noto Sans"/>
-                        </a:rPr>
-                        <a:t>-396</a:t>
-                      </a:r>
-                    </a:p>
-                  </a:txBody>
-                  <a:tcPr marL="63500" marR="63500" marT="38100" marB="38100" anchor="ctr">
-                    <a:lnL w="7620">
-                      <a:noFill/>
-                    </a:lnL>
-                    <a:lnR w="7620">
-                      <a:noFill/>
-                    </a:lnR>
-                    <a:lnT w="7620">
-                      <a:solidFill>
-                        <a:srgbClr val="626669"/>
-                      </a:solidFill>
-                      <a:prstDash val="solid"/>
-                    </a:lnT>
-                    <a:lnB w="7620">
-                      <a:noFill/>
-                    </a:lnB>
-                    <a:solidFill>
-                      <a:srgbClr val="FFFEF8"/>
-                    </a:solidFill>
-                  </a:tcPr>
-                </a:tc>
-                <a:tc>
-                  <a:txBody>
-                    <a:bodyPr wrap="square">
-                      <a:noAutofit/>
-                    </a:bodyPr>
-                    <a:lstStyle/>
-                    <a:p>
-                      <a:pPr algn="r">
-                        <a:lnSpc>
-                          <a:spcPts val="2185"/>
-                        </a:lnSpc>
-                        <a:buNone/>
-                        <a:defRPr sz="1900" b="0">
-                          <a:solidFill>
-                            <a:srgbClr val="303437"/>
-                          </a:solidFill>
-                          <a:latin typeface="Noto Sans"/>
-                        </a:defRPr>
-                      </a:pPr>
-                      <a:r>
-                        <a:rPr sz="1900" b="0" lang="ja-JP" altLang="en-US">
-                          <a:solidFill>
-                            <a:srgbClr val="303437"/>
-                          </a:solidFill>
-                          <a:latin typeface="Noto Sans"/>
-                          <a:ea typeface="Noto Sans CJK JP"/>
-                          <a:cs typeface="Noto Sans"/>
-                        </a:rPr>
-                        <a:t>404</a:t>
-                      </a:r>
-                    </a:p>
-                  </a:txBody>
-                  <a:tcPr marL="63500" marR="63500" marT="38100" marB="38100" anchor="ctr">
-                    <a:lnL w="7620">
-                      <a:noFill/>
-                    </a:lnL>
-                    <a:lnR w="7620">
-                      <a:noFill/>
-                    </a:lnR>
-                    <a:lnT w="7620">
-                      <a:solidFill>
-                        <a:srgbClr val="626669"/>
-                      </a:solidFill>
-                      <a:prstDash val="solid"/>
-                    </a:lnT>
-                    <a:lnB w="7620">
-                      <a:noFill/>
-                    </a:lnB>
-                    <a:solidFill>
-                      <a:srgbClr val="FFFEF8"/>
-                    </a:solidFill>
-                  </a:tcPr>
-                </a:tc>
-              </a:tr>
-              <a:tr h="420624">
-                <a:tc>
-                  <a:txBody>
-                    <a:bodyPr wrap="square">
-                      <a:noAutofit/>
-                    </a:bodyPr>
-                    <a:lstStyle/>
-                    <a:p>
-                      <a:pPr algn="l">
-                        <a:lnSpc>
-                          <a:spcPts val="2185"/>
-                        </a:lnSpc>
-                        <a:buNone/>
-                        <a:defRPr sz="1900" b="0">
-                          <a:solidFill>
-                            <a:srgbClr val="303437"/>
-                          </a:solidFill>
-                          <a:latin typeface="Noto Sans"/>
-                        </a:defRPr>
-                      </a:pPr>
-                      <a:r>
-                        <a:rPr sz="1900" b="0" lang="ja-JP" altLang="en-US">
-                          <a:solidFill>
-                            <a:srgbClr val="303437"/>
-                          </a:solidFill>
-                          <a:latin typeface="Noto Sans"/>
-                          <a:ea typeface="Noto Sans CJK JP"/>
-                          <a:cs typeface="Noto Sans"/>
-                        </a:rPr>
-                        <a:t>parabola</a:t>
-                      </a:r>
-                    </a:p>
-                  </a:txBody>
-                  <a:tcPr marL="63500" marR="63500" marT="38100" marB="38100" anchor="ctr">
-                    <a:lnL w="7620">
-                      <a:noFill/>
-                    </a:lnL>
-                    <a:lnR w="7620">
-                      <a:noFill/>
-                    </a:lnR>
-                    <a:lnT w="7620">
-                      <a:noFill/>
-                    </a:lnT>
-                    <a:lnB w="7620">
-                      <a:noFill/>
-                    </a:lnB>
-                    <a:solidFill>
-                      <a:srgbClr val="FFFEF8"/>
-                    </a:solidFill>
-                  </a:tcPr>
-                </a:tc>
-                <a:tc>
-                  <a:txBody>
-                    <a:bodyPr wrap="square">
-                      <a:noAutofit/>
-                    </a:bodyPr>
-                    <a:lstStyle/>
-                    <a:p>
-                      <a:pPr algn="r">
-                        <a:lnSpc>
-                          <a:spcPts val="2185"/>
-                        </a:lnSpc>
-                        <a:buNone/>
-                        <a:defRPr sz="1900" b="0">
-                          <a:solidFill>
-                            <a:srgbClr val="303437"/>
-                          </a:solidFill>
-                          <a:latin typeface="Noto Sans"/>
-                        </a:defRPr>
-                      </a:pPr>
-                      <a:r>
-                        <a:rPr sz="1900" b="0" lang="ja-JP" altLang="en-US">
-                          <a:solidFill>
-                            <a:srgbClr val="303437"/>
-                          </a:solidFill>
-                          <a:latin typeface="Noto Sans"/>
-                          <a:ea typeface="Noto Sans CJK JP"/>
-                          <a:cs typeface="Noto Sans"/>
-                        </a:rPr>
-                        <a:t>1</a:t>
-                      </a:r>
-                    </a:p>
-                  </a:txBody>
-                  <a:tcPr marL="63500" marR="63500" marT="38100" marB="38100" anchor="ctr">
-                    <a:lnL w="7620">
-                      <a:noFill/>
-                    </a:lnL>
-                    <a:lnR w="7620">
-                      <a:noFill/>
-                    </a:lnR>
-                    <a:lnT w="7620">
-                      <a:noFill/>
-                    </a:lnT>
-                    <a:lnB w="7620">
-                      <a:noFill/>
-                    </a:lnB>
-                    <a:solidFill>
-                      <a:srgbClr val="FFFEF8"/>
-                    </a:solidFill>
-                  </a:tcPr>
-                </a:tc>
-                <a:tc>
-                  <a:txBody>
-                    <a:bodyPr wrap="square">
-                      <a:noAutofit/>
-                    </a:bodyPr>
-                    <a:lstStyle/>
-                    <a:p>
-                      <a:pPr algn="r">
-                        <a:lnSpc>
-                          <a:spcPts val="2185"/>
-                        </a:lnSpc>
-                        <a:buNone/>
-                        <a:defRPr sz="1900" b="0">
-                          <a:solidFill>
-                            <a:srgbClr val="303437"/>
-                          </a:solidFill>
-                          <a:latin typeface="Noto Sans"/>
-                        </a:defRPr>
-                      </a:pPr>
-                      <a:r>
-                        <a:rPr sz="1900" b="0" lang="ja-JP" altLang="en-US">
-                          <a:solidFill>
-                            <a:srgbClr val="303437"/>
-                          </a:solidFill>
-                          <a:latin typeface="Noto Sans"/>
-                          <a:ea typeface="Noto Sans CJK JP"/>
-                          <a:cs typeface="Noto Sans"/>
-                        </a:rPr>
-                        <a:t>80,201</a:t>
-                      </a:r>
-                    </a:p>
-                  </a:txBody>
-                  <a:tcPr marL="63500" marR="63500" marT="38100" marB="38100" anchor="ctr">
-                    <a:lnL w="7620">
-                      <a:noFill/>
-                    </a:lnL>
-                    <a:lnR w="7620">
-                      <a:noFill/>
-                    </a:lnR>
-                    <a:lnT w="7620">
-                      <a:noFill/>
-                    </a:lnT>
-                    <a:lnB w="7620">
-                      <a:noFill/>
-                    </a:lnB>
-                    <a:solidFill>
-                      <a:srgbClr val="FFFEF8"/>
-                    </a:solidFill>
-                  </a:tcPr>
-                </a:tc>
-              </a:tr>
-              <a:tr h="420624">
-                <a:tc>
-                  <a:txBody>
-                    <a:bodyPr wrap="square">
-                      <a:noAutofit/>
-                    </a:bodyPr>
-                    <a:lstStyle/>
-                    <a:p>
-                      <a:pPr algn="l">
-                        <a:lnSpc>
-                          <a:spcPts val="2185"/>
-                        </a:lnSpc>
-                        <a:buNone/>
-                        <a:defRPr sz="1900" b="0">
-                          <a:solidFill>
-                            <a:srgbClr val="303437"/>
-                          </a:solidFill>
-                          <a:latin typeface="Noto Sans"/>
-                        </a:defRPr>
-                      </a:pPr>
-                      <a:r>
-                        <a:rPr sz="1900" b="0" lang="ja-JP" altLang="en-US">
-                          <a:solidFill>
-                            <a:srgbClr val="303437"/>
-                          </a:solidFill>
-                          <a:latin typeface="Noto Sans"/>
-                          <a:ea typeface="Noto Sans CJK JP"/>
-                          <a:cs typeface="Noto Sans"/>
-                        </a:rPr>
-                        <a:t>plane</a:t>
-                      </a:r>
-                    </a:p>
-                  </a:txBody>
-                  <a:tcPr marL="63500" marR="63500" marT="38100" marB="38100" anchor="ctr">
-                    <a:lnL w="7620">
-                      <a:noFill/>
-                    </a:lnL>
-                    <a:lnR w="7620">
-                      <a:noFill/>
-                    </a:lnR>
-                    <a:lnT w="7620">
-                      <a:noFill/>
-                    </a:lnT>
-                    <a:lnB w="7620">
-                      <a:noFill/>
-                    </a:lnB>
-                    <a:solidFill>
-                      <a:srgbClr val="FFFEF8"/>
-                    </a:solidFill>
-                  </a:tcPr>
-                </a:tc>
-                <a:tc>
-                  <a:txBody>
-                    <a:bodyPr wrap="square">
-                      <a:noAutofit/>
-                    </a:bodyPr>
-                    <a:lstStyle/>
-                    <a:p>
-                      <a:pPr algn="r">
-                        <a:lnSpc>
-                          <a:spcPts val="2185"/>
-                        </a:lnSpc>
-                        <a:buNone/>
-                        <a:defRPr sz="1900" b="0">
-                          <a:solidFill>
-                            <a:srgbClr val="303437"/>
-                          </a:solidFill>
-                          <a:latin typeface="Noto Sans"/>
-                        </a:defRPr>
-                      </a:pPr>
-                      <a:r>
-                        <a:rPr sz="1900" b="0" lang="ja-JP" altLang="en-US">
-                          <a:solidFill>
-                            <a:srgbClr val="303437"/>
-                          </a:solidFill>
-                          <a:latin typeface="Noto Sans"/>
-                          <a:ea typeface="Noto Sans CJK JP"/>
-                          <a:cs typeface="Noto Sans"/>
-                        </a:rPr>
-                        <a:t>-79</a:t>
-                      </a:r>
-                    </a:p>
-                  </a:txBody>
-                  <a:tcPr marL="63500" marR="63500" marT="38100" marB="38100" anchor="ctr">
-                    <a:lnL w="7620">
-                      <a:noFill/>
-                    </a:lnL>
-                    <a:lnR w="7620">
-                      <a:noFill/>
-                    </a:lnR>
-                    <a:lnT w="7620">
-                      <a:noFill/>
-                    </a:lnT>
-                    <a:lnB w="7620">
-                      <a:noFill/>
-                    </a:lnB>
-                    <a:solidFill>
-                      <a:srgbClr val="FFFEF8"/>
-                    </a:solidFill>
-                  </a:tcPr>
-                </a:tc>
-                <a:tc>
-                  <a:txBody>
-                    <a:bodyPr wrap="square">
-                      <a:noAutofit/>
-                    </a:bodyPr>
-                    <a:lstStyle/>
-                    <a:p>
-                      <a:pPr algn="r">
-                        <a:lnSpc>
-                          <a:spcPts val="2185"/>
-                        </a:lnSpc>
-                        <a:buNone/>
-                        <a:defRPr sz="1900" b="0">
-                          <a:solidFill>
-                            <a:srgbClr val="303437"/>
-                          </a:solidFill>
-                          <a:latin typeface="Noto Sans"/>
-                        </a:defRPr>
-                      </a:pPr>
-                      <a:r>
-                        <a:rPr sz="1900" b="0" lang="ja-JP" altLang="en-US">
-                          <a:solidFill>
-                            <a:srgbClr val="303437"/>
-                          </a:solidFill>
-                          <a:latin typeface="Noto Sans"/>
-                          <a:ea typeface="Noto Sans CJK JP"/>
-                          <a:cs typeface="Noto Sans"/>
-                        </a:rPr>
-                        <a:t>81</a:t>
-                      </a:r>
-                    </a:p>
-                  </a:txBody>
-                  <a:tcPr marL="63500" marR="63500" marT="38100" marB="38100" anchor="ctr">
-                    <a:lnL w="7620">
-                      <a:noFill/>
-                    </a:lnL>
-                    <a:lnR w="7620">
-                      <a:noFill/>
-                    </a:lnR>
-                    <a:lnT w="7620">
-                      <a:noFill/>
-                    </a:lnT>
-                    <a:lnB w="7620">
-                      <a:noFill/>
-                    </a:lnB>
-                    <a:solidFill>
-                      <a:srgbClr val="FFFEF8"/>
-                    </a:solidFill>
-                  </a:tcPr>
-                </a:tc>
-              </a:tr>
-              <a:tr h="420624">
-                <a:tc>
-                  <a:txBody>
-                    <a:bodyPr wrap="square">
-                      <a:noAutofit/>
-                    </a:bodyPr>
-                    <a:lstStyle/>
-                    <a:p>
-                      <a:pPr algn="l">
-                        <a:lnSpc>
-                          <a:spcPts val="2185"/>
-                        </a:lnSpc>
-                        <a:buNone/>
-                        <a:defRPr sz="1900" b="0">
-                          <a:solidFill>
-                            <a:srgbClr val="303437"/>
-                          </a:solidFill>
-                          <a:latin typeface="Noto Sans"/>
-                        </a:defRPr>
-                      </a:pPr>
-                      <a:r>
-                        <a:rPr sz="1900" b="0" lang="ja-JP" altLang="en-US">
-                          <a:solidFill>
-                            <a:srgbClr val="303437"/>
-                          </a:solidFill>
-                          <a:latin typeface="Noto Sans"/>
-                          <a:ea typeface="Noto Sans CJK JP"/>
-                          <a:cs typeface="Noto Sans"/>
-                        </a:rPr>
-                        <a:t>paraboloid</a:t>
-                      </a:r>
-                    </a:p>
-                  </a:txBody>
-                  <a:tcPr marL="63500" marR="63500" marT="38100" marB="38100" anchor="ctr">
-                    <a:lnL w="7620">
-                      <a:noFill/>
-                    </a:lnL>
-                    <a:lnR w="7620">
-                      <a:noFill/>
-                    </a:lnR>
-                    <a:lnT w="7620">
-                      <a:noFill/>
-                    </a:lnT>
-                    <a:lnB w="15240">
-                      <a:solidFill>
-                        <a:srgbClr val="626669"/>
-                      </a:solidFill>
-                      <a:prstDash val="solid"/>
-                    </a:lnB>
-                    <a:solidFill>
-                      <a:srgbClr val="FFFEF8"/>
-                    </a:solidFill>
-                  </a:tcPr>
-                </a:tc>
-                <a:tc>
-                  <a:txBody>
-                    <a:bodyPr wrap="square">
-                      <a:noAutofit/>
-                    </a:bodyPr>
-                    <a:lstStyle/>
-                    <a:p>
-                      <a:pPr algn="r">
-                        <a:lnSpc>
-                          <a:spcPts val="2185"/>
-                        </a:lnSpc>
-                        <a:buNone/>
-                        <a:defRPr sz="1900" b="0">
-                          <a:solidFill>
-                            <a:srgbClr val="303437"/>
-                          </a:solidFill>
-                          <a:latin typeface="Noto Sans"/>
-                        </a:defRPr>
-                      </a:pPr>
-                      <a:r>
-                        <a:rPr sz="1900" b="0" lang="ja-JP" altLang="en-US">
-                          <a:solidFill>
-                            <a:srgbClr val="303437"/>
-                          </a:solidFill>
-                          <a:latin typeface="Noto Sans"/>
-                          <a:ea typeface="Noto Sans CJK JP"/>
-                          <a:cs typeface="Noto Sans"/>
-                        </a:rPr>
-                        <a:t>4</a:t>
-                      </a:r>
-                    </a:p>
-                  </a:txBody>
-                  <a:tcPr marL="63500" marR="63500" marT="38100" marB="38100" anchor="ctr">
-                    <a:lnL w="7620">
-                      <a:noFill/>
-                    </a:lnL>
-                    <a:lnR w="7620">
-                      <a:noFill/>
-                    </a:lnR>
-                    <a:lnT w="7620">
-                      <a:noFill/>
-                    </a:lnT>
-                    <a:lnB w="15240">
-                      <a:solidFill>
-                        <a:srgbClr val="626669"/>
-                      </a:solidFill>
-                      <a:prstDash val="solid"/>
-                    </a:lnB>
-                    <a:solidFill>
-                      <a:srgbClr val="FFFEF8"/>
-                    </a:solidFill>
-                  </a:tcPr>
-                </a:tc>
-                <a:tc>
-                  <a:txBody>
-                    <a:bodyPr wrap="square">
-                      <a:noAutofit/>
-                    </a:bodyPr>
-                    <a:lstStyle/>
-                    <a:p>
-                      <a:pPr algn="r">
-                        <a:lnSpc>
-                          <a:spcPts val="2185"/>
-                        </a:lnSpc>
-                        <a:buNone/>
-                        <a:defRPr sz="1900" b="0">
-                          <a:solidFill>
-                            <a:srgbClr val="303437"/>
-                          </a:solidFill>
-                          <a:latin typeface="Noto Sans"/>
-                        </a:defRPr>
-                      </a:pPr>
-                      <a:r>
-                        <a:rPr sz="1900" b="0" lang="ja-JP" altLang="en-US">
-                          <a:solidFill>
-                            <a:srgbClr val="303437"/>
-                          </a:solidFill>
-                          <a:latin typeface="Noto Sans"/>
-                          <a:ea typeface="Noto Sans CJK JP"/>
-                          <a:cs typeface="Noto Sans"/>
-                        </a:rPr>
-                        <a:t>1,604</a:t>
-                      </a:r>
-                    </a:p>
-                  </a:txBody>
-                  <a:tcPr marL="63500" marR="63500" marT="38100" marB="38100" anchor="ctr">
-                    <a:lnL w="7620">
-                      <a:noFill/>
-                    </a:lnL>
-                    <a:lnR w="7620">
-                      <a:noFill/>
-                    </a:lnR>
-                    <a:lnT w="7620">
-                      <a:noFill/>
-                    </a:lnT>
-                    <a:lnB w="15240">
-                      <a:solidFill>
-                        <a:srgbClr val="626669"/>
-                      </a:solidFill>
-                      <a:prstDash val="solid"/>
-                    </a:lnB>
-                    <a:solidFill>
-                      <a:srgbClr val="FFFEF8"/>
-                    </a:solidFill>
-                  </a:tcPr>
-                </a:tc>
-              </a:tr>
-            </a:tbl>
-          </a:graphicData>
-        </a:graphic>
-      </p:graphicFrame>
-      <p:sp>
-        <p:nvSpPr>
-          <p:cNvPr id="5" name="TextBox 4"/>
-          <p:cNvSpPr txBox="1"/>
-          <p:nvPr/>
-        </p:nvSpPr>
-        <p:spPr>
-          <a:xfrm>
-            <a:off x="594360" y="3813048"/>
-            <a:ext cx="7955279" cy="658368"/>
-          </a:xfrm>
-          <a:prstGeom prst="rect">
-            <a:avLst/>
-          </a:prstGeom>
-          <a:noFill/>
-        </p:spPr>
-        <p:txBody>
-          <a:bodyPr wrap="square" lIns="0" rIns="0" tIns="0" bIns="0">
-            <a:noAutofit/>
-          </a:bodyPr>
-          <a:lstStyle/>
-          <a:p>
-            <a:pPr algn="l">
-              <a:lnSpc>
-                <a:spcPts val="2047"/>
-              </a:lnSpc>
-              <a:spcBef>
-                <a:spcPts val="0"/>
-              </a:spcBef>
-              <a:spcAft>
-                <a:spcPts val="0"/>
-              </a:spcAft>
-              <a:buNone/>
-              <a:defRPr sz="1750" b="0">
-                <a:solidFill>
-                  <a:srgbClr val="303437"/>
-                </a:solidFill>
-                <a:latin typeface="Noto Sans"/>
-              </a:defRPr>
-            </a:pPr>
-            <a:r>
-              <a:rPr sz="1750" b="0" lang="ja-JP" altLang="en-US">
-                <a:solidFill>
-                  <a:srgbClr val="303437"/>
-                </a:solidFill>
-                <a:latin typeface="Noto Sans"/>
-                <a:ea typeface="Noto Sans CJK JP"/>
-                <a:cs typeface="Noto Sans"/>
-              </a:rPr>
-              <a:t>各型の200件を実測した範囲。係数と入力点の全組み合わせの極値ではない。</a:t>
-            </a:r>
-          </a:p>
-        </p:txBody>
-      </p:sp>
-      <p:sp>
-        <p:nvSpPr>
-          <p:cNvPr id="6" name="sources"/>
-          <p:cNvSpPr txBox="1"/>
-          <p:nvPr/>
-        </p:nvSpPr>
-        <p:spPr>
-          <a:xfrm>
-            <a:off x="502920" y="4700016"/>
-            <a:ext cx="8183879" cy="530352"/>
-          </a:xfrm>
-          <a:prstGeom prst="rect">
-            <a:avLst/>
-          </a:prstGeom>
-          <a:noFill/>
-        </p:spPr>
-        <p:txBody>
-          <a:bodyPr wrap="square" lIns="0" rIns="0" tIns="0" bIns="0">
-            <a:noAutofit/>
-          </a:bodyPr>
-          <a:lstStyle/>
-          <a:p>
-            <a:pPr algn="l">
-              <a:lnSpc>
-                <a:spcPts val="940"/>
-              </a:lnSpc>
-              <a:spcBef>
-                <a:spcPts val="0"/>
-              </a:spcBef>
-              <a:spcAft>
-                <a:spcPts val="140"/>
-              </a:spcAft>
-              <a:buNone/>
-              <a:defRPr sz="810" b="0">
-                <a:solidFill>
-                  <a:srgbClr val="303437"/>
-                </a:solidFill>
-                <a:latin typeface="Noto Sans"/>
-              </a:defRPr>
-            </a:pPr>
-            <a:r>
-              <a:rPr sz="810" b="0" lang="ja-JP" altLang="en-US">
-                <a:solidFill>
-                  <a:srgbClr val="626669"/>
-                </a:solidFill>
-                <a:latin typeface="Noto Sans"/>
-                <a:ea typeface="Noto Sans CJK JP"/>
-                <a:cs typeface="Noto Sans"/>
-              </a:rPr>
-              <a:t>[1] HELM v0.3.0の公式生成器をseed=0で実行。Python 3.12 / NumPy 2.3.5。</a:t>
-            </a:r>
-          </a:p>
-          <a:p>
-            <a:pPr>
-              <a:lnSpc>
-                <a:spcPts val="940"/>
-              </a:lnSpc>
-              <a:buNone/>
-              <a:defRPr sz="810" b="0">
-                <a:solidFill>
-                  <a:srgbClr val="303437"/>
-                </a:solidFill>
-                <a:latin typeface="Noto Sans"/>
-              </a:defRPr>
-            </a:pPr>
             <a:r>
               <a:rPr sz="810" b="0" lang="ja-JP" altLang="en-US">
                 <a:solidFill>
@@ -31429,7 +26017,7 @@
                 <a:ea typeface="Noto Sans CJK JP"/>
                 <a:cs typeface="Noto Sans"/>
               </a:rPr>
-              <a:t>referencesの先頭は数値の正解で、correctタグが付く。次にsolutionタグの参照式、classタグの関数型が入る。</a:t>
+              <a:t>生成した各問題には、入力の整数列と、数値の正解が含まれる。参照式と式の種類も、正解を確かめるために保存される。</a:t>
             </a:r>
           </a:p>
           <a:p>
@@ -31459,37 +26047,7 @@
                 <a:ea typeface="Noto Sans CJK JP"/>
                 <a:cs typeface="Noto Sans"/>
               </a:rPr>
-              <a:t>モデルの入力はinput.textにある整数の列。採点と検証に使う参照式は、通常の入出力例の文章に混ぜない。</a:t>
-            </a:r>
-          </a:p>
-          <a:p>
-            <a:pPr marL="457200" indent="-355600">
-              <a:lnSpc>
-                <a:spcPts val="2558"/>
-              </a:lnSpc>
-              <a:spcAft>
-                <a:spcPts val="0"/>
-              </a:spcAft>
-              <a:buSzPct val="61860"/>
-              <a:buFont typeface="Noto Sans CJK JP"/>
-              <a:buChar char="●"/>
-              <a:defRPr sz="2150" b="0">
-                <a:solidFill>
-                  <a:srgbClr val="303437"/>
-                </a:solidFill>
-                <a:latin typeface="Noto Sans"/>
-              </a:defRPr>
-            </a:pPr>
-            <a:r>
-              <a:rPr sz="2150" b="0" lang="ja-JP" altLang="en-US">
-                <a:solidFill>
-                  <a:srgbClr val="303437"/>
-                </a:solidFill>
-                <a:latin typeface="Noto Sans"/>
-                <a:ea typeface="Noto Sans CJK JP"/>
-                <a:cs typeface="Noto Sans"/>
-              </a:rPr>
-              <a:t>実例のIDは、関数型・モード・seed・test配列内の位置を組み合わせた、この資料での識別子。</a:t>
+              <a:t>入力はinput.text、参照はreferencesに入る。correctタグは数値の正解、solutionは参照式、classは式の種類を表す。</a:t>
             </a:r>
           </a:p>
         </p:txBody>
@@ -31537,7 +26095,7 @@
                 <a:ea typeface="Noto Sans CJK JP"/>
                 <a:cs typeface="Noto Sans"/>
               </a:rPr>
-              <a:t>Appendix: 2. 生成と採点の詳細</a:t>
+              <a:t>Appendix: 2. 式とデータ形式の補足</a:t>
             </a:r>
           </a:p>
         </p:txBody>
@@ -31591,311 +26149,7 @@
                 <a:ea typeface="Noto Sans CJK JP"/>
                 <a:cs typeface="Noto Sans"/>
               </a:rPr>
-              <a:t>[1] Stanford CRFM. NumeracyScenario, HELM v0.3.0.</a:t>
-            </a:r>
-            <a:r>
-              <a:rPr sz="810" b="0" lang="ja-JP" altLang="en-US">
-                <a:solidFill>
-                  <a:srgbClr val="626669"/>
-                </a:solidFill>
-                <a:latin typeface="Noto Sans"/>
-                <a:ea typeface="Noto Sans CJK JP"/>
-                <a:cs typeface="Noto Sans"/>
-              </a:rPr>
-              <a:t>  </a:t>
-            </a:r>
-            <a:r>
-              <a:rPr sz="810" b="0" lang="ja-JP" altLang="en-US">
-                <a:solidFill>
-                  <a:srgbClr val="626669"/>
-                </a:solidFill>
-                <a:latin typeface="Noto Sans"/>
-                <a:ea typeface="Noto Sans CJK JP"/>
-                <a:cs typeface="Noto Sans"/>
-                <a:hlinkClick r:id="rId2"/>
-              </a:rPr>
-              <a:t>https://github.com/stanford-crfm/helm/blob/v0.3.0/src/helm/benchmark/scenarios/numeracy_scenario.py</a:t>
-            </a:r>
-          </a:p>
-        </p:txBody>
-      </p:sp>
-    </p:spTree>
-  </p:cSld>
-  <p:clrMapOvr>
-    <a:masterClrMapping/>
-  </p:clrMapOvr>
-</p:sld>
-</file>
-
-<file path=ppt/slides/slide49.xml><?xml version="1.0" encoding="utf-8"?>
-<p:sld xmlns:a="http://schemas.openxmlformats.org/drawingml/2006/main" xmlns:p="http://schemas.openxmlformats.org/presentationml/2006/main" xmlns:r="http://schemas.openxmlformats.org/officeDocument/2006/relationships">
-  <p:cSld>
-    <p:spTree>
-      <p:nvGrpSpPr>
-        <p:cNvPr id="1" name=""/>
-        <p:cNvGrpSpPr/>
-        <p:nvPr/>
-      </p:nvGrpSpPr>
-      <p:grpSpPr/>
-      <p:sp>
-        <p:nvSpPr>
-          <p:cNvPr id="2" name="Title 1"/>
-          <p:cNvSpPr>
-            <a:spLocks noGrp="1"/>
-          </p:cNvSpPr>
-          <p:nvPr>
-            <p:ph type="title"/>
-          </p:nvPr>
-        </p:nvSpPr>
-        <p:spPr>
-          <a:xfrm>
-            <a:off x="468172" y="650138"/>
-            <a:ext cx="8206740" cy="616305"/>
-          </a:xfrm>
-        </p:spPr>
-        <p:txBody>
-          <a:bodyPr wrap="square" lIns="0" rIns="0" tIns="0" bIns="0">
-            <a:noAutofit/>
-          </a:bodyPr>
-          <a:lstStyle/>
-          <a:p>
-            <a:pPr algn="l">
-              <a:lnSpc>
-                <a:spcPct val="110000"/>
-              </a:lnSpc>
-              <a:buNone/>
-              <a:defRPr sz="2800" b="0">
-                <a:solidFill>
-                  <a:srgbClr val="303437"/>
-                </a:solidFill>
-                <a:latin typeface="Noto Sans"/>
-              </a:defRPr>
-            </a:pPr>
-            <a:r>
-              <a:rPr sz="2800" b="1" lang="ja-JP" altLang="en-US">
-                <a:solidFill>
-                  <a:srgbClr val="303437"/>
-                </a:solidFill>
-                <a:latin typeface="Noto Sans"/>
-                <a:ea typeface="Noto Sans CJK JP"/>
-                <a:cs typeface="Noto Sans"/>
-              </a:rPr>
-              <a:t>functionモードは生成処理が止まっている</a:t>
-            </a:r>
-          </a:p>
-        </p:txBody>
-      </p:sp>
-      <p:sp>
-        <p:nvSpPr>
-          <p:cNvPr id="3" name="Text Placeholder 2"/>
-          <p:cNvSpPr>
-            <a:spLocks noGrp="1"/>
-          </p:cNvSpPr>
-          <p:nvPr>
-            <p:ph type="body" idx="1"/>
-          </p:nvPr>
-        </p:nvSpPr>
-        <p:spPr>
-          <a:xfrm>
-            <a:off x="594360" y="1463040"/>
-            <a:ext cx="7955279" cy="3044952"/>
-          </a:xfrm>
-        </p:spPr>
-        <p:txBody>
-          <a:bodyPr wrap="square" tIns="91440" bIns="91440">
-            <a:noAutofit/>
-          </a:bodyPr>
-          <a:lstStyle/>
-          <a:p>
-            <a:pPr marL="457200" indent="-355600">
-              <a:lnSpc>
-                <a:spcPts val="2558"/>
-              </a:lnSpc>
-              <a:spcAft>
-                <a:spcPts val="700"/>
-              </a:spcAft>
-              <a:buSzPct val="61860"/>
-              <a:buFont typeface="Noto Sans CJK JP"/>
-              <a:buChar char="●"/>
-              <a:defRPr sz="2150" b="0">
-                <a:solidFill>
-                  <a:srgbClr val="303437"/>
-                </a:solidFill>
-                <a:latin typeface="Noto Sans"/>
-              </a:defRPr>
-            </a:pPr>
-            <a:r>
-              <a:rPr sz="2150" b="0" lang="ja-JP" altLang="en-US">
-                <a:solidFill>
-                  <a:srgbClr val="303437"/>
-                </a:solidFill>
-                <a:latin typeface="Noto Sans"/>
-                <a:ea typeface="Noto Sans CJK JP"/>
-                <a:cs typeface="Noto Sans"/>
-              </a:rPr>
-              <a:t>functionは、問題ごとに式を抽選し直す設計として説明される。MODE_INFOには訓練・評価の関数を各1,000個とする設定がある。</a:t>
-            </a:r>
-          </a:p>
-          <a:p>
-            <a:pPr marL="457200" indent="-355600">
-              <a:lnSpc>
-                <a:spcPts val="2558"/>
-              </a:lnSpc>
-              <a:spcAft>
-                <a:spcPts val="700"/>
-              </a:spcAft>
-              <a:buSzPct val="61860"/>
-              <a:buFont typeface="Noto Sans CJK JP"/>
-              <a:buChar char="●"/>
-              <a:defRPr sz="2150" b="0">
-                <a:solidFill>
-                  <a:srgbClr val="303437"/>
-                </a:solidFill>
-                <a:latin typeface="Noto Sans"/>
-              </a:defRPr>
-            </a:pPr>
-            <a:r>
-              <a:rPr sz="2150" b="0" lang="ja-JP" altLang="en-US">
-                <a:solidFill>
-                  <a:srgbClr val="303437"/>
-                </a:solidFill>
-                <a:latin typeface="Noto Sans"/>
-                <a:ea typeface="Noto Sans CJK JP"/>
-                <a:cs typeface="Noto Sans"/>
-              </a:rPr>
-              <a:t>しかしv0.3.0のgenerate_datasetsはTODOとともに空リストを返す。4型をseed=0で実行して、いずれも0件だった。</a:t>
-            </a:r>
-          </a:p>
-          <a:p>
-            <a:pPr marL="457200" indent="-355600">
-              <a:lnSpc>
-                <a:spcPts val="2558"/>
-              </a:lnSpc>
-              <a:spcAft>
-                <a:spcPts val="0"/>
-              </a:spcAft>
-              <a:buSzPct val="61860"/>
-              <a:buFont typeface="Noto Sans CJK JP"/>
-              <a:buChar char="●"/>
-              <a:defRPr sz="2150" b="0">
-                <a:solidFill>
-                  <a:srgbClr val="303437"/>
-                </a:solidFill>
-                <a:latin typeface="Noto Sans"/>
-              </a:defRPr>
-            </a:pPr>
-            <a:r>
-              <a:rPr sz="2150" b="0" lang="ja-JP" altLang="en-US">
-                <a:solidFill>
-                  <a:srgbClr val="303437"/>
-                </a:solidFill>
-                <a:latin typeface="Noto Sans"/>
-                <a:ea typeface="Noto Sans CJK JP"/>
-                <a:cs typeface="Noto Sans"/>
-              </a:rPr>
-              <a:t>設定上の1,000関数と、実際に生成・公開評価された件数を同じ数量として扱わない。</a:t>
-            </a:r>
-          </a:p>
-        </p:txBody>
-      </p:sp>
-      <p:sp>
-        <p:nvSpPr>
-          <p:cNvPr id="4" name="Title 3"/>
-          <p:cNvSpPr>
-            <a:spLocks noGrp="1"/>
-          </p:cNvSpPr>
-          <p:nvPr>
-            <p:ph type="title" idx="2"/>
-          </p:nvPr>
-        </p:nvSpPr>
-        <p:spPr>
-          <a:xfrm>
-            <a:off x="75895" y="0"/>
-            <a:ext cx="8115300" cy="480060"/>
-          </a:xfrm>
-        </p:spPr>
-        <p:txBody>
-          <a:bodyPr wrap="square" lIns="0" rIns="0" tIns="0" bIns="0" anchor="ctr">
-            <a:noAutofit/>
-          </a:bodyPr>
-          <a:lstStyle/>
-          <a:p>
-            <a:pPr algn="l">
-              <a:lnSpc>
-                <a:spcPct val="110000"/>
-              </a:lnSpc>
-              <a:buNone/>
-              <a:defRPr sz="1400" b="0">
-                <a:solidFill>
-                  <a:srgbClr val="303437"/>
-                </a:solidFill>
-                <a:latin typeface="Noto Sans"/>
-              </a:defRPr>
-            </a:pPr>
-            <a:r>
-              <a:rPr sz="1400" b="1" lang="ja-JP" altLang="en-US">
-                <a:solidFill>
-                  <a:srgbClr val="FFFEF8"/>
-                </a:solidFill>
-                <a:latin typeface="Noto Sans"/>
-                <a:ea typeface="Noto Sans CJK JP"/>
-                <a:cs typeface="Noto Sans"/>
-              </a:rPr>
-              <a:t>Appendix: 2. 生成と採点の詳細</a:t>
-            </a:r>
-          </a:p>
-        </p:txBody>
-      </p:sp>
-      <p:sp>
-        <p:nvSpPr>
-          <p:cNvPr id="5" name="sources"/>
-          <p:cNvSpPr txBox="1"/>
-          <p:nvPr/>
-        </p:nvSpPr>
-        <p:spPr>
-          <a:xfrm>
-            <a:off x="502920" y="4700016"/>
-            <a:ext cx="8183879" cy="530352"/>
-          </a:xfrm>
-          <a:prstGeom prst="rect">
-            <a:avLst/>
-          </a:prstGeom>
-          <a:noFill/>
-        </p:spPr>
-        <p:txBody>
-          <a:bodyPr wrap="square" lIns="0" rIns="0" tIns="0" bIns="0">
-            <a:noAutofit/>
-          </a:bodyPr>
-          <a:lstStyle/>
-          <a:p>
-            <a:pPr algn="l">
-              <a:lnSpc>
-                <a:spcPts val="940"/>
-              </a:lnSpc>
-              <a:spcBef>
-                <a:spcPts val="0"/>
-              </a:spcBef>
-              <a:spcAft>
-                <a:spcPts val="140"/>
-              </a:spcAft>
-              <a:buNone/>
-              <a:defRPr sz="810" b="0">
-                <a:solidFill>
-                  <a:srgbClr val="303437"/>
-                </a:solidFill>
-                <a:latin typeface="Noto Sans"/>
-              </a:defRPr>
-            </a:pPr>
-            <a:r>
-              <a:rPr sz="810" b="0" lang="ja-JP" altLang="en-US">
-                <a:solidFill>
-                  <a:srgbClr val="626669"/>
-                </a:solidFill>
-                <a:latin typeface="Noto Sans"/>
-                <a:ea typeface="Noto Sans CJK JP"/>
-                <a:cs typeface="Noto Sans"/>
-              </a:rPr>
-              <a:t>[1] Stanford CRFM. NumeracyScenario, HELM v0.3.0.</a:t>
+              <a:t>[1] Stanford CRFM. NumeracyScenario（v0.3.0）。</a:t>
             </a:r>
             <a:r>
               <a:rPr sz="810" b="0" lang="ja-JP" altLang="en-US">
@@ -32037,7 +26291,7 @@
                 <a:ea typeface="Noto Sans CJK JP"/>
                 <a:cs typeface="Noto Sans"/>
               </a:rPr>
-              <a:t>Numeracyは、HELMで導入された人工生成の数値推論課題。入力と出力の組から式を推測する。</a:t>
+              <a:t>Numeracyは、入力と出力の数値の組から多項式の規則を推測し、新しい入力に対応する値を答える人工生成課題である。</a:t>
             </a:r>
           </a:p>
           <a:p>
@@ -32067,7 +26321,7 @@
                 <a:ea typeface="Noto Sans CJK JP"/>
                 <a:cs typeface="Noto Sans"/>
               </a:rPr>
-              <a:t>モデルには数値の組を示し、新しい入力に対応する値を出力させる。式そのものは入力に書かない。</a:t>
+              <a:t>Stanford CRFMを中心とする研究チームが2022年に設計した。公開生成器で式の係数と入力点を選び、学習用・評価用の数値を作る。</a:t>
             </a:r>
           </a:p>
           <a:p>
@@ -32097,7 +26351,7 @@
                 <a:ea typeface="Noto Sans CJK JP"/>
                 <a:cs typeface="Noto Sans"/>
               </a:rPr>
-              <a:t>ここでは、公開コードv0.3.0の生成器をseed=0で実行し、生成された実際のレコードを使う。</a:t>
+              <a:t>モデルには数値の対応を見せる。式そのものは示さず、新しい入力に対する数値を予測させる。</a:t>
             </a:r>
           </a:p>
         </p:txBody>
@@ -32250,7 +26504,7 @@
                 <a:ea typeface="Noto Sans CJK JP"/>
                 <a:cs typeface="Noto Sans"/>
               </a:rPr>
-              <a:t>[2] Stanford CRFM. NumeracyScenario, HELM v0.3.0.</a:t>
+              <a:t>[2] Stanford CRFM. NumeracyScenario（v0.3.0）。</a:t>
             </a:r>
             <a:r>
               <a:rPr sz="810" b="0" lang="ja-JP" altLang="en-US">
@@ -32274,361 +26528,6 @@
                 <a:hlinkClick r:id="rId3"/>
               </a:rPr>
               <a:t>https://github.com/stanford-crfm/helm/blob/v0.3.0/src/helm/benchmark/scenarios/numeracy_scenario.py</a:t>
-            </a:r>
-          </a:p>
-        </p:txBody>
-      </p:sp>
-    </p:spTree>
-  </p:cSld>
-  <p:clrMapOvr>
-    <a:masterClrMapping/>
-  </p:clrMapOvr>
-</p:sld>
-</file>
-
-<file path=ppt/slides/slide50.xml><?xml version="1.0" encoding="utf-8"?>
-<p:sld xmlns:a="http://schemas.openxmlformats.org/drawingml/2006/main" xmlns:p="http://schemas.openxmlformats.org/presentationml/2006/main" xmlns:r="http://schemas.openxmlformats.org/officeDocument/2006/relationships">
-  <p:cSld>
-    <p:spTree>
-      <p:nvGrpSpPr>
-        <p:cNvPr id="1" name=""/>
-        <p:cNvGrpSpPr/>
-        <p:nvPr/>
-      </p:nvGrpSpPr>
-      <p:grpSpPr/>
-      <p:sp>
-        <p:nvSpPr>
-          <p:cNvPr id="2" name="Title 1"/>
-          <p:cNvSpPr>
-            <a:spLocks noGrp="1"/>
-          </p:cNvSpPr>
-          <p:nvPr>
-            <p:ph type="title"/>
-          </p:nvPr>
-        </p:nvSpPr>
-        <p:spPr>
-          <a:xfrm>
-            <a:off x="468172" y="650138"/>
-            <a:ext cx="8206740" cy="616305"/>
-          </a:xfrm>
-        </p:spPr>
-        <p:txBody>
-          <a:bodyPr wrap="square" lIns="0" rIns="0" tIns="0" bIns="0">
-            <a:noAutofit/>
-          </a:bodyPr>
-          <a:lstStyle/>
-          <a:p>
-            <a:pPr algn="l">
-              <a:lnSpc>
-                <a:spcPct val="110000"/>
-              </a:lnSpc>
-              <a:buNone/>
-              <a:defRPr sz="2800" b="0">
-                <a:solidFill>
-                  <a:srgbClr val="303437"/>
-                </a:solidFill>
-                <a:latin typeface="Noto Sans"/>
-              </a:defRPr>
-            </a:pPr>
-            <a:r>
-              <a:rPr sz="2800" b="1" lang="ja-JP" altLang="en-US">
-                <a:solidFill>
-                  <a:srgbClr val="303437"/>
-                </a:solidFill>
-                <a:latin typeface="Noto Sans"/>
-                <a:ea typeface="Noto Sans CJK JP"/>
-                <a:cs typeface="Noto Sans"/>
-              </a:rPr>
-              <a:t>Numeracy-600Kは別の自然言語データ</a:t>
-            </a:r>
-          </a:p>
-        </p:txBody>
-      </p:sp>
-      <p:sp>
-        <p:nvSpPr>
-          <p:cNvPr id="3" name="Text Placeholder 2"/>
-          <p:cNvSpPr>
-            <a:spLocks noGrp="1"/>
-          </p:cNvSpPr>
-          <p:nvPr>
-            <p:ph type="body" idx="1"/>
-          </p:nvPr>
-        </p:nvSpPr>
-        <p:spPr>
-          <a:xfrm>
-            <a:off x="594360" y="1463040"/>
-            <a:ext cx="7955279" cy="3044952"/>
-          </a:xfrm>
-        </p:spPr>
-        <p:txBody>
-          <a:bodyPr wrap="square" tIns="91440" bIns="91440">
-            <a:noAutofit/>
-          </a:bodyPr>
-          <a:lstStyle/>
-          <a:p>
-            <a:pPr marL="457200" indent="-355600">
-              <a:lnSpc>
-                <a:spcPts val="2499"/>
-              </a:lnSpc>
-              <a:spcAft>
-                <a:spcPts val="700"/>
-              </a:spcAft>
-              <a:buSzPct val="63333"/>
-              <a:buFont typeface="Noto Sans CJK JP"/>
-              <a:buChar char="●"/>
-              <a:defRPr sz="2100" b="0">
-                <a:solidFill>
-                  <a:srgbClr val="303437"/>
-                </a:solidFill>
-                <a:latin typeface="Noto Sans"/>
-              </a:defRPr>
-            </a:pPr>
-            <a:r>
-              <a:rPr sz="2100" b="0" lang="ja-JP" altLang="en-US">
-                <a:solidFill>
-                  <a:srgbClr val="303437"/>
-                </a:solidFill>
-                <a:latin typeface="Noto Sans"/>
-                <a:ea typeface="Noto Sans CJK JP"/>
-                <a:cs typeface="Noto Sans"/>
-              </a:rPr>
-              <a:t>Numeracy-600Kは、ニュース見出しや市況コメントに現れる数値の大きさを扱う、2019年の別データセット。</a:t>
-            </a:r>
-          </a:p>
-          <a:p>
-            <a:pPr marL="457200" indent="-355600">
-              <a:lnSpc>
-                <a:spcPts val="2499"/>
-              </a:lnSpc>
-              <a:spcAft>
-                <a:spcPts val="700"/>
-              </a:spcAft>
-              <a:buSzPct val="63333"/>
-              <a:buFont typeface="Noto Sans CJK JP"/>
-              <a:buChar char="●"/>
-              <a:defRPr sz="2100" b="0">
-                <a:solidFill>
-                  <a:srgbClr val="303437"/>
-                </a:solidFill>
-                <a:latin typeface="Noto Sans"/>
-              </a:defRPr>
-            </a:pPr>
-            <a:r>
-              <a:rPr sz="2100" b="0" lang="ja-JP" altLang="en-US">
-                <a:solidFill>
-                  <a:srgbClr val="303437"/>
-                </a:solidFill>
-                <a:latin typeface="Noto Sans"/>
-                <a:ea typeface="Noto Sans CJK JP"/>
-                <a:cs typeface="Noto Sans"/>
-              </a:rPr>
-              <a:t>HELMのNumeracyは、人工生成した入出力の組から多項式の値を推測する。質問・文章や利用する指標が異なる。</a:t>
-            </a:r>
-          </a:p>
-          <a:p>
-            <a:pPr marL="457200" indent="-355600">
-              <a:lnSpc>
-                <a:spcPts val="2499"/>
-              </a:lnSpc>
-              <a:spcAft>
-                <a:spcPts val="0"/>
-              </a:spcAft>
-              <a:buSzPct val="63333"/>
-              <a:buFont typeface="Noto Sans CJK JP"/>
-              <a:buChar char="●"/>
-              <a:defRPr sz="2100" b="0">
-                <a:solidFill>
-                  <a:srgbClr val="303437"/>
-                </a:solidFill>
-                <a:latin typeface="Noto Sans"/>
-              </a:defRPr>
-            </a:pPr>
-            <a:r>
-              <a:rPr sz="2100" b="0" lang="ja-JP" altLang="en-US">
-                <a:solidFill>
-                  <a:srgbClr val="303437"/>
-                </a:solidFill>
-                <a:latin typeface="Noto Sans"/>
-                <a:ea typeface="Noto Sans CJK JP"/>
-                <a:cs typeface="Noto Sans"/>
-              </a:rPr>
-              <a:t>HELMの論文では数値関係を推測する課題をnumeracy_predictionと呼び、公開コードではnumeracyとして実装している。</a:t>
-            </a:r>
-          </a:p>
-        </p:txBody>
-      </p:sp>
-      <p:sp>
-        <p:nvSpPr>
-          <p:cNvPr id="4" name="Title 3"/>
-          <p:cNvSpPr>
-            <a:spLocks noGrp="1"/>
-          </p:cNvSpPr>
-          <p:nvPr>
-            <p:ph type="title" idx="2"/>
-          </p:nvPr>
-        </p:nvSpPr>
-        <p:spPr>
-          <a:xfrm>
-            <a:off x="75895" y="0"/>
-            <a:ext cx="8115300" cy="480060"/>
-          </a:xfrm>
-        </p:spPr>
-        <p:txBody>
-          <a:bodyPr wrap="square" lIns="0" rIns="0" tIns="0" bIns="0" anchor="ctr">
-            <a:noAutofit/>
-          </a:bodyPr>
-          <a:lstStyle/>
-          <a:p>
-            <a:pPr algn="l">
-              <a:lnSpc>
-                <a:spcPct val="110000"/>
-              </a:lnSpc>
-              <a:buNone/>
-              <a:defRPr sz="1400" b="0">
-                <a:solidFill>
-                  <a:srgbClr val="303437"/>
-                </a:solidFill>
-                <a:latin typeface="Noto Sans"/>
-              </a:defRPr>
-            </a:pPr>
-            <a:r>
-              <a:rPr sz="1400" b="1" lang="ja-JP" altLang="en-US">
-                <a:solidFill>
-                  <a:srgbClr val="FFFEF8"/>
-                </a:solidFill>
-                <a:latin typeface="Noto Sans"/>
-                <a:ea typeface="Noto Sans CJK JP"/>
-                <a:cs typeface="Noto Sans"/>
-              </a:rPr>
-              <a:t>Appendix: 2. 生成と採点の詳細</a:t>
-            </a:r>
-          </a:p>
-        </p:txBody>
-      </p:sp>
-      <p:sp>
-        <p:nvSpPr>
-          <p:cNvPr id="5" name="sources"/>
-          <p:cNvSpPr txBox="1"/>
-          <p:nvPr/>
-        </p:nvSpPr>
-        <p:spPr>
-          <a:xfrm>
-            <a:off x="502920" y="4700016"/>
-            <a:ext cx="8183879" cy="530352"/>
-          </a:xfrm>
-          <a:prstGeom prst="rect">
-            <a:avLst/>
-          </a:prstGeom>
-          <a:noFill/>
-        </p:spPr>
-        <p:txBody>
-          <a:bodyPr wrap="square" lIns="0" rIns="0" tIns="0" bIns="0">
-            <a:noAutofit/>
-          </a:bodyPr>
-          <a:lstStyle/>
-          <a:p>
-            <a:pPr algn="l">
-              <a:lnSpc>
-                <a:spcPts val="940"/>
-              </a:lnSpc>
-              <a:spcBef>
-                <a:spcPts val="0"/>
-              </a:spcBef>
-              <a:spcAft>
-                <a:spcPts val="140"/>
-              </a:spcAft>
-              <a:buNone/>
-              <a:defRPr sz="810" b="0">
-                <a:solidFill>
-                  <a:srgbClr val="303437"/>
-                </a:solidFill>
-                <a:latin typeface="Noto Sans"/>
-              </a:defRPr>
-            </a:pPr>
-            <a:r>
-              <a:rPr sz="810" b="0" lang="ja-JP" altLang="en-US">
-                <a:solidFill>
-                  <a:srgbClr val="626669"/>
-                </a:solidFill>
-                <a:latin typeface="Noto Sans"/>
-                <a:ea typeface="Noto Sans CJK JP"/>
-                <a:cs typeface="Noto Sans"/>
-              </a:rPr>
-              <a:t>[1] Chen, Huang, Takamura &amp; Chen (2019). Numeracy-600K. ACL.</a:t>
-            </a:r>
-            <a:r>
-              <a:rPr sz="810" b="0" lang="ja-JP" altLang="en-US">
-                <a:solidFill>
-                  <a:srgbClr val="626669"/>
-                </a:solidFill>
-                <a:latin typeface="Noto Sans"/>
-                <a:ea typeface="Noto Sans CJK JP"/>
-                <a:cs typeface="Noto Sans"/>
-              </a:rPr>
-              <a:t>  </a:t>
-            </a:r>
-            <a:r>
-              <a:rPr sz="810" b="0" lang="ja-JP" altLang="en-US">
-                <a:solidFill>
-                  <a:srgbClr val="626669"/>
-                </a:solidFill>
-                <a:latin typeface="Noto Sans"/>
-                <a:ea typeface="Noto Sans CJK JP"/>
-                <a:cs typeface="Noto Sans"/>
-                <a:hlinkClick r:id="rId2"/>
-              </a:rPr>
-              <a:t>https://aclanthology.org/P19-1635/</a:t>
-            </a:r>
-          </a:p>
-          <a:p>
-            <a:pPr>
-              <a:lnSpc>
-                <a:spcPts val="940"/>
-              </a:lnSpc>
-              <a:spcAft>
-                <a:spcPts val="140"/>
-              </a:spcAft>
-              <a:buNone/>
-              <a:defRPr sz="810" b="0">
-                <a:solidFill>
-                  <a:srgbClr val="303437"/>
-                </a:solidFill>
-                <a:latin typeface="Noto Sans"/>
-              </a:defRPr>
-            </a:pPr>
-            <a:r>
-              <a:rPr sz="810" b="0" lang="ja-JP" altLang="en-US">
-                <a:solidFill>
-                  <a:srgbClr val="626669"/>
-                </a:solidFill>
-                <a:latin typeface="Noto Sans"/>
-                <a:ea typeface="Noto Sans CJK JP"/>
-                <a:cs typeface="Noto Sans"/>
-              </a:rPr>
-              <a:t>[2] Liang et al. (2023). Holistic Evaluation of Language Models. TMLR.</a:t>
-            </a:r>
-            <a:r>
-              <a:rPr sz="810" b="0" lang="ja-JP" altLang="en-US">
-                <a:solidFill>
-                  <a:srgbClr val="626669"/>
-                </a:solidFill>
-                <a:latin typeface="Noto Sans"/>
-                <a:ea typeface="Noto Sans CJK JP"/>
-                <a:cs typeface="Noto Sans"/>
-              </a:rPr>
-              <a:t>  </a:t>
-            </a:r>
-            <a:r>
-              <a:rPr sz="810" b="0" lang="ja-JP" altLang="en-US">
-                <a:solidFill>
-                  <a:srgbClr val="626669"/>
-                </a:solidFill>
-                <a:latin typeface="Noto Sans"/>
-                <a:ea typeface="Noto Sans CJK JP"/>
-                <a:cs typeface="Noto Sans"/>
-                <a:hlinkClick r:id="rId3"/>
-              </a:rPr>
-              <a:t>https://arxiv.org/abs/2211.09110</a:t>
             </a:r>
           </a:p>
         </p:txBody>
@@ -32756,7 +26655,7 @@
         <p:spPr>
           <a:xfrm>
             <a:off x="548640" y="1463040"/>
-            <a:ext cx="8046720" cy="1340358"/>
+            <a:ext cx="8046720" cy="1568958"/>
           </a:xfrm>
           <a:prstGeom prst="rect">
             <a:avLst/>
@@ -32904,7 +26803,7 @@
         <p:spPr>
           <a:xfrm>
             <a:off x="548640" y="3085846"/>
-            <a:ext cx="8046720" cy="1340358"/>
+            <a:ext cx="8046720" cy="1568958"/>
           </a:xfrm>
           <a:prstGeom prst="rect">
             <a:avLst/>
@@ -32975,7 +26874,7 @@
                 <a:ea typeface="Noto Sans CJK JP"/>
                 <a:cs typeface="Noto Sans"/>
               </a:rPr>
-              <a:t>Stanford CRFM (2023). HELM v0.3.0, Python implementation.</a:t>
+              <a:t>Stanford CRFM (n.d.). NumeracyScenario v0.3.0（2026-10-18参照）。</a:t>
             </a:r>
           </a:p>
           <a:p>
@@ -33039,826 +26938,6 @@
                 <a:hlinkClick r:id="rId3"/>
               </a:rPr>
               <a:t>https://github.com/stanford-crfm/helm/blob/v0.3.0/src/helm/benchmark/scenarios/numeracy_scenario.py</a:t>
-            </a:r>
-          </a:p>
-        </p:txBody>
-      </p:sp>
-    </p:spTree>
-  </p:cSld>
-  <p:clrMapOvr>
-    <a:masterClrMapping/>
-  </p:clrMapOvr>
-</p:sld>
-</file>
-
-<file path=ppt/slides/slide52.xml><?xml version="1.0" encoding="utf-8"?>
-<p:sld xmlns:a="http://schemas.openxmlformats.org/drawingml/2006/main" xmlns:p="http://schemas.openxmlformats.org/presentationml/2006/main" xmlns:r="http://schemas.openxmlformats.org/officeDocument/2006/relationships">
-  <p:cSld>
-    <p:spTree>
-      <p:nvGrpSpPr>
-        <p:cNvPr id="1" name=""/>
-        <p:cNvGrpSpPr/>
-        <p:nvPr/>
-      </p:nvGrpSpPr>
-      <p:grpSpPr/>
-      <p:sp>
-        <p:nvSpPr>
-          <p:cNvPr id="2" name="Title 1"/>
-          <p:cNvSpPr>
-            <a:spLocks noGrp="1"/>
-          </p:cNvSpPr>
-          <p:nvPr>
-            <p:ph type="title"/>
-          </p:nvPr>
-        </p:nvSpPr>
-        <p:spPr>
-          <a:xfrm>
-            <a:off x="468172" y="650138"/>
-            <a:ext cx="8206740" cy="616305"/>
-          </a:xfrm>
-        </p:spPr>
-        <p:txBody>
-          <a:bodyPr wrap="square" lIns="0" rIns="0" tIns="0" bIns="0">
-            <a:noAutofit/>
-          </a:bodyPr>
-          <a:lstStyle/>
-          <a:p>
-            <a:pPr algn="l">
-              <a:lnSpc>
-                <a:spcPct val="110000"/>
-              </a:lnSpc>
-              <a:buNone/>
-              <a:defRPr sz="2800" b="0">
-                <a:solidFill>
-                  <a:srgbClr val="303437"/>
-                </a:solidFill>
-                <a:latin typeface="Noto Sans"/>
-              </a:defRPr>
-            </a:pPr>
-            <a:r>
-              <a:rPr sz="2800" b="1" lang="ja-JP" altLang="en-US">
-                <a:solidFill>
-                  <a:srgbClr val="303437"/>
-                </a:solidFill>
-                <a:latin typeface="Noto Sans"/>
-                <a:ea typeface="Noto Sans CJK JP"/>
-                <a:cs typeface="Noto Sans"/>
-              </a:rPr>
-              <a:t>参考文献</a:t>
-            </a:r>
-          </a:p>
-        </p:txBody>
-      </p:sp>
-      <p:sp>
-        <p:nvSpPr>
-          <p:cNvPr id="3" name="Title 2"/>
-          <p:cNvSpPr>
-            <a:spLocks noGrp="1"/>
-          </p:cNvSpPr>
-          <p:nvPr>
-            <p:ph type="title" idx="2"/>
-          </p:nvPr>
-        </p:nvSpPr>
-        <p:spPr>
-          <a:xfrm>
-            <a:off x="75895" y="0"/>
-            <a:ext cx="8115300" cy="480060"/>
-          </a:xfrm>
-        </p:spPr>
-        <p:txBody>
-          <a:bodyPr wrap="square" lIns="0" rIns="0" tIns="0" bIns="0" anchor="ctr">
-            <a:noAutofit/>
-          </a:bodyPr>
-          <a:lstStyle/>
-          <a:p>
-            <a:pPr algn="l">
-              <a:lnSpc>
-                <a:spcPct val="110000"/>
-              </a:lnSpc>
-              <a:buNone/>
-              <a:defRPr sz="1400" b="0">
-                <a:solidFill>
-                  <a:srgbClr val="303437"/>
-                </a:solidFill>
-                <a:latin typeface="Noto Sans"/>
-              </a:defRPr>
-            </a:pPr>
-            <a:r>
-              <a:rPr sz="1400" b="1" lang="ja-JP" altLang="en-US">
-                <a:solidFill>
-                  <a:srgbClr val="FFFEF8"/>
-                </a:solidFill>
-                <a:latin typeface="Noto Sans"/>
-                <a:ea typeface="Noto Sans CJK JP"/>
-                <a:cs typeface="Noto Sans"/>
-              </a:rPr>
-              <a:t>Appendix: 3. 研究と参考文献</a:t>
-            </a:r>
-          </a:p>
-        </p:txBody>
-      </p:sp>
-      <p:sp>
-        <p:nvSpPr>
-          <p:cNvPr id="4" name="文献 1: get_numeracy_spec"/>
-          <p:cNvSpPr txBox="1"/>
-          <p:nvPr/>
-        </p:nvSpPr>
-        <p:spPr>
-          <a:xfrm>
-            <a:off x="548640" y="1463040"/>
-            <a:ext cx="8046720" cy="1094232"/>
-          </a:xfrm>
-          <a:prstGeom prst="rect">
-            <a:avLst/>
-          </a:prstGeom>
-          <a:noFill/>
-        </p:spPr>
-        <p:txBody>
-          <a:bodyPr wrap="square" lIns="0" rIns="0" tIns="0" bIns="0">
-            <a:noAutofit/>
-          </a:bodyPr>
-          <a:lstStyle/>
-          <a:p>
-            <a:pPr algn="l">
-              <a:lnSpc>
-                <a:spcPct val="114000"/>
-              </a:lnSpc>
-              <a:spcBef>
-                <a:spcPts val="0"/>
-              </a:spcBef>
-              <a:spcAft>
-                <a:spcPts val="400"/>
-              </a:spcAft>
-              <a:buNone/>
-              <a:defRPr sz="1900" b="0">
-                <a:solidFill>
-                  <a:srgbClr val="303437"/>
-                </a:solidFill>
-                <a:latin typeface="Noto Sans"/>
-              </a:defRPr>
-            </a:pPr>
-            <a:r>
-              <a:rPr sz="1900" b="1" lang="ja-JP" altLang="en-US">
-                <a:solidFill>
-                  <a:srgbClr val="303437"/>
-                </a:solidFill>
-                <a:latin typeface="Noto Sans"/>
-                <a:ea typeface="Noto Sans CJK JP"/>
-                <a:cs typeface="Noto Sans"/>
-              </a:rPr>
-              <a:t>get_numeracy_spec</a:t>
-            </a:r>
-          </a:p>
-          <a:p>
-            <a:pPr algn="l">
-              <a:lnSpc>
-                <a:spcPct val="114000"/>
-              </a:lnSpc>
-              <a:spcBef>
-                <a:spcPts val="0"/>
-              </a:spcBef>
-              <a:spcAft>
-                <a:spcPts val="400"/>
-              </a:spcAft>
-              <a:buNone/>
-              <a:defRPr sz="1250" b="0">
-                <a:solidFill>
-                  <a:srgbClr val="303437"/>
-                </a:solidFill>
-                <a:latin typeface="Noto Sans"/>
-              </a:defRPr>
-            </a:pPr>
-            <a:r>
-              <a:rPr sz="1250" b="0" lang="ja-JP" altLang="en-US">
-                <a:solidFill>
-                  <a:srgbClr val="626669"/>
-                </a:solidFill>
-                <a:latin typeface="Noto Sans"/>
-                <a:ea typeface="Noto Sans CJK JP"/>
-                <a:cs typeface="Noto Sans"/>
-              </a:rPr>
-              <a:t>Stanford CRFM (2023). HELM v0.3.0, run_specs.py.</a:t>
-            </a:r>
-          </a:p>
-          <a:p>
-            <a:pPr algn="l">
-              <a:lnSpc>
-                <a:spcPct val="114000"/>
-              </a:lnSpc>
-              <a:spcBef>
-                <a:spcPts val="0"/>
-              </a:spcBef>
-              <a:spcAft>
-                <a:spcPts val="400"/>
-              </a:spcAft>
-              <a:buNone/>
-              <a:defRPr sz="1700" b="0">
-                <a:solidFill>
-                  <a:srgbClr val="303437"/>
-                </a:solidFill>
-                <a:latin typeface="Noto Sans"/>
-              </a:defRPr>
-            </a:pPr>
-            <a:r>
-              <a:rPr sz="1700" b="0" lang="ja-JP" altLang="en-US">
-                <a:solidFill>
-                  <a:srgbClr val="303437"/>
-                </a:solidFill>
-                <a:latin typeface="Noto Sans"/>
-                <a:ea typeface="Noto Sans CJK JP"/>
-                <a:cs typeface="Noto Sans"/>
-              </a:rPr>
-              <a:t>モード別の提示例数、評価件数、生成方法と既定・任意の指標を設定する。</a:t>
-            </a:r>
-          </a:p>
-          <a:p>
-            <a:pPr algn="l">
-              <a:lnSpc>
-                <a:spcPct val="114000"/>
-              </a:lnSpc>
-              <a:spcBef>
-                <a:spcPts val="0"/>
-              </a:spcBef>
-              <a:spcAft>
-                <a:spcPts val="0"/>
-              </a:spcAft>
-              <a:buNone/>
-              <a:defRPr sz="1150" b="0">
-                <a:solidFill>
-                  <a:srgbClr val="303437"/>
-                </a:solidFill>
-                <a:latin typeface="Noto Sans"/>
-              </a:defRPr>
-            </a:pPr>
-            <a:r>
-              <a:rPr sz="1150" b="0" lang="ja-JP" altLang="en-US">
-                <a:solidFill>
-                  <a:srgbClr val="626669"/>
-                </a:solidFill>
-                <a:latin typeface="Noto Sans"/>
-                <a:ea typeface="Noto Sans CJK JP"/>
-                <a:cs typeface="Noto Sans"/>
-                <a:hlinkClick r:id="rId2"/>
-              </a:rPr>
-              <a:t>https://github.com/stanford-crfm/helm/blob/v0.3.0/src/helm/benchmark/run_specs.py</a:t>
-            </a:r>
-          </a:p>
-        </p:txBody>
-      </p:sp>
-      <p:sp>
-        <p:nvSpPr>
-          <p:cNvPr id="5" name="文献 2: BasicMetric: absolute_value_difference"/>
-          <p:cNvSpPr txBox="1"/>
-          <p:nvPr/>
-        </p:nvSpPr>
-        <p:spPr>
-          <a:xfrm>
-            <a:off x="548640" y="2839719"/>
-            <a:ext cx="8046720" cy="1094232"/>
-          </a:xfrm>
-          <a:prstGeom prst="rect">
-            <a:avLst/>
-          </a:prstGeom>
-          <a:noFill/>
-        </p:spPr>
-        <p:txBody>
-          <a:bodyPr wrap="square" lIns="0" rIns="0" tIns="0" bIns="0">
-            <a:noAutofit/>
-          </a:bodyPr>
-          <a:lstStyle/>
-          <a:p>
-            <a:pPr algn="l">
-              <a:lnSpc>
-                <a:spcPct val="114000"/>
-              </a:lnSpc>
-              <a:spcBef>
-                <a:spcPts val="0"/>
-              </a:spcBef>
-              <a:spcAft>
-                <a:spcPts val="400"/>
-              </a:spcAft>
-              <a:buNone/>
-              <a:defRPr sz="1900" b="0">
-                <a:solidFill>
-                  <a:srgbClr val="303437"/>
-                </a:solidFill>
-                <a:latin typeface="Noto Sans"/>
-              </a:defRPr>
-            </a:pPr>
-            <a:r>
-              <a:rPr sz="1900" b="1" lang="ja-JP" altLang="en-US">
-                <a:solidFill>
-                  <a:srgbClr val="303437"/>
-                </a:solidFill>
-                <a:latin typeface="Noto Sans"/>
-                <a:ea typeface="Noto Sans CJK JP"/>
-                <a:cs typeface="Noto Sans"/>
-              </a:rPr>
-              <a:t>BasicMetric: absolute_value_difference</a:t>
-            </a:r>
-          </a:p>
-          <a:p>
-            <a:pPr algn="l">
-              <a:lnSpc>
-                <a:spcPct val="114000"/>
-              </a:lnSpc>
-              <a:spcBef>
-                <a:spcPts val="0"/>
-              </a:spcBef>
-              <a:spcAft>
-                <a:spcPts val="400"/>
-              </a:spcAft>
-              <a:buNone/>
-              <a:defRPr sz="1250" b="0">
-                <a:solidFill>
-                  <a:srgbClr val="303437"/>
-                </a:solidFill>
-                <a:latin typeface="Noto Sans"/>
-              </a:defRPr>
-            </a:pPr>
-            <a:r>
-              <a:rPr sz="1250" b="0" lang="ja-JP" altLang="en-US">
-                <a:solidFill>
-                  <a:srgbClr val="626669"/>
-                </a:solidFill>
-                <a:latin typeface="Noto Sans"/>
-                <a:ea typeface="Noto Sans CJK JP"/>
-                <a:cs typeface="Noto Sans"/>
-              </a:rPr>
-              <a:t>Stanford CRFM (2023). HELM v0.3.0, basic_metrics.py.</a:t>
-            </a:r>
-          </a:p>
-          <a:p>
-            <a:pPr algn="l">
-              <a:lnSpc>
-                <a:spcPct val="114000"/>
-              </a:lnSpc>
-              <a:spcBef>
-                <a:spcPts val="0"/>
-              </a:spcBef>
-              <a:spcAft>
-                <a:spcPts val="400"/>
-              </a:spcAft>
-              <a:buNone/>
-              <a:defRPr sz="1700" b="0">
-                <a:solidFill>
-                  <a:srgbClr val="303437"/>
-                </a:solidFill>
-                <a:latin typeface="Noto Sans"/>
-              </a:defRPr>
-            </a:pPr>
-            <a:r>
-              <a:rPr sz="1700" b="0" lang="ja-JP" altLang="en-US">
-                <a:solidFill>
-                  <a:srgbClr val="303437"/>
-                </a:solidFill>
-                <a:latin typeface="Noto Sans"/>
-                <a:ea typeface="Noto Sans CJK JP"/>
-                <a:cs typeface="Noto Sans"/>
-              </a:rPr>
-              <a:t>出力の整数変換と絶対誤差、文字列一致などの基本的な採点処理を実装する。</a:t>
-            </a:r>
-          </a:p>
-          <a:p>
-            <a:pPr algn="l">
-              <a:lnSpc>
-                <a:spcPct val="114000"/>
-              </a:lnSpc>
-              <a:spcBef>
-                <a:spcPts val="0"/>
-              </a:spcBef>
-              <a:spcAft>
-                <a:spcPts val="0"/>
-              </a:spcAft>
-              <a:buNone/>
-              <a:defRPr sz="1150" b="0">
-                <a:solidFill>
-                  <a:srgbClr val="303437"/>
-                </a:solidFill>
-                <a:latin typeface="Noto Sans"/>
-              </a:defRPr>
-            </a:pPr>
-            <a:r>
-              <a:rPr sz="1150" b="0" lang="ja-JP" altLang="en-US">
-                <a:solidFill>
-                  <a:srgbClr val="626669"/>
-                </a:solidFill>
-                <a:latin typeface="Noto Sans"/>
-                <a:ea typeface="Noto Sans CJK JP"/>
-                <a:cs typeface="Noto Sans"/>
-                <a:hlinkClick r:id="rId3"/>
-              </a:rPr>
-              <a:t>https://github.com/stanford-crfm/helm/blob/v0.3.0/src/helm/benchmark/metrics/basic_metrics.py</a:t>
-            </a:r>
-          </a:p>
-        </p:txBody>
-      </p:sp>
-    </p:spTree>
-  </p:cSld>
-  <p:clrMapOvr>
-    <a:masterClrMapping/>
-  </p:clrMapOvr>
-</p:sld>
-</file>
-
-<file path=ppt/slides/slide53.xml><?xml version="1.0" encoding="utf-8"?>
-<p:sld xmlns:a="http://schemas.openxmlformats.org/drawingml/2006/main" xmlns:p="http://schemas.openxmlformats.org/presentationml/2006/main" xmlns:r="http://schemas.openxmlformats.org/officeDocument/2006/relationships">
-  <p:cSld>
-    <p:spTree>
-      <p:nvGrpSpPr>
-        <p:cNvPr id="1" name=""/>
-        <p:cNvGrpSpPr/>
-        <p:nvPr/>
-      </p:nvGrpSpPr>
-      <p:grpSpPr/>
-      <p:sp>
-        <p:nvSpPr>
-          <p:cNvPr id="2" name="Title 1"/>
-          <p:cNvSpPr>
-            <a:spLocks noGrp="1"/>
-          </p:cNvSpPr>
-          <p:nvPr>
-            <p:ph type="title"/>
-          </p:nvPr>
-        </p:nvSpPr>
-        <p:spPr>
-          <a:xfrm>
-            <a:off x="468172" y="650138"/>
-            <a:ext cx="8206740" cy="616305"/>
-          </a:xfrm>
-        </p:spPr>
-        <p:txBody>
-          <a:bodyPr wrap="square" lIns="0" rIns="0" tIns="0" bIns="0">
-            <a:noAutofit/>
-          </a:bodyPr>
-          <a:lstStyle/>
-          <a:p>
-            <a:pPr algn="l">
-              <a:lnSpc>
-                <a:spcPct val="110000"/>
-              </a:lnSpc>
-              <a:buNone/>
-              <a:defRPr sz="2800" b="0">
-                <a:solidFill>
-                  <a:srgbClr val="303437"/>
-                </a:solidFill>
-                <a:latin typeface="Noto Sans"/>
-              </a:defRPr>
-            </a:pPr>
-            <a:r>
-              <a:rPr sz="2800" b="1" lang="ja-JP" altLang="en-US">
-                <a:solidFill>
-                  <a:srgbClr val="303437"/>
-                </a:solidFill>
-                <a:latin typeface="Noto Sans"/>
-                <a:ea typeface="Noto Sans CJK JP"/>
-                <a:cs typeface="Noto Sans"/>
-              </a:rPr>
-              <a:t>参考文献</a:t>
-            </a:r>
-          </a:p>
-        </p:txBody>
-      </p:sp>
-      <p:sp>
-        <p:nvSpPr>
-          <p:cNvPr id="3" name="Title 2"/>
-          <p:cNvSpPr>
-            <a:spLocks noGrp="1"/>
-          </p:cNvSpPr>
-          <p:nvPr>
-            <p:ph type="title" idx="2"/>
-          </p:nvPr>
-        </p:nvSpPr>
-        <p:spPr>
-          <a:xfrm>
-            <a:off x="75895" y="0"/>
-            <a:ext cx="8115300" cy="480060"/>
-          </a:xfrm>
-        </p:spPr>
-        <p:txBody>
-          <a:bodyPr wrap="square" lIns="0" rIns="0" tIns="0" bIns="0" anchor="ctr">
-            <a:noAutofit/>
-          </a:bodyPr>
-          <a:lstStyle/>
-          <a:p>
-            <a:pPr algn="l">
-              <a:lnSpc>
-                <a:spcPct val="110000"/>
-              </a:lnSpc>
-              <a:buNone/>
-              <a:defRPr sz="1400" b="0">
-                <a:solidFill>
-                  <a:srgbClr val="303437"/>
-                </a:solidFill>
-                <a:latin typeface="Noto Sans"/>
-              </a:defRPr>
-            </a:pPr>
-            <a:r>
-              <a:rPr sz="1400" b="1" lang="ja-JP" altLang="en-US">
-                <a:solidFill>
-                  <a:srgbClr val="FFFEF8"/>
-                </a:solidFill>
-                <a:latin typeface="Noto Sans"/>
-                <a:ea typeface="Noto Sans CJK JP"/>
-                <a:cs typeface="Noto Sans"/>
-              </a:rPr>
-              <a:t>Appendix: 3. 研究と参考文献</a:t>
-            </a:r>
-          </a:p>
-        </p:txBody>
-      </p:sp>
-      <p:sp>
-        <p:nvSpPr>
-          <p:cNvPr id="4" name="文献 1: DistanceMetric"/>
-          <p:cNvSpPr txBox="1"/>
-          <p:nvPr/>
-        </p:nvSpPr>
-        <p:spPr>
-          <a:xfrm>
-            <a:off x="548640" y="1463040"/>
-            <a:ext cx="8046720" cy="1340358"/>
-          </a:xfrm>
-          <a:prstGeom prst="rect">
-            <a:avLst/>
-          </a:prstGeom>
-          <a:noFill/>
-        </p:spPr>
-        <p:txBody>
-          <a:bodyPr wrap="square" lIns="0" rIns="0" tIns="0" bIns="0">
-            <a:noAutofit/>
-          </a:bodyPr>
-          <a:lstStyle/>
-          <a:p>
-            <a:pPr algn="l">
-              <a:lnSpc>
-                <a:spcPct val="114000"/>
-              </a:lnSpc>
-              <a:spcBef>
-                <a:spcPts val="0"/>
-              </a:spcBef>
-              <a:spcAft>
-                <a:spcPts val="400"/>
-              </a:spcAft>
-              <a:buNone/>
-              <a:defRPr sz="1900" b="0">
-                <a:solidFill>
-                  <a:srgbClr val="303437"/>
-                </a:solidFill>
-                <a:latin typeface="Noto Sans"/>
-              </a:defRPr>
-            </a:pPr>
-            <a:r>
-              <a:rPr sz="1900" b="1" lang="ja-JP" altLang="en-US">
-                <a:solidFill>
-                  <a:srgbClr val="303437"/>
-                </a:solidFill>
-                <a:latin typeface="Noto Sans"/>
-                <a:ea typeface="Noto Sans CJK JP"/>
-                <a:cs typeface="Noto Sans"/>
-              </a:rPr>
-              <a:t>DistanceMetric</a:t>
-            </a:r>
-          </a:p>
-          <a:p>
-            <a:pPr algn="l">
-              <a:lnSpc>
-                <a:spcPct val="114000"/>
-              </a:lnSpc>
-              <a:spcBef>
-                <a:spcPts val="0"/>
-              </a:spcBef>
-              <a:spcAft>
-                <a:spcPts val="400"/>
-              </a:spcAft>
-              <a:buNone/>
-              <a:defRPr sz="1250" b="0">
-                <a:solidFill>
-                  <a:srgbClr val="303437"/>
-                </a:solidFill>
-                <a:latin typeface="Noto Sans"/>
-              </a:defRPr>
-            </a:pPr>
-            <a:r>
-              <a:rPr sz="1250" b="0" lang="ja-JP" altLang="en-US">
-                <a:solidFill>
-                  <a:srgbClr val="626669"/>
-                </a:solidFill>
-                <a:latin typeface="Noto Sans"/>
-                <a:ea typeface="Noto Sans CJK JP"/>
-                <a:cs typeface="Noto Sans"/>
-              </a:rPr>
-              <a:t>Stanford CRFM (2023). HELM v0.3.0, numeracy_metrics.py.</a:t>
-            </a:r>
-          </a:p>
-          <a:p>
-            <a:pPr algn="l">
-              <a:lnSpc>
-                <a:spcPct val="114000"/>
-              </a:lnSpc>
-              <a:spcBef>
-                <a:spcPts val="0"/>
-              </a:spcBef>
-              <a:spcAft>
-                <a:spcPts val="400"/>
-              </a:spcAft>
-              <a:buNone/>
-              <a:defRPr sz="1700" b="0">
-                <a:solidFill>
-                  <a:srgbClr val="303437"/>
-                </a:solidFill>
-                <a:latin typeface="Noto Sans"/>
-              </a:defRPr>
-            </a:pPr>
-            <a:r>
-              <a:rPr sz="1700" b="0" lang="ja-JP" altLang="en-US">
-                <a:solidFill>
-                  <a:srgbClr val="303437"/>
-                </a:solidFill>
-                <a:latin typeface="Noto Sans"/>
-                <a:ea typeface="Noto Sans CJK JP"/>
-                <a:cs typeface="Noto Sans"/>
-              </a:rPr>
-              <a:t>予測点と曲線・曲面の最短距離、および整数として読める出力の割合を計算する。</a:t>
-            </a:r>
-          </a:p>
-          <a:p>
-            <a:pPr algn="l">
-              <a:lnSpc>
-                <a:spcPct val="114000"/>
-              </a:lnSpc>
-              <a:spcBef>
-                <a:spcPts val="0"/>
-              </a:spcBef>
-              <a:spcAft>
-                <a:spcPts val="0"/>
-              </a:spcAft>
-              <a:buNone/>
-              <a:defRPr sz="1150" b="0">
-                <a:solidFill>
-                  <a:srgbClr val="303437"/>
-                </a:solidFill>
-                <a:latin typeface="Noto Sans"/>
-              </a:defRPr>
-            </a:pPr>
-            <a:r>
-              <a:rPr sz="1150" b="0" lang="ja-JP" altLang="en-US">
-                <a:solidFill>
-                  <a:srgbClr val="626669"/>
-                </a:solidFill>
-                <a:latin typeface="Noto Sans"/>
-                <a:ea typeface="Noto Sans CJK JP"/>
-                <a:cs typeface="Noto Sans"/>
-                <a:hlinkClick r:id="rId2"/>
-              </a:rPr>
-              <a:t>https://github.com/stanford-crfm/helm/blob/v0.3.0/src/helm/benchmark/metrics/numeracy_metrics.py</a:t>
-            </a:r>
-          </a:p>
-        </p:txBody>
-      </p:sp>
-      <p:sp>
-        <p:nvSpPr>
-          <p:cNvPr id="5" name="文献 2: Numeracy-600K: Learning Numeracy for Detecting Exaggerated Information in Market Comments"/>
-          <p:cNvSpPr txBox="1"/>
-          <p:nvPr/>
-        </p:nvSpPr>
-        <p:spPr>
-          <a:xfrm>
-            <a:off x="548640" y="3085846"/>
-            <a:ext cx="8046720" cy="1615440"/>
-          </a:xfrm>
-          <a:prstGeom prst="rect">
-            <a:avLst/>
-          </a:prstGeom>
-          <a:noFill/>
-        </p:spPr>
-        <p:txBody>
-          <a:bodyPr wrap="square" lIns="0" rIns="0" tIns="0" bIns="0">
-            <a:noAutofit/>
-          </a:bodyPr>
-          <a:lstStyle/>
-          <a:p>
-            <a:pPr algn="l">
-              <a:lnSpc>
-                <a:spcPct val="114000"/>
-              </a:lnSpc>
-              <a:spcBef>
-                <a:spcPts val="0"/>
-              </a:spcBef>
-              <a:spcAft>
-                <a:spcPts val="400"/>
-              </a:spcAft>
-              <a:buNone/>
-              <a:defRPr sz="1900" b="0">
-                <a:solidFill>
-                  <a:srgbClr val="303437"/>
-                </a:solidFill>
-                <a:latin typeface="Noto Sans"/>
-              </a:defRPr>
-            </a:pPr>
-            <a:r>
-              <a:rPr sz="1900" b="1" lang="ja-JP" altLang="en-US">
-                <a:solidFill>
-                  <a:srgbClr val="303437"/>
-                </a:solidFill>
-                <a:latin typeface="Noto Sans"/>
-                <a:ea typeface="Noto Sans CJK JP"/>
-                <a:cs typeface="Noto Sans"/>
-              </a:rPr>
-              <a:t>Numeracy-600K: Learning Numeracy for Detecting Exaggerated Information in Market Comments</a:t>
-            </a:r>
-          </a:p>
-          <a:p>
-            <a:pPr algn="l">
-              <a:lnSpc>
-                <a:spcPct val="114000"/>
-              </a:lnSpc>
-              <a:spcBef>
-                <a:spcPts val="0"/>
-              </a:spcBef>
-              <a:spcAft>
-                <a:spcPts val="400"/>
-              </a:spcAft>
-              <a:buNone/>
-              <a:defRPr sz="1250" b="0">
-                <a:solidFill>
-                  <a:srgbClr val="303437"/>
-                </a:solidFill>
-                <a:latin typeface="Noto Sans"/>
-              </a:defRPr>
-            </a:pPr>
-            <a:r>
-              <a:rPr sz="1250" b="0" lang="ja-JP" altLang="en-US">
-                <a:solidFill>
-                  <a:srgbClr val="626669"/>
-                </a:solidFill>
-                <a:latin typeface="Noto Sans"/>
-                <a:ea typeface="Noto Sans CJK JP"/>
-                <a:cs typeface="Noto Sans"/>
-              </a:rPr>
-              <a:t>Chung-Chi Chen, Hen-Hsen Huang, Hiroya Takamura, Hsin-Hsi Chen (2019). ACL.</a:t>
-            </a:r>
-          </a:p>
-          <a:p>
-            <a:pPr algn="l">
-              <a:lnSpc>
-                <a:spcPct val="114000"/>
-              </a:lnSpc>
-              <a:spcBef>
-                <a:spcPts val="0"/>
-              </a:spcBef>
-              <a:spcAft>
-                <a:spcPts val="400"/>
-              </a:spcAft>
-              <a:buNone/>
-              <a:defRPr sz="1700" b="0">
-                <a:solidFill>
-                  <a:srgbClr val="303437"/>
-                </a:solidFill>
-                <a:latin typeface="Noto Sans"/>
-              </a:defRPr>
-            </a:pPr>
-            <a:r>
-              <a:rPr sz="1700" b="0" lang="ja-JP" altLang="en-US">
-                <a:solidFill>
-                  <a:srgbClr val="303437"/>
-                </a:solidFill>
-                <a:latin typeface="Noto Sans"/>
-                <a:ea typeface="Noto Sans CJK JP"/>
-                <a:cs typeface="Noto Sans"/>
-              </a:rPr>
-              <a:t>ニュース見出しと市況コメントの数値を集め、数の大きさの理解と誇張表現の検出を扱う。</a:t>
-            </a:r>
-          </a:p>
-          <a:p>
-            <a:pPr algn="l">
-              <a:lnSpc>
-                <a:spcPct val="114000"/>
-              </a:lnSpc>
-              <a:spcBef>
-                <a:spcPts val="0"/>
-              </a:spcBef>
-              <a:spcAft>
-                <a:spcPts val="0"/>
-              </a:spcAft>
-              <a:buNone/>
-              <a:defRPr sz="1150" b="0">
-                <a:solidFill>
-                  <a:srgbClr val="303437"/>
-                </a:solidFill>
-                <a:latin typeface="Noto Sans"/>
-              </a:defRPr>
-            </a:pPr>
-            <a:r>
-              <a:rPr sz="1150" b="0" lang="ja-JP" altLang="en-US">
-                <a:solidFill>
-                  <a:srgbClr val="626669"/>
-                </a:solidFill>
-                <a:latin typeface="Noto Sans"/>
-                <a:ea typeface="Noto Sans CJK JP"/>
-                <a:cs typeface="Noto Sans"/>
-                <a:hlinkClick r:id="rId3"/>
-              </a:rPr>
-              <a:t>https://aclanthology.org/P19-1635/</a:t>
             </a:r>
           </a:p>
         </p:txBody>
@@ -33924,7 +27003,7 @@
                 <a:ea typeface="Noto Sans CJK JP"/>
                 <a:cs typeface="Noto Sans"/>
               </a:rPr>
-              <a:t>訓練レコードをプロンプトの例に使う</a:t>
+              <a:t>数値の対応を見せ、別の入力の答えを尋ねる</a:t>
             </a:r>
           </a:p>
         </p:txBody>
@@ -33977,7 +27056,7 @@
                 <a:ea typeface="Noto Sans CJK JP"/>
                 <a:cs typeface="Noto Sans"/>
               </a:rPr>
-              <a:t>数値の対応を見せるtrainと、予測対象にするtestを生成する。関数を推測するための例をプロンプトに示す。</a:t>
+              <a:t>学習用の数値の組と、予測対象にする評価用の入力を生成する。モデルは、提示された入出力例を手掛かりに規則を推測する。</a:t>
             </a:r>
           </a:p>
           <a:p>
@@ -34007,37 +27086,7 @@
                 <a:ea typeface="Noto Sans CJK JP"/>
                 <a:cs typeface="Noto Sans"/>
               </a:rPr>
-              <a:t>standard／exampleの設定では、訓練例は最大100件、評価は100件、1試行。</a:t>
-            </a:r>
-          </a:p>
-          <a:p>
-            <a:pPr marL="457200" indent="-355600">
-              <a:lnSpc>
-                <a:spcPts val="2558"/>
-              </a:lnSpc>
-              <a:spcAft>
-                <a:spcPts val="0"/>
-              </a:spcAft>
-              <a:buSzPct val="61860"/>
-              <a:buFont typeface="Noto Sans CJK JP"/>
-              <a:buChar char="●"/>
-              <a:defRPr sz="2150" b="0">
-                <a:solidFill>
-                  <a:srgbClr val="303437"/>
-                </a:solidFill>
-                <a:latin typeface="Noto Sans"/>
-              </a:defRPr>
-            </a:pPr>
-            <a:r>
-              <a:rPr sz="2150" b="0" lang="ja-JP" altLang="en-US">
-                <a:solidFill>
-                  <a:srgbClr val="303437"/>
-                </a:solidFill>
-                <a:latin typeface="Noto Sans"/>
-                <a:ea typeface="Noto Sans CJK JP"/>
-                <a:cs typeface="Noto Sans"/>
-              </a:rPr>
-              <a:t>以下のページには、訓練100件の連続した冒頭4〜6件と、test入力1件の全文を示す。</a:t>
+              <a:t>次の実例では、学習用100組から抜粋した4〜6組と、評価用の入力1件を示す。各例の正解は、生成時に保存された式から計算できる。</a:t>
             </a:r>
           </a:p>
         </p:txBody>
@@ -34139,7 +27188,7 @@
                 <a:ea typeface="Noto Sans CJK JP"/>
                 <a:cs typeface="Noto Sans"/>
               </a:rPr>
-              <a:t>[1] Stanford CRFM. NumeracyScenario, HELM v0.3.0.</a:t>
+              <a:t>[1] Stanford CRFM. NumeracyScenario（v0.3.0）。</a:t>
             </a:r>
             <a:r>
               <a:rPr sz="810" b="0" lang="ja-JP" altLang="en-US">
@@ -34190,7 +27239,7 @@
                 <a:ea typeface="Noto Sans CJK JP"/>
                 <a:cs typeface="Noto Sans"/>
               </a:rPr>
-              <a:t>[2] Stanford CRFM. get_numeracy_spec, HELM v0.3.0.</a:t>
+              <a:t>[2] Stanford CRFM. get_numeracy_spec（v0.3.0）。</a:t>
             </a:r>
             <a:r>
               <a:rPr sz="810" b="0" lang="ja-JP" altLang="en-US">
@@ -34381,7 +27430,7 @@
                 <a:ea typeface="Noto Sans CJK JP"/>
                 <a:cs typeface="Noto Sans"/>
               </a:rPr>
-              <a:t>linear / mode=standard / seed=0 / test[0]</a:t>
+              <a:t>式の種類：linear</a:t>
             </a:r>
           </a:p>
         </p:txBody>
@@ -34435,7 +27484,7 @@
                 <a:ea typeface="Noto Sans CJK JP"/>
                 <a:cs typeface="Noto Sans"/>
               </a:rPr>
-              <a:t>原データ：訓練100件の先頭4件（連続）</a:t>
+              <a:t>学習用100組から4組を抜粋</a:t>
             </a:r>
           </a:p>
         </p:txBody>
@@ -34448,8 +27497,8 @@
         </p:nvSpPr>
         <p:spPr>
           <a:xfrm>
-            <a:off x="548640" y="1965960"/>
-            <a:ext cx="3886200" cy="1700353"/>
+            <a:off x="548640" y="1991360"/>
+            <a:ext cx="3886200" cy="1691887"/>
           </a:xfrm>
           <a:prstGeom prst="rect">
             <a:avLst/>
@@ -34477,7 +27526,7 @@
           </a:fontRef>
         </p:style>
         <p:txBody>
-          <a:bodyPr rtlCol="0" anchor="t" wrap="none" lIns="152400" rIns="152400" tIns="63500" bIns="127000">
+          <a:bodyPr rtlCol="0" anchor="t" wrap="none" lIns="152400" rIns="152400" tIns="38100" bIns="127000">
             <a:noAutofit/>
           </a:bodyPr>
           <a:lstStyle/>
@@ -34687,7 +27736,7 @@
                 <a:ea typeface="Noto Sans CJK JP"/>
                 <a:cs typeface="Noto Sans"/>
               </a:rPr>
-              <a:t>予測対象：testレコードの入力（全文）</a:t>
+              <a:t>予測する入力</a:t>
             </a:r>
           </a:p>
         </p:txBody>
@@ -34701,7 +27750,7 @@
         <p:spPr>
           <a:xfrm>
             <a:off x="4663440" y="1965960"/>
-            <a:ext cx="3931920" cy="541691"/>
+            <a:ext cx="3931920" cy="499358"/>
           </a:xfrm>
           <a:prstGeom prst="rect">
             <a:avLst/>
@@ -34923,7 +27972,7 @@
                 <a:ea typeface="Noto Sans CJK JP"/>
                 <a:cs typeface="Noto Sans"/>
               </a:rPr>
-              <a:t>参照メタデータ（入力には含めない）</a:t>
+              <a:t>正解の計算に使う式</a:t>
             </a:r>
           </a:p>
         </p:txBody>
@@ -35031,7 +28080,7 @@
                 <a:ea typeface="Noto Sans CJK JP"/>
                 <a:cs typeface="Noto Sans"/>
               </a:rPr>
-              <a:t>[1] HELM v0.3.0の公式生成器をseed=0で実行。Python 3.12 / NumPy 2.3.5。</a:t>
+              <a:t>[1] Stanford CRFM. NumeracyScenario（v0.3.0）。 </a:t>
             </a:r>
           </a:p>
           <a:p>
@@ -35176,7 +28225,7 @@
                 <a:ea typeface="Noto Sans CJK JP"/>
                 <a:cs typeface="Noto Sans"/>
               </a:rPr>
-              <a:t>この生成例の参照式はy=4x+4。x=15なら、4×15+4=64になる。</a:t>
+              <a:t>この例を生成した式はy=4x+4。x=15なら、4×15+4=64になる。</a:t>
             </a:r>
           </a:p>
           <a:p>
@@ -35206,37 +28255,7 @@
                 <a:ea typeface="Noto Sans CJK JP"/>
                 <a:cs typeface="Noto Sans"/>
               </a:rPr>
-              <a:t>入力として渡すのは、−82→−324、70→284などの値の組で、参照式は採点・検証用のメタデータに保存される。</a:t>
-            </a:r>
-          </a:p>
-          <a:p>
-            <a:pPr marL="457200" indent="-355600">
-              <a:lnSpc>
-                <a:spcPts val="2618"/>
-              </a:lnSpc>
-              <a:spcAft>
-                <a:spcPts val="0"/>
-              </a:spcAft>
-              <a:buSzPct val="60455"/>
-              <a:buFont typeface="Noto Sans CJK JP"/>
-              <a:buChar char="●"/>
-              <a:defRPr sz="2200" b="0">
-                <a:solidFill>
-                  <a:srgbClr val="303437"/>
-                </a:solidFill>
-                <a:latin typeface="Noto Sans"/>
-              </a:defRPr>
-            </a:pPr>
-            <a:r>
-              <a:rPr sz="2200" b="0" lang="ja-JP" altLang="en-US">
-                <a:solidFill>
-                  <a:srgbClr val="303437"/>
-                </a:solidFill>
-                <a:latin typeface="Noto Sans"/>
-                <a:ea typeface="Noto Sans CJK JP"/>
-                <a:cs typeface="Noto Sans"/>
-              </a:rPr>
-              <a:t>数字の並びから規則を推測し、新しい点へ適用することを測る。</a:t>
+              <a:t>モデルに見せるのは、−82→−324、70→284などの数値の対応である。例の間で共通する規則を見つけ、新しい入力へ適用する。</a:t>
             </a:r>
           </a:p>
         </p:txBody>
@@ -35338,7 +28357,7 @@
                 <a:ea typeface="Noto Sans CJK JP"/>
                 <a:cs typeface="Noto Sans"/>
               </a:rPr>
-              <a:t>[1] HELM v0.3.0の公式生成器をseed=0で実行。Python 3.12 / NumPy 2.3.5。</a:t>
+              <a:t>[1] Stanford CRFM. NumeracyScenario（v0.3.0）。 </a:t>
             </a:r>
           </a:p>
           <a:p>
@@ -35532,7 +28551,7 @@
                 <a:ea typeface="Noto Sans CJK JP"/>
                 <a:cs typeface="Noto Sans"/>
               </a:rPr>
-              <a:t>parabola / mode=standard / seed=0 / test[0]</a:t>
+              <a:t>式の種類：parabola</a:t>
             </a:r>
           </a:p>
         </p:txBody>
@@ -35586,7 +28605,7 @@
                 <a:ea typeface="Noto Sans CJK JP"/>
                 <a:cs typeface="Noto Sans"/>
               </a:rPr>
-              <a:t>原データ：訓練100件の先頭4件（連続）</a:t>
+              <a:t>学習用100組から4組を抜粋</a:t>
             </a:r>
           </a:p>
         </p:txBody>
@@ -35599,8 +28618,8 @@
         </p:nvSpPr>
         <p:spPr>
           <a:xfrm>
-            <a:off x="548640" y="1965960"/>
-            <a:ext cx="3886200" cy="1700353"/>
+            <a:off x="548640" y="1991360"/>
+            <a:ext cx="3886200" cy="1691887"/>
           </a:xfrm>
           <a:prstGeom prst="rect">
             <a:avLst/>
@@ -35628,7 +28647,7 @@
           </a:fontRef>
         </p:style>
         <p:txBody>
-          <a:bodyPr rtlCol="0" anchor="t" wrap="none" lIns="152400" rIns="152400" tIns="63500" bIns="127000">
+          <a:bodyPr rtlCol="0" anchor="t" wrap="none" lIns="152400" rIns="152400" tIns="38100" bIns="127000">
             <a:noAutofit/>
           </a:bodyPr>
           <a:lstStyle/>
@@ -35838,7 +28857,7 @@
                 <a:ea typeface="Noto Sans CJK JP"/>
                 <a:cs typeface="Noto Sans"/>
               </a:rPr>
-              <a:t>予測対象：testレコードの入力（全文）</a:t>
+              <a:t>予測する入力</a:t>
             </a:r>
           </a:p>
         </p:txBody>
@@ -35852,7 +28871,7 @@
         <p:spPr>
           <a:xfrm>
             <a:off x="4663440" y="1965960"/>
-            <a:ext cx="3931920" cy="541691"/>
+            <a:ext cx="3931920" cy="499358"/>
           </a:xfrm>
           <a:prstGeom prst="rect">
             <a:avLst/>
@@ -36074,7 +29093,7 @@
                 <a:ea typeface="Noto Sans CJK JP"/>
                 <a:cs typeface="Noto Sans"/>
               </a:rPr>
-              <a:t>参照メタデータ（入力には含めない）</a:t>
+              <a:t>正解の計算に使う式</a:t>
             </a:r>
           </a:p>
         </p:txBody>
@@ -36182,7 +29201,7 @@
                 <a:ea typeface="Noto Sans CJK JP"/>
                 <a:cs typeface="Noto Sans"/>
               </a:rPr>
-              <a:t>[1] HELM v0.3.0の公式生成器をseed=0で実行。Python 3.12 / NumPy 2.3.5。</a:t>
+              <a:t>[1] Stanford CRFM. NumeracyScenario（v0.3.0）。 </a:t>
             </a:r>
           </a:p>
           <a:p>
